--- a/files/week2/korean/Wk2_L8_slides.pptx
+++ b/files/week2/korean/Wk2_L8_slides.pptx
@@ -5,7 +5,7 @@
     <p:sldMasterId id="2147483689" r:id="rId1"/>
   </p:sldMasterIdLst>
   <p:notesMasterIdLst>
-    <p:notesMasterId r:id="rId35"/>
+    <p:notesMasterId r:id="rId34"/>
   </p:notesMasterIdLst>
   <p:sldIdLst>
     <p:sldId id="256" r:id="rId2"/>
@@ -31,16 +31,15 @@
     <p:sldId id="273" r:id="rId22"/>
     <p:sldId id="274" r:id="rId23"/>
     <p:sldId id="275" r:id="rId24"/>
-    <p:sldId id="276" r:id="rId25"/>
-    <p:sldId id="544" r:id="rId26"/>
-    <p:sldId id="501" r:id="rId27"/>
-    <p:sldId id="507" r:id="rId28"/>
-    <p:sldId id="509" r:id="rId29"/>
-    <p:sldId id="542" r:id="rId30"/>
-    <p:sldId id="543" r:id="rId31"/>
-    <p:sldId id="546" r:id="rId32"/>
-    <p:sldId id="548" r:id="rId33"/>
-    <p:sldId id="547" r:id="rId34"/>
+    <p:sldId id="544" r:id="rId25"/>
+    <p:sldId id="501" r:id="rId26"/>
+    <p:sldId id="507" r:id="rId27"/>
+    <p:sldId id="509" r:id="rId28"/>
+    <p:sldId id="542" r:id="rId29"/>
+    <p:sldId id="543" r:id="rId30"/>
+    <p:sldId id="546" r:id="rId31"/>
+    <p:sldId id="548" r:id="rId32"/>
+    <p:sldId id="547" r:id="rId33"/>
   </p:sldIdLst>
   <p:sldSz cx="12192000" cy="6858000"/>
   <p:notesSz cx="6858000" cy="9144000"/>
@@ -171,7 +170,6 @@
             <p14:sldId id="273"/>
             <p14:sldId id="274"/>
             <p14:sldId id="275"/>
-            <p14:sldId id="276"/>
             <p14:sldId id="544"/>
             <p14:sldId id="501"/>
             <p14:sldId id="507"/>
@@ -1736,90 +1734,6 @@
   <p:cSld>
     <p:spTree>
       <p:nvGrpSpPr>
-        <p:cNvPr id="1" name=""/>
-        <p:cNvGrpSpPr/>
-        <p:nvPr/>
-      </p:nvGrpSpPr>
-      <p:grpSpPr>
-        <a:xfrm>
-          <a:off x="0" y="0"/>
-          <a:ext cx="0" cy="0"/>
-          <a:chOff x="0" y="0"/>
-          <a:chExt cx="0" cy="0"/>
-        </a:xfrm>
-      </p:grpSpPr>
-      <p:sp>
-        <p:nvSpPr>
-          <p:cNvPr id="2" name="Slide Image Placeholder 1"/>
-          <p:cNvSpPr>
-            <a:spLocks noGrp="1" noRot="1" noChangeAspect="1"/>
-          </p:cNvSpPr>
-          <p:nvPr>
-            <p:ph type="sldImg"/>
-          </p:nvPr>
-        </p:nvSpPr>
-        <p:spPr/>
-      </p:sp>
-      <p:sp>
-        <p:nvSpPr>
-          <p:cNvPr id="3" name="Notes Placeholder 2"/>
-          <p:cNvSpPr>
-            <a:spLocks noGrp="1"/>
-          </p:cNvSpPr>
-          <p:nvPr>
-            <p:ph type="body" idx="1"/>
-          </p:nvPr>
-        </p:nvSpPr>
-        <p:spPr/>
-        <p:txBody>
-          <a:bodyPr/>
-          <a:lstStyle/>
-          <a:p>
-            <a:endParaRPr lang="en-US" dirty="0"/>
-          </a:p>
-        </p:txBody>
-      </p:sp>
-      <p:sp>
-        <p:nvSpPr>
-          <p:cNvPr id="4" name="Slide Number Placeholder 3"/>
-          <p:cNvSpPr>
-            <a:spLocks noGrp="1"/>
-          </p:cNvSpPr>
-          <p:nvPr>
-            <p:ph type="sldNum" sz="quarter" idx="10"/>
-          </p:nvPr>
-        </p:nvSpPr>
-        <p:spPr/>
-        <p:txBody>
-          <a:bodyPr/>
-          <a:lstStyle/>
-          <a:p>
-            <a:fld id="{F7021451-1387-4CA6-816F-3879F97B5CBC}" type="slidenum">
-              <a:rPr lang="en-US"/>
-              <a:t>24</a:t>
-            </a:fld>
-            <a:endParaRPr lang="en-US"/>
-          </a:p>
-        </p:txBody>
-      </p:sp>
-    </p:spTree>
-    <p:extLst>
-      <p:ext uri="{BB962C8B-B14F-4D97-AF65-F5344CB8AC3E}">
-        <p14:creationId xmlns:p14="http://schemas.microsoft.com/office/powerpoint/2010/main" val="1024086991"/>
-      </p:ext>
-    </p:extLst>
-  </p:cSld>
-  <p:clrMapOvr>
-    <a:masterClrMapping/>
-  </p:clrMapOvr>
-</p:notes>
-</file>
-
-<file path=ppt/notesSlides/notesSlide21.xml><?xml version="1.0" encoding="utf-8"?>
-<p:notes xmlns:a="http://schemas.openxmlformats.org/drawingml/2006/main" xmlns:r="http://schemas.openxmlformats.org/officeDocument/2006/relationships" xmlns:p="http://schemas.openxmlformats.org/presentationml/2006/main">
-  <p:cSld>
-    <p:spTree>
-      <p:nvGrpSpPr>
         <p:cNvPr id="1" name="">
           <a:extLst>
             <a:ext uri="{FF2B5EF4-FFF2-40B4-BE49-F238E27FC236}">
@@ -1904,7 +1818,7 @@
           <a:p>
             <a:fld id="{D0E3E56B-C3C4-8E4F-B314-D5C81CC34EEF}" type="slidenum">
               <a:rPr lang="en-US" smtClean="0"/>
-              <a:t>26</a:t>
+              <a:t>25</a:t>
             </a:fld>
             <a:endParaRPr lang="en-US"/>
           </a:p>
@@ -1923,7 +1837,7 @@
 </p:notes>
 </file>
 
-<file path=ppt/notesSlides/notesSlide22.xml><?xml version="1.0" encoding="utf-8"?>
+<file path=ppt/notesSlides/notesSlide21.xml><?xml version="1.0" encoding="utf-8"?>
 <p:notes xmlns:a="http://schemas.openxmlformats.org/drawingml/2006/main" xmlns:r="http://schemas.openxmlformats.org/officeDocument/2006/relationships" xmlns:p="http://schemas.openxmlformats.org/presentationml/2006/main">
   <p:cSld>
     <p:spTree>
@@ -2012,7 +1926,7 @@
           <a:p>
             <a:fld id="{D0E3E56B-C3C4-8E4F-B314-D5C81CC34EEF}" type="slidenum">
               <a:rPr lang="en-US" smtClean="0"/>
-              <a:t>27</a:t>
+              <a:t>26</a:t>
             </a:fld>
             <a:endParaRPr lang="en-US"/>
           </a:p>
@@ -2031,7 +1945,7 @@
 </p:notes>
 </file>
 
-<file path=ppt/notesSlides/notesSlide23.xml><?xml version="1.0" encoding="utf-8"?>
+<file path=ppt/notesSlides/notesSlide22.xml><?xml version="1.0" encoding="utf-8"?>
 <p:notes xmlns:a="http://schemas.openxmlformats.org/drawingml/2006/main" xmlns:r="http://schemas.openxmlformats.org/officeDocument/2006/relationships" xmlns:p="http://schemas.openxmlformats.org/presentationml/2006/main">
   <p:cSld>
     <p:spTree>
@@ -2120,7 +2034,7 @@
           <a:p>
             <a:fld id="{D0E3E56B-C3C4-8E4F-B314-D5C81CC34EEF}" type="slidenum">
               <a:rPr lang="en-US" smtClean="0"/>
-              <a:t>28</a:t>
+              <a:t>27</a:t>
             </a:fld>
             <a:endParaRPr lang="en-US"/>
           </a:p>
@@ -2139,7 +2053,7 @@
 </p:notes>
 </file>
 
-<file path=ppt/notesSlides/notesSlide24.xml><?xml version="1.0" encoding="utf-8"?>
+<file path=ppt/notesSlides/notesSlide23.xml><?xml version="1.0" encoding="utf-8"?>
 <p:notes xmlns:a="http://schemas.openxmlformats.org/drawingml/2006/main" xmlns:r="http://schemas.openxmlformats.org/officeDocument/2006/relationships" xmlns:p="http://schemas.openxmlformats.org/presentationml/2006/main">
   <p:cSld>
     <p:spTree>
@@ -2228,7 +2142,7 @@
           <a:p>
             <a:fld id="{D0E3E56B-C3C4-8E4F-B314-D5C81CC34EEF}" type="slidenum">
               <a:rPr lang="en-US" smtClean="0"/>
-              <a:t>29</a:t>
+              <a:t>28</a:t>
             </a:fld>
             <a:endParaRPr lang="en-US"/>
           </a:p>
@@ -2247,7 +2161,7 @@
 </p:notes>
 </file>
 
-<file path=ppt/notesSlides/notesSlide25.xml><?xml version="1.0" encoding="utf-8"?>
+<file path=ppt/notesSlides/notesSlide24.xml><?xml version="1.0" encoding="utf-8"?>
 <p:notes xmlns:a="http://schemas.openxmlformats.org/drawingml/2006/main" xmlns:r="http://schemas.openxmlformats.org/officeDocument/2006/relationships" xmlns:p="http://schemas.openxmlformats.org/presentationml/2006/main">
   <p:cSld>
     <p:spTree>
@@ -2336,7 +2250,7 @@
           <a:p>
             <a:fld id="{D0E3E56B-C3C4-8E4F-B314-D5C81CC34EEF}" type="slidenum">
               <a:rPr lang="en-US" smtClean="0"/>
-              <a:t>30</a:t>
+              <a:t>29</a:t>
             </a:fld>
             <a:endParaRPr lang="en-US"/>
           </a:p>
@@ -2355,7 +2269,7 @@
 </p:notes>
 </file>
 
-<file path=ppt/notesSlides/notesSlide26.xml><?xml version="1.0" encoding="utf-8"?>
+<file path=ppt/notesSlides/notesSlide25.xml><?xml version="1.0" encoding="utf-8"?>
 <p:notes xmlns:a="http://schemas.openxmlformats.org/drawingml/2006/main" xmlns:r="http://schemas.openxmlformats.org/officeDocument/2006/relationships" xmlns:p="http://schemas.openxmlformats.org/presentationml/2006/main">
   <p:cSld>
     <p:spTree>
@@ -2444,7 +2358,7 @@
           <a:p>
             <a:fld id="{D0E3E56B-C3C4-8E4F-B314-D5C81CC34EEF}" type="slidenum">
               <a:rPr lang="en-US" smtClean="0"/>
-              <a:t>32</a:t>
+              <a:t>31</a:t>
             </a:fld>
             <a:endParaRPr lang="en-US"/>
           </a:p>
@@ -2463,7 +2377,7 @@
 </p:notes>
 </file>
 
-<file path=ppt/notesSlides/notesSlide27.xml><?xml version="1.0" encoding="utf-8"?>
+<file path=ppt/notesSlides/notesSlide26.xml><?xml version="1.0" encoding="utf-8"?>
 <p:notes xmlns:a="http://schemas.openxmlformats.org/drawingml/2006/main" xmlns:r="http://schemas.openxmlformats.org/officeDocument/2006/relationships" xmlns:p="http://schemas.openxmlformats.org/presentationml/2006/main">
   <p:cSld>
     <p:spTree>
@@ -2552,7 +2466,7 @@
           <a:p>
             <a:fld id="{D0E3E56B-C3C4-8E4F-B314-D5C81CC34EEF}" type="slidenum">
               <a:rPr lang="en-US" smtClean="0"/>
-              <a:t>33</a:t>
+              <a:t>32</a:t>
             </a:fld>
             <a:endParaRPr lang="en-US"/>
           </a:p>
@@ -14615,619 +14529,6 @@
   <p:cSld>
     <p:spTree>
       <p:nvGrpSpPr>
-        <p:cNvPr id="1" name=""/>
-        <p:cNvGrpSpPr/>
-        <p:nvPr/>
-      </p:nvGrpSpPr>
-      <p:grpSpPr>
-        <a:xfrm>
-          <a:off x="0" y="0"/>
-          <a:ext cx="0" cy="0"/>
-          <a:chOff x="0" y="0"/>
-          <a:chExt cx="0" cy="0"/>
-        </a:xfrm>
-      </p:grpSpPr>
-      <p:sp>
-        <p:nvSpPr>
-          <p:cNvPr id="2" name="Shape 0"/>
-          <p:cNvSpPr/>
-          <p:nvPr/>
-        </p:nvSpPr>
-        <p:spPr>
-          <a:xfrm>
-            <a:off x="11686032" y="0"/>
-            <a:ext cx="505663" cy="6858000"/>
-          </a:xfrm>
-          <a:prstGeom prst="rect">
-            <a:avLst/>
-          </a:prstGeom>
-          <a:solidFill>
-            <a:srgbClr val="1F4899"/>
-          </a:solidFill>
-          <a:ln/>
-        </p:spPr>
-        <p:txBody>
-          <a:bodyPr/>
-          <a:lstStyle/>
-          <a:p>
-            <a:endParaRPr lang="en-US">
-              <a:ea typeface="맑은 고딕"/>
-            </a:endParaRPr>
-          </a:p>
-        </p:txBody>
-      </p:sp>
-      <p:sp>
-        <p:nvSpPr>
-          <p:cNvPr id="3" name="Text 1"/>
-          <p:cNvSpPr/>
-          <p:nvPr/>
-        </p:nvSpPr>
-        <p:spPr>
-          <a:xfrm>
-            <a:off x="502920" y="274320"/>
-            <a:ext cx="10881360" cy="777240"/>
-          </a:xfrm>
-          <a:prstGeom prst="rect">
-            <a:avLst/>
-          </a:prstGeom>
-          <a:noFill/>
-          <a:ln/>
-        </p:spPr>
-        <p:txBody>
-          <a:bodyPr wrap="square" lIns="0" tIns="0" rIns="0" bIns="0" rtlCol="0" anchor="ctr"/>
-          <a:lstStyle/>
-          <a:p>
-            <a:pPr marL="0" indent="0" algn="l">
-              <a:buNone/>
-            </a:pPr>
-            <a:r>
-              <a:rPr lang="ko-KR" altLang="en-US" sz="2700" b="1" dirty="0">
-                <a:solidFill>
-                  <a:srgbClr val="1F4899"/>
-                </a:solidFill>
-                <a:latin typeface="Calibri" pitchFamily="34" charset="0"/>
-                <a:ea typeface="맑은 고딕" pitchFamily="34" charset="-122"/>
-                <a:cs typeface="Calibri" pitchFamily="34" charset="-120"/>
-              </a:rPr>
-              <a:t>개념 퀴즈 4</a:t>
-            </a:r>
-            <a:endParaRPr lang="en-US" sz="2700" dirty="0">
-              <a:ea typeface="맑은 고딕"/>
-            </a:endParaRPr>
-          </a:p>
-        </p:txBody>
-      </p:sp>
-      <p:sp>
-        <p:nvSpPr>
-          <p:cNvPr id="4" name="Text 2"/>
-          <p:cNvSpPr/>
-          <p:nvPr/>
-        </p:nvSpPr>
-        <p:spPr>
-          <a:xfrm>
-            <a:off x="502920" y="18288"/>
-            <a:ext cx="10881360" cy="256032"/>
-          </a:xfrm>
-          <a:prstGeom prst="rect">
-            <a:avLst/>
-          </a:prstGeom>
-          <a:noFill/>
-          <a:ln/>
-        </p:spPr>
-        <p:txBody>
-          <a:bodyPr wrap="square" lIns="0" tIns="0" rIns="0" bIns="0" rtlCol="0" anchor="ctr"/>
-          <a:lstStyle/>
-          <a:p>
-            <a:pPr marL="0" indent="0" algn="l">
-              <a:buNone/>
-            </a:pPr>
-            <a:r>
-              <a:rPr lang="en-US" sz="1100" b="1" kern="0" spc="100" dirty="0">
-                <a:solidFill>
-                  <a:srgbClr val="6B7280"/>
-                </a:solidFill>
-                <a:latin typeface="Calibri" pitchFamily="34" charset="0"/>
-                <a:ea typeface="Calibri" pitchFamily="34" charset="-122"/>
-                <a:cs typeface="Calibri" pitchFamily="34" charset="-120"/>
-              </a:rPr>
-              <a:t>TOPIC 4</a:t>
-            </a:r>
-            <a:endParaRPr lang="en-US" sz="1100" dirty="0">
-              <a:ea typeface="맑은 고딕"/>
-            </a:endParaRPr>
-          </a:p>
-        </p:txBody>
-      </p:sp>
-      <p:sp>
-        <p:nvSpPr>
-          <p:cNvPr id="5" name="Text 3"/>
-          <p:cNvSpPr/>
-          <p:nvPr/>
-        </p:nvSpPr>
-        <p:spPr>
-          <a:xfrm>
-            <a:off x="11686032" y="6446520"/>
-            <a:ext cx="505663" cy="320040"/>
-          </a:xfrm>
-          <a:prstGeom prst="rect">
-            <a:avLst/>
-          </a:prstGeom>
-          <a:noFill/>
-          <a:ln/>
-        </p:spPr>
-        <p:txBody>
-          <a:bodyPr wrap="square" lIns="0" tIns="0" rIns="0" bIns="0" rtlCol="0" anchor="ctr"/>
-          <a:lstStyle/>
-          <a:p>
-            <a:pPr marL="0" indent="0" algn="ctr">
-              <a:buNone/>
-            </a:pPr>
-            <a:r>
-              <a:rPr lang="en-US" sz="1100" dirty="0">
-                <a:solidFill>
-                  <a:srgbClr val="FFFFFF"/>
-                </a:solidFill>
-                <a:latin typeface="Calibri" pitchFamily="34" charset="0"/>
-                <a:ea typeface="Calibri" pitchFamily="34" charset="-122"/>
-                <a:cs typeface="Calibri" pitchFamily="34" charset="-120"/>
-              </a:rPr>
-              <a:t>21</a:t>
-            </a:r>
-            <a:endParaRPr lang="en-US" sz="1100" dirty="0">
-              <a:ea typeface="맑은 고딕"/>
-            </a:endParaRPr>
-          </a:p>
-        </p:txBody>
-      </p:sp>
-      <p:sp>
-        <p:nvSpPr>
-          <p:cNvPr id="6" name="Shape 4"/>
-          <p:cNvSpPr/>
-          <p:nvPr/>
-        </p:nvSpPr>
-        <p:spPr>
-          <a:xfrm>
-            <a:off x="502920" y="1097280"/>
-            <a:ext cx="1965960" cy="329184"/>
-          </a:xfrm>
-          <a:prstGeom prst="roundRect">
-            <a:avLst>
-              <a:gd name="adj" fmla="val 50000"/>
-            </a:avLst>
-          </a:prstGeom>
-          <a:solidFill>
-            <a:srgbClr val="1F4899"/>
-          </a:solidFill>
-          <a:ln/>
-        </p:spPr>
-        <p:txBody>
-          <a:bodyPr/>
-          <a:lstStyle/>
-          <a:p>
-            <a:endParaRPr lang="en-US">
-              <a:ea typeface="맑은 고딕"/>
-            </a:endParaRPr>
-          </a:p>
-        </p:txBody>
-      </p:sp>
-      <p:sp>
-        <p:nvSpPr>
-          <p:cNvPr id="7" name="Text 5"/>
-          <p:cNvSpPr/>
-          <p:nvPr/>
-        </p:nvSpPr>
-        <p:spPr>
-          <a:xfrm>
-            <a:off x="502920" y="1097280"/>
-            <a:ext cx="1965960" cy="329184"/>
-          </a:xfrm>
-          <a:prstGeom prst="rect">
-            <a:avLst/>
-          </a:prstGeom>
-          <a:noFill/>
-          <a:ln/>
-        </p:spPr>
-        <p:txBody>
-          <a:bodyPr wrap="square" lIns="0" tIns="0" rIns="0" bIns="0" rtlCol="0" anchor="ctr"/>
-          <a:lstStyle/>
-          <a:p>
-            <a:pPr marL="0" indent="0" algn="ctr">
-              <a:buNone/>
-            </a:pPr>
-            <a:r>
-              <a:rPr lang="ko-KR" altLang="en-US" sz="1100" b="1" dirty="0">
-                <a:solidFill>
-                  <a:srgbClr val="FFFFFF"/>
-                </a:solidFill>
-                <a:latin typeface="Calibri" pitchFamily="34" charset="0"/>
-                <a:ea typeface="맑은 고딕" pitchFamily="34" charset="-122"/>
-                <a:cs typeface="Calibri" pitchFamily="34" charset="-120"/>
-              </a:rPr>
-              <a:t>개념 퀴즈(CONCEPT QUIZ)</a:t>
-            </a:r>
-            <a:endParaRPr lang="en-US" sz="1100" dirty="0">
-              <a:ea typeface="맑은 고딕"/>
-            </a:endParaRPr>
-          </a:p>
-        </p:txBody>
-      </p:sp>
-      <p:sp>
-        <p:nvSpPr>
-          <p:cNvPr id="8" name="Shape 6"/>
-          <p:cNvSpPr/>
-          <p:nvPr/>
-        </p:nvSpPr>
-        <p:spPr>
-          <a:xfrm>
-            <a:off x="502920" y="1600200"/>
-            <a:ext cx="10972800" cy="1463040"/>
-          </a:xfrm>
-          <a:prstGeom prst="roundRect">
-            <a:avLst>
-              <a:gd name="adj" fmla="val 3125"/>
-            </a:avLst>
-          </a:prstGeom>
-          <a:solidFill>
-            <a:srgbClr val="FEF2F2"/>
-          </a:solidFill>
-          <a:ln w="15875">
-            <a:solidFill>
-              <a:srgbClr val="EF4444"/>
-            </a:solidFill>
-            <a:prstDash val="solid"/>
-          </a:ln>
-        </p:spPr>
-        <p:txBody>
-          <a:bodyPr/>
-          <a:lstStyle/>
-          <a:p>
-            <a:endParaRPr lang="en-US">
-              <a:ea typeface="맑은 고딕"/>
-            </a:endParaRPr>
-          </a:p>
-        </p:txBody>
-      </p:sp>
-      <p:sp>
-        <p:nvSpPr>
-          <p:cNvPr id="9" name="Text 7"/>
-          <p:cNvSpPr/>
-          <p:nvPr/>
-        </p:nvSpPr>
-        <p:spPr>
-          <a:xfrm>
-            <a:off x="630936" y="1691640"/>
-            <a:ext cx="10716768" cy="274320"/>
-          </a:xfrm>
-          <a:prstGeom prst="rect">
-            <a:avLst/>
-          </a:prstGeom>
-          <a:noFill/>
-          <a:ln/>
-        </p:spPr>
-        <p:txBody>
-          <a:bodyPr wrap="square" lIns="0" tIns="0" rIns="0" bIns="0" rtlCol="0" anchor="ctr"/>
-          <a:lstStyle/>
-          <a:p>
-            <a:pPr marL="0" indent="0" algn="l">
-              <a:buNone/>
-            </a:pPr>
-            <a:r>
-              <a:rPr lang="en-US" sz="1300" b="1" dirty="0">
-                <a:solidFill>
-                  <a:srgbClr val="991B1B"/>
-                </a:solidFill>
-                <a:latin typeface="Calibri" pitchFamily="34" charset="0"/>
-                <a:ea typeface="Calibri" pitchFamily="34" charset="-122"/>
-                <a:cs typeface="Calibri" pitchFamily="34" charset="-120"/>
-              </a:rPr>
-              <a:t>Q1</a:t>
-            </a:r>
-            <a:endParaRPr lang="en-US" sz="1300" dirty="0">
-              <a:ea typeface="맑은 고딕"/>
-            </a:endParaRPr>
-          </a:p>
-        </p:txBody>
-      </p:sp>
-      <p:sp>
-        <p:nvSpPr>
-          <p:cNvPr id="10" name="Text 8"/>
-          <p:cNvSpPr/>
-          <p:nvPr/>
-        </p:nvSpPr>
-        <p:spPr>
-          <a:xfrm>
-            <a:off x="649224" y="2020824"/>
-            <a:ext cx="10680192" cy="932688"/>
-          </a:xfrm>
-          <a:prstGeom prst="rect">
-            <a:avLst/>
-          </a:prstGeom>
-          <a:noFill/>
-          <a:ln/>
-        </p:spPr>
-        <p:txBody>
-          <a:bodyPr wrap="square" lIns="0" tIns="0" rIns="0" bIns="0" rtlCol="0" anchor="t"/>
-          <a:lstStyle/>
-          <a:p>
-            <a:pPr marL="0" indent="0" algn="l">
-              <a:lnSpc>
-                <a:spcPct val="102000"/>
-              </a:lnSpc>
-              <a:buNone/>
-            </a:pPr>
-            <a:r>
-              <a:rPr lang="ko-KR" altLang="en-US" sz="1300" b="1" dirty="0">
-                <a:solidFill>
-                  <a:srgbClr val="374151"/>
-                </a:solidFill>
-                <a:latin typeface="Calibri" pitchFamily="34" charset="0"/>
-                <a:ea typeface="맑은 고딕" pitchFamily="34" charset="-122"/>
-                <a:cs typeface="Calibri" pitchFamily="34" charset="-120"/>
-              </a:rPr>
-              <a:t>어떤 주식의 β = 1.2이다. 무위험이자율이 4.5%이고 ERP가 5%라면, CAPM에 의한 자기자본비용은?</a:t>
-            </a:r>
-            <a:endParaRPr lang="en-US" sz="1300" dirty="0">
-              <a:ea typeface="맑은 고딕"/>
-            </a:endParaRPr>
-          </a:p>
-          <a:p>
-            <a:pPr marL="0" indent="0" algn="l">
-              <a:lnSpc>
-                <a:spcPct val="102000"/>
-              </a:lnSpc>
-              <a:spcBef>
-                <a:spcPts val="400"/>
-              </a:spcBef>
-              <a:buNone/>
-            </a:pPr>
-            <a:r>
-              <a:rPr lang="ko-KR" altLang="en-US" sz="1300" dirty="0">
-                <a:solidFill>
-                  <a:srgbClr val="991B1B"/>
-                </a:solidFill>
-                <a:latin typeface="Calibri" pitchFamily="34" charset="0"/>
-                <a:ea typeface="맑은 고딕" pitchFamily="34" charset="-122"/>
-                <a:cs typeface="Calibri" pitchFamily="34" charset="-120"/>
-              </a:rPr>
-              <a:t>a) 9.0%     b) 9.5%     c) 10.5%     d) 6.0%</a:t>
-            </a:r>
-            <a:endParaRPr lang="en-US" sz="1300" dirty="0">
-              <a:ea typeface="맑은 고딕"/>
-            </a:endParaRPr>
-          </a:p>
-        </p:txBody>
-      </p:sp>
-      <p:sp>
-        <p:nvSpPr>
-          <p:cNvPr id="11" name="Shape 9"/>
-          <p:cNvSpPr/>
-          <p:nvPr/>
-        </p:nvSpPr>
-        <p:spPr>
-          <a:xfrm>
-            <a:off x="502920" y="3154680"/>
-            <a:ext cx="10972800" cy="1600200"/>
-          </a:xfrm>
-          <a:prstGeom prst="roundRect">
-            <a:avLst>
-              <a:gd name="adj" fmla="val 2857"/>
-            </a:avLst>
-          </a:prstGeom>
-          <a:solidFill>
-            <a:srgbClr val="FEF3C7"/>
-          </a:solidFill>
-          <a:ln w="15875">
-            <a:solidFill>
-              <a:srgbClr val="F59E0B"/>
-            </a:solidFill>
-            <a:prstDash val="solid"/>
-          </a:ln>
-        </p:spPr>
-        <p:txBody>
-          <a:bodyPr/>
-          <a:lstStyle/>
-          <a:p>
-            <a:endParaRPr lang="en-US">
-              <a:ea typeface="맑은 고딕"/>
-            </a:endParaRPr>
-          </a:p>
-        </p:txBody>
-      </p:sp>
-      <p:sp>
-        <p:nvSpPr>
-          <p:cNvPr id="12" name="Text 10"/>
-          <p:cNvSpPr/>
-          <p:nvPr/>
-        </p:nvSpPr>
-        <p:spPr>
-          <a:xfrm>
-            <a:off x="630936" y="3246120"/>
-            <a:ext cx="10716768" cy="274320"/>
-          </a:xfrm>
-          <a:prstGeom prst="rect">
-            <a:avLst/>
-          </a:prstGeom>
-          <a:noFill/>
-          <a:ln/>
-        </p:spPr>
-        <p:txBody>
-          <a:bodyPr wrap="square" lIns="0" tIns="0" rIns="0" bIns="0" rtlCol="0" anchor="ctr"/>
-          <a:lstStyle/>
-          <a:p>
-            <a:pPr marL="0" indent="0" algn="l">
-              <a:buNone/>
-            </a:pPr>
-            <a:r>
-              <a:rPr lang="en-US" sz="1300" b="1" dirty="0">
-                <a:solidFill>
-                  <a:srgbClr val="92400E"/>
-                </a:solidFill>
-                <a:latin typeface="Calibri" pitchFamily="34" charset="0"/>
-                <a:ea typeface="Calibri" pitchFamily="34" charset="-122"/>
-                <a:cs typeface="Calibri" pitchFamily="34" charset="-120"/>
-              </a:rPr>
-              <a:t>Q2</a:t>
-            </a:r>
-            <a:endParaRPr lang="en-US" sz="1300" dirty="0">
-              <a:ea typeface="맑은 고딕"/>
-            </a:endParaRPr>
-          </a:p>
-        </p:txBody>
-      </p:sp>
-      <p:sp>
-        <p:nvSpPr>
-          <p:cNvPr id="13" name="Text 11"/>
-          <p:cNvSpPr/>
-          <p:nvPr/>
-        </p:nvSpPr>
-        <p:spPr>
-          <a:xfrm>
-            <a:off x="649224" y="3575304"/>
-            <a:ext cx="10680192" cy="1069848"/>
-          </a:xfrm>
-          <a:prstGeom prst="rect">
-            <a:avLst/>
-          </a:prstGeom>
-          <a:noFill/>
-          <a:ln/>
-        </p:spPr>
-        <p:txBody>
-          <a:bodyPr wrap="square" lIns="0" tIns="0" rIns="0" bIns="0" rtlCol="0" anchor="t"/>
-          <a:lstStyle/>
-          <a:p>
-            <a:pPr marL="0" indent="0" algn="l">
-              <a:lnSpc>
-                <a:spcPct val="102000"/>
-              </a:lnSpc>
-              <a:buNone/>
-            </a:pPr>
-            <a:r>
-              <a:rPr lang="ko-KR" altLang="en-US" sz="1300" b="1" dirty="0">
-                <a:solidFill>
-                  <a:srgbClr val="374151"/>
-                </a:solidFill>
-                <a:latin typeface="Calibri" pitchFamily="34" charset="0"/>
-                <a:ea typeface="맑은 고딕" pitchFamily="34" charset="-122"/>
-                <a:cs typeface="Calibri" pitchFamily="34" charset="-120"/>
-              </a:rPr>
-              <a:t>주주잉여현금흐름(FCFE)을 할인할 때 적절한 할인율은?</a:t>
-            </a:r>
-            <a:endParaRPr lang="en-US" sz="1300" dirty="0">
-              <a:ea typeface="맑은 고딕"/>
-            </a:endParaRPr>
-          </a:p>
-          <a:p>
-            <a:pPr marL="0" indent="0" algn="l">
-              <a:lnSpc>
-                <a:spcPct val="102000"/>
-              </a:lnSpc>
-              <a:spcBef>
-                <a:spcPts val="400"/>
-              </a:spcBef>
-              <a:buNone/>
-            </a:pPr>
-            <a:r>
-              <a:rPr lang="ko-KR" altLang="en-US" sz="1300" dirty="0">
-                <a:solidFill>
-                  <a:srgbClr val="92400E"/>
-                </a:solidFill>
-                <a:latin typeface="Calibri" pitchFamily="34" charset="0"/>
-                <a:ea typeface="맑은 고딕" pitchFamily="34" charset="-122"/>
-                <a:cs typeface="Calibri" pitchFamily="34" charset="-120"/>
-              </a:rPr>
-              <a:t>a) 자기자본비용     b) WACC     c) 무위험이자율     d) 타인자본비용</a:t>
-            </a:r>
-            <a:endParaRPr lang="en-US" sz="1300" dirty="0">
-              <a:ea typeface="맑은 고딕"/>
-            </a:endParaRPr>
-          </a:p>
-        </p:txBody>
-      </p:sp>
-      <p:sp>
-        <p:nvSpPr>
-          <p:cNvPr id="14" name="Shape 12"/>
-          <p:cNvSpPr/>
-          <p:nvPr/>
-        </p:nvSpPr>
-        <p:spPr>
-          <a:xfrm>
-            <a:off x="502920" y="5074920"/>
-            <a:ext cx="10972800" cy="548640"/>
-          </a:xfrm>
-          <a:prstGeom prst="roundRect">
-            <a:avLst>
-              <a:gd name="adj" fmla="val 8333"/>
-            </a:avLst>
-          </a:prstGeom>
-          <a:solidFill>
-            <a:srgbClr val="1F4899"/>
-          </a:solidFill>
-          <a:ln/>
-        </p:spPr>
-        <p:txBody>
-          <a:bodyPr/>
-          <a:lstStyle/>
-          <a:p>
-            <a:endParaRPr lang="en-US">
-              <a:ea typeface="맑은 고딕"/>
-            </a:endParaRPr>
-          </a:p>
-        </p:txBody>
-      </p:sp>
-      <p:sp>
-        <p:nvSpPr>
-          <p:cNvPr id="15" name="Text 13"/>
-          <p:cNvSpPr/>
-          <p:nvPr/>
-        </p:nvSpPr>
-        <p:spPr>
-          <a:xfrm>
-            <a:off x="502920" y="5074920"/>
-            <a:ext cx="10972800" cy="548640"/>
-          </a:xfrm>
-          <a:prstGeom prst="rect">
-            <a:avLst/>
-          </a:prstGeom>
-          <a:noFill/>
-          <a:ln/>
-        </p:spPr>
-        <p:txBody>
-          <a:bodyPr wrap="square" rtlCol="0" anchor="ctr"/>
-          <a:lstStyle/>
-          <a:p>
-            <a:pPr marL="0" indent="0" algn="ctr">
-              <a:buNone/>
-            </a:pPr>
-            <a:r>
-              <a:rPr lang="ko-KR" altLang="en-US" sz="1400" b="1" dirty="0">
-                <a:solidFill>
-                  <a:srgbClr val="FFFFFF"/>
-                </a:solidFill>
-                <a:latin typeface="Calibri" pitchFamily="34" charset="0"/>
-                <a:ea typeface="맑은 고딕" pitchFamily="34" charset="-122"/>
-                <a:cs typeface="Calibri" pitchFamily="34" charset="-120"/>
-              </a:rPr>
-              <a:t>정답:  1 → c  (4.5% + 1.2 × 5% = 10.5%)     2 → a</a:t>
-            </a:r>
-            <a:endParaRPr lang="en-US" sz="1400" dirty="0">
-              <a:ea typeface="맑은 고딕"/>
-            </a:endParaRPr>
-          </a:p>
-        </p:txBody>
-      </p:sp>
-    </p:spTree>
-  </p:cSld>
-  <p:clrMapOvr>
-    <a:masterClrMapping/>
-  </p:clrMapOvr>
-</p:sld>
-</file>
-
-<file path=ppt/slides/slide25.xml><?xml version="1.0" encoding="utf-8"?>
-<p:sld xmlns:a="http://schemas.openxmlformats.org/drawingml/2006/main" xmlns:r="http://schemas.openxmlformats.org/officeDocument/2006/relationships" xmlns:p="http://schemas.openxmlformats.org/presentationml/2006/main">
-  <p:cSld>
-    <p:spTree>
-      <p:nvGrpSpPr>
         <p:cNvPr id="1" name="">
           <a:extLst>
             <a:ext uri="{FF2B5EF4-FFF2-40B4-BE49-F238E27FC236}">
@@ -15290,7 +14591,7 @@
 </p:sld>
 </file>
 
-<file path=ppt/slides/slide26.xml><?xml version="1.0" encoding="utf-8"?>
+<file path=ppt/slides/slide25.xml><?xml version="1.0" encoding="utf-8"?>
 <p:sld xmlns:a="http://schemas.openxmlformats.org/drawingml/2006/main" xmlns:r="http://schemas.openxmlformats.org/officeDocument/2006/relationships" xmlns:p="http://schemas.openxmlformats.org/presentationml/2006/main">
   <p:cSld>
     <p:spTree>
@@ -17213,7 +16514,7 @@
 </p:sld>
 </file>
 
-<file path=ppt/slides/slide27.xml><?xml version="1.0" encoding="utf-8"?>
+<file path=ppt/slides/slide26.xml><?xml version="1.0" encoding="utf-8"?>
 <p:sld xmlns:a="http://schemas.openxmlformats.org/drawingml/2006/main" xmlns:r="http://schemas.openxmlformats.org/officeDocument/2006/relationships" xmlns:p="http://schemas.openxmlformats.org/presentationml/2006/main">
   <p:cSld>
     <p:spTree>
@@ -18148,7 +17449,7 @@
 </p:sld>
 </file>
 
-<file path=ppt/slides/slide28.xml><?xml version="1.0" encoding="utf-8"?>
+<file path=ppt/slides/slide27.xml><?xml version="1.0" encoding="utf-8"?>
 <p:sld xmlns:a="http://schemas.openxmlformats.org/drawingml/2006/main" xmlns:r="http://schemas.openxmlformats.org/officeDocument/2006/relationships" xmlns:p="http://schemas.openxmlformats.org/presentationml/2006/main">
   <p:cSld>
     <p:spTree>
@@ -19224,7 +18525,7 @@
 </p:sld>
 </file>
 
-<file path=ppt/slides/slide29.xml><?xml version="1.0" encoding="utf-8"?>
+<file path=ppt/slides/slide28.xml><?xml version="1.0" encoding="utf-8"?>
 <p:sld xmlns:a="http://schemas.openxmlformats.org/drawingml/2006/main" xmlns:r="http://schemas.openxmlformats.org/officeDocument/2006/relationships" xmlns:p="http://schemas.openxmlformats.org/presentationml/2006/main">
   <p:cSld>
     <p:spTree>
@@ -20442,74 +19743,7 @@
 </p:sld>
 </file>
 
-<file path=ppt/slides/slide3.xml><?xml version="1.0" encoding="utf-8"?>
-<p:sld xmlns:a="http://schemas.openxmlformats.org/drawingml/2006/main" xmlns:r="http://schemas.openxmlformats.org/officeDocument/2006/relationships" xmlns:p="http://schemas.openxmlformats.org/presentationml/2006/main">
-  <p:cSld>
-    <p:spTree>
-      <p:nvGrpSpPr>
-        <p:cNvPr id="1" name="">
-          <a:extLst>
-            <a:ext uri="{FF2B5EF4-FFF2-40B4-BE49-F238E27FC236}">
-              <a16:creationId xmlns:a16="http://schemas.microsoft.com/office/drawing/2014/main" id="{40B431E1-DCCD-AECB-5CC6-A6A28CC98607}"/>
-            </a:ext>
-          </a:extLst>
-        </p:cNvPr>
-        <p:cNvGrpSpPr/>
-        <p:nvPr/>
-      </p:nvGrpSpPr>
-      <p:grpSpPr>
-        <a:xfrm>
-          <a:off x="0" y="0"/>
-          <a:ext cx="0" cy="0"/>
-          <a:chOff x="0" y="0"/>
-          <a:chExt cx="0" cy="0"/>
-        </a:xfrm>
-      </p:grpSpPr>
-      <p:sp>
-        <p:nvSpPr>
-          <p:cNvPr id="2" name="Title 1">
-            <a:extLst>
-              <a:ext uri="{FF2B5EF4-FFF2-40B4-BE49-F238E27FC236}">
-                <a16:creationId xmlns:a16="http://schemas.microsoft.com/office/drawing/2014/main" id="{A9A70150-E3CD-D6F5-4134-EB4ADB857847}"/>
-              </a:ext>
-            </a:extLst>
-          </p:cNvPr>
-          <p:cNvSpPr>
-            <a:spLocks noGrp="1"/>
-          </p:cNvSpPr>
-          <p:nvPr>
-            <p:ph type="title"/>
-          </p:nvPr>
-        </p:nvSpPr>
-        <p:spPr/>
-        <p:txBody>
-          <a:bodyPr/>
-          <a:lstStyle/>
-          <a:p>
-            <a:r>
-              <a:rPr lang="ko-KR" altLang="en-US" dirty="0">
-                <a:latin typeface="+mn-lt"/>
-                <a:ea typeface="맑은 고딕"/>
-              </a:rPr>
-              <a:t>1. 화폐의 시간가치(The Time Value of Money)</a:t>
-            </a:r>
-          </a:p>
-        </p:txBody>
-      </p:sp>
-    </p:spTree>
-    <p:extLst>
-      <p:ext uri="{BB962C8B-B14F-4D97-AF65-F5344CB8AC3E}">
-        <p14:creationId xmlns:p14="http://schemas.microsoft.com/office/powerpoint/2010/main" val="4098012946"/>
-      </p:ext>
-    </p:extLst>
-  </p:cSld>
-  <p:clrMapOvr>
-    <a:masterClrMapping/>
-  </p:clrMapOvr>
-</p:sld>
-</file>
-
-<file path=ppt/slides/slide30.xml><?xml version="1.0" encoding="utf-8"?>
+<file path=ppt/slides/slide29.xml><?xml version="1.0" encoding="utf-8"?>
 <p:sld xmlns:a="http://schemas.openxmlformats.org/drawingml/2006/main" xmlns:r="http://schemas.openxmlformats.org/officeDocument/2006/relationships" xmlns:p="http://schemas.openxmlformats.org/presentationml/2006/main">
   <p:cSld>
     <p:spTree>
@@ -21490,7 +20724,74 @@
 </p:sld>
 </file>
 
-<file path=ppt/slides/slide31.xml><?xml version="1.0" encoding="utf-8"?>
+<file path=ppt/slides/slide3.xml><?xml version="1.0" encoding="utf-8"?>
+<p:sld xmlns:a="http://schemas.openxmlformats.org/drawingml/2006/main" xmlns:r="http://schemas.openxmlformats.org/officeDocument/2006/relationships" xmlns:p="http://schemas.openxmlformats.org/presentationml/2006/main">
+  <p:cSld>
+    <p:spTree>
+      <p:nvGrpSpPr>
+        <p:cNvPr id="1" name="">
+          <a:extLst>
+            <a:ext uri="{FF2B5EF4-FFF2-40B4-BE49-F238E27FC236}">
+              <a16:creationId xmlns:a16="http://schemas.microsoft.com/office/drawing/2014/main" id="{40B431E1-DCCD-AECB-5CC6-A6A28CC98607}"/>
+            </a:ext>
+          </a:extLst>
+        </p:cNvPr>
+        <p:cNvGrpSpPr/>
+        <p:nvPr/>
+      </p:nvGrpSpPr>
+      <p:grpSpPr>
+        <a:xfrm>
+          <a:off x="0" y="0"/>
+          <a:ext cx="0" cy="0"/>
+          <a:chOff x="0" y="0"/>
+          <a:chExt cx="0" cy="0"/>
+        </a:xfrm>
+      </p:grpSpPr>
+      <p:sp>
+        <p:nvSpPr>
+          <p:cNvPr id="2" name="Title 1">
+            <a:extLst>
+              <a:ext uri="{FF2B5EF4-FFF2-40B4-BE49-F238E27FC236}">
+                <a16:creationId xmlns:a16="http://schemas.microsoft.com/office/drawing/2014/main" id="{A9A70150-E3CD-D6F5-4134-EB4ADB857847}"/>
+              </a:ext>
+            </a:extLst>
+          </p:cNvPr>
+          <p:cNvSpPr>
+            <a:spLocks noGrp="1"/>
+          </p:cNvSpPr>
+          <p:nvPr>
+            <p:ph type="title"/>
+          </p:nvPr>
+        </p:nvSpPr>
+        <p:spPr/>
+        <p:txBody>
+          <a:bodyPr/>
+          <a:lstStyle/>
+          <a:p>
+            <a:r>
+              <a:rPr lang="ko-KR" altLang="en-US" dirty="0">
+                <a:latin typeface="+mn-lt"/>
+                <a:ea typeface="맑은 고딕"/>
+              </a:rPr>
+              <a:t>1. 화폐의 시간가치(The Time Value of Money)</a:t>
+            </a:r>
+          </a:p>
+        </p:txBody>
+      </p:sp>
+    </p:spTree>
+    <p:extLst>
+      <p:ext uri="{BB962C8B-B14F-4D97-AF65-F5344CB8AC3E}">
+        <p14:creationId xmlns:p14="http://schemas.microsoft.com/office/powerpoint/2010/main" val="4098012946"/>
+      </p:ext>
+    </p:extLst>
+  </p:cSld>
+  <p:clrMapOvr>
+    <a:masterClrMapping/>
+  </p:clrMapOvr>
+</p:sld>
+</file>
+
+<file path=ppt/slides/slide30.xml><?xml version="1.0" encoding="utf-8"?>
 <p:sld xmlns:a="http://schemas.openxmlformats.org/drawingml/2006/main" xmlns:r="http://schemas.openxmlformats.org/officeDocument/2006/relationships" xmlns:p="http://schemas.openxmlformats.org/presentationml/2006/main">
   <p:cSld>
     <p:spTree>
@@ -21575,7 +20876,7 @@
 </p:sld>
 </file>
 
-<file path=ppt/slides/slide32.xml><?xml version="1.0" encoding="utf-8"?>
+<file path=ppt/slides/slide31.xml><?xml version="1.0" encoding="utf-8"?>
 <p:sld xmlns:a="http://schemas.openxmlformats.org/drawingml/2006/main" xmlns:r="http://schemas.openxmlformats.org/officeDocument/2006/relationships" xmlns:p="http://schemas.openxmlformats.org/presentationml/2006/main">
   <p:cSld>
     <p:spTree>
@@ -22382,7 +21683,7 @@
 </p:sld>
 </file>
 
-<file path=ppt/slides/slide33.xml><?xml version="1.0" encoding="utf-8"?>
+<file path=ppt/slides/slide32.xml><?xml version="1.0" encoding="utf-8"?>
 <p:sld xmlns:a="http://schemas.openxmlformats.org/drawingml/2006/main" xmlns:r="http://schemas.openxmlformats.org/officeDocument/2006/relationships" xmlns:p="http://schemas.openxmlformats.org/presentationml/2006/main">
   <p:cSld>
     <p:spTree>

--- a/files/week2/korean/Wk2_L8_slides.pptx
+++ b/files/week2/korean/Wk2_L8_slides.pptx
@@ -5,41 +5,42 @@
     <p:sldMasterId id="2147483689" r:id="rId1"/>
   </p:sldMasterIdLst>
   <p:notesMasterIdLst>
-    <p:notesMasterId r:id="rId34"/>
+    <p:notesMasterId r:id="rId35"/>
   </p:notesMasterIdLst>
   <p:sldIdLst>
     <p:sldId id="256" r:id="rId2"/>
     <p:sldId id="460" r:id="rId3"/>
     <p:sldId id="461" r:id="rId4"/>
-    <p:sldId id="474" r:id="rId5"/>
-    <p:sldId id="527" r:id="rId6"/>
-    <p:sldId id="260" r:id="rId7"/>
-    <p:sldId id="528" r:id="rId8"/>
-    <p:sldId id="529" r:id="rId9"/>
-    <p:sldId id="530" r:id="rId10"/>
-    <p:sldId id="475" r:id="rId11"/>
-    <p:sldId id="479" r:id="rId12"/>
-    <p:sldId id="531" r:id="rId13"/>
-    <p:sldId id="497" r:id="rId14"/>
-    <p:sldId id="498" r:id="rId15"/>
-    <p:sldId id="532" r:id="rId16"/>
-    <p:sldId id="499" r:id="rId17"/>
-    <p:sldId id="496" r:id="rId18"/>
-    <p:sldId id="533" r:id="rId19"/>
-    <p:sldId id="534" r:id="rId20"/>
-    <p:sldId id="545" r:id="rId21"/>
-    <p:sldId id="273" r:id="rId22"/>
-    <p:sldId id="274" r:id="rId23"/>
-    <p:sldId id="275" r:id="rId24"/>
-    <p:sldId id="544" r:id="rId25"/>
-    <p:sldId id="501" r:id="rId26"/>
-    <p:sldId id="507" r:id="rId27"/>
-    <p:sldId id="509" r:id="rId28"/>
-    <p:sldId id="542" r:id="rId29"/>
-    <p:sldId id="543" r:id="rId30"/>
-    <p:sldId id="546" r:id="rId31"/>
-    <p:sldId id="548" r:id="rId32"/>
-    <p:sldId id="547" r:id="rId33"/>
+    <p:sldId id="549" r:id="rId5"/>
+    <p:sldId id="474" r:id="rId6"/>
+    <p:sldId id="527" r:id="rId7"/>
+    <p:sldId id="260" r:id="rId8"/>
+    <p:sldId id="528" r:id="rId9"/>
+    <p:sldId id="529" r:id="rId10"/>
+    <p:sldId id="530" r:id="rId11"/>
+    <p:sldId id="475" r:id="rId12"/>
+    <p:sldId id="479" r:id="rId13"/>
+    <p:sldId id="531" r:id="rId14"/>
+    <p:sldId id="497" r:id="rId15"/>
+    <p:sldId id="498" r:id="rId16"/>
+    <p:sldId id="532" r:id="rId17"/>
+    <p:sldId id="499" r:id="rId18"/>
+    <p:sldId id="496" r:id="rId19"/>
+    <p:sldId id="533" r:id="rId20"/>
+    <p:sldId id="534" r:id="rId21"/>
+    <p:sldId id="545" r:id="rId22"/>
+    <p:sldId id="273" r:id="rId23"/>
+    <p:sldId id="274" r:id="rId24"/>
+    <p:sldId id="275" r:id="rId25"/>
+    <p:sldId id="544" r:id="rId26"/>
+    <p:sldId id="501" r:id="rId27"/>
+    <p:sldId id="507" r:id="rId28"/>
+    <p:sldId id="509" r:id="rId29"/>
+    <p:sldId id="542" r:id="rId30"/>
+    <p:sldId id="543" r:id="rId31"/>
+    <p:sldId id="546" r:id="rId32"/>
+    <p:sldId id="548" r:id="rId33"/>
+    <p:sldId id="547" r:id="rId34"/>
   </p:sldIdLst>
   <p:sldSz cx="12192000" cy="6858000"/>
   <p:notesSz cx="6858000" cy="9144000"/>
@@ -150,6 +151,7 @@
           <p14:sldIdLst>
             <p14:sldId id="460"/>
             <p14:sldId id="461"/>
+            <p14:sldId id="549"/>
             <p14:sldId id="474"/>
             <p14:sldId id="527"/>
             <p14:sldId id="260"/>
@@ -723,7 +725,7 @@
           <a:p>
             <a:fld id="{D0E3E56B-C3C4-8E4F-B314-D5C81CC34EEF}" type="slidenum">
               <a:rPr lang="en-US" smtClean="0"/>
-              <a:t>12</a:t>
+              <a:t>13</a:t>
             </a:fld>
             <a:endParaRPr lang="en-US"/>
           </a:p>
@@ -831,7 +833,7 @@
           <a:p>
             <a:fld id="{D0E3E56B-C3C4-8E4F-B314-D5C81CC34EEF}" type="slidenum">
               <a:rPr lang="en-US" smtClean="0"/>
-              <a:t>13</a:t>
+              <a:t>14</a:t>
             </a:fld>
             <a:endParaRPr lang="en-US"/>
           </a:p>
@@ -939,7 +941,7 @@
           <a:p>
             <a:fld id="{D0E3E56B-C3C4-8E4F-B314-D5C81CC34EEF}" type="slidenum">
               <a:rPr lang="en-US" smtClean="0"/>
-              <a:t>14</a:t>
+              <a:t>15</a:t>
             </a:fld>
             <a:endParaRPr lang="en-US"/>
           </a:p>
@@ -1047,7 +1049,7 @@
           <a:p>
             <a:fld id="{D0E3E56B-C3C4-8E4F-B314-D5C81CC34EEF}" type="slidenum">
               <a:rPr lang="en-US" smtClean="0"/>
-              <a:t>16</a:t>
+              <a:t>17</a:t>
             </a:fld>
             <a:endParaRPr lang="en-US"/>
           </a:p>
@@ -1155,7 +1157,7 @@
           <a:p>
             <a:fld id="{D0E3E56B-C3C4-8E4F-B314-D5C81CC34EEF}" type="slidenum">
               <a:rPr lang="en-US" smtClean="0"/>
-              <a:t>17</a:t>
+              <a:t>18</a:t>
             </a:fld>
             <a:endParaRPr lang="en-US"/>
           </a:p>
@@ -1263,7 +1265,7 @@
           <a:p>
             <a:fld id="{D0E3E56B-C3C4-8E4F-B314-D5C81CC34EEF}" type="slidenum">
               <a:rPr lang="en-US" smtClean="0"/>
-              <a:t>18</a:t>
+              <a:t>19</a:t>
             </a:fld>
             <a:endParaRPr lang="en-US"/>
           </a:p>
@@ -1371,7 +1373,7 @@
           <a:p>
             <a:fld id="{D0E3E56B-C3C4-8E4F-B314-D5C81CC34EEF}" type="slidenum">
               <a:rPr lang="en-US" smtClean="0"/>
-              <a:t>19</a:t>
+              <a:t>20</a:t>
             </a:fld>
             <a:endParaRPr lang="en-US"/>
           </a:p>
@@ -1455,7 +1457,7 @@
           <a:p>
             <a:fld id="{F7021451-1387-4CA6-816F-3879F97B5CBC}" type="slidenum">
               <a:rPr lang="en-US"/>
-              <a:t>21</a:t>
+              <a:t>22</a:t>
             </a:fld>
             <a:endParaRPr lang="en-US"/>
           </a:p>
@@ -1539,7 +1541,7 @@
           <a:p>
             <a:fld id="{F7021451-1387-4CA6-816F-3879F97B5CBC}" type="slidenum">
               <a:rPr lang="en-US"/>
-              <a:t>22</a:t>
+              <a:t>23</a:t>
             </a:fld>
             <a:endParaRPr lang="en-US"/>
           </a:p>
@@ -1623,7 +1625,7 @@
           <a:p>
             <a:fld id="{F7021451-1387-4CA6-816F-3879F97B5CBC}" type="slidenum">
               <a:rPr lang="en-US"/>
-              <a:t>23</a:t>
+              <a:t>24</a:t>
             </a:fld>
             <a:endParaRPr lang="en-US"/>
           </a:p>
@@ -1818,7 +1820,7 @@
           <a:p>
             <a:fld id="{D0E3E56B-C3C4-8E4F-B314-D5C81CC34EEF}" type="slidenum">
               <a:rPr lang="en-US" smtClean="0"/>
-              <a:t>25</a:t>
+              <a:t>26</a:t>
             </a:fld>
             <a:endParaRPr lang="en-US"/>
           </a:p>
@@ -1926,7 +1928,7 @@
           <a:p>
             <a:fld id="{D0E3E56B-C3C4-8E4F-B314-D5C81CC34EEF}" type="slidenum">
               <a:rPr lang="en-US" smtClean="0"/>
-              <a:t>26</a:t>
+              <a:t>27</a:t>
             </a:fld>
             <a:endParaRPr lang="en-US"/>
           </a:p>
@@ -2034,7 +2036,7 @@
           <a:p>
             <a:fld id="{D0E3E56B-C3C4-8E4F-B314-D5C81CC34EEF}" type="slidenum">
               <a:rPr lang="en-US" smtClean="0"/>
-              <a:t>27</a:t>
+              <a:t>28</a:t>
             </a:fld>
             <a:endParaRPr lang="en-US"/>
           </a:p>
@@ -2142,7 +2144,7 @@
           <a:p>
             <a:fld id="{D0E3E56B-C3C4-8E4F-B314-D5C81CC34EEF}" type="slidenum">
               <a:rPr lang="en-US" smtClean="0"/>
-              <a:t>28</a:t>
+              <a:t>29</a:t>
             </a:fld>
             <a:endParaRPr lang="en-US"/>
           </a:p>
@@ -2250,7 +2252,7 @@
           <a:p>
             <a:fld id="{D0E3E56B-C3C4-8E4F-B314-D5C81CC34EEF}" type="slidenum">
               <a:rPr lang="en-US" smtClean="0"/>
-              <a:t>29</a:t>
+              <a:t>30</a:t>
             </a:fld>
             <a:endParaRPr lang="en-US"/>
           </a:p>
@@ -2358,7 +2360,7 @@
           <a:p>
             <a:fld id="{D0E3E56B-C3C4-8E4F-B314-D5C81CC34EEF}" type="slidenum">
               <a:rPr lang="en-US" smtClean="0"/>
-              <a:t>31</a:t>
+              <a:t>32</a:t>
             </a:fld>
             <a:endParaRPr lang="en-US"/>
           </a:p>
@@ -2466,7 +2468,7 @@
           <a:p>
             <a:fld id="{D0E3E56B-C3C4-8E4F-B314-D5C81CC34EEF}" type="slidenum">
               <a:rPr lang="en-US" smtClean="0"/>
-              <a:t>32</a:t>
+              <a:t>33</a:t>
             </a:fld>
             <a:endParaRPr lang="en-US"/>
           </a:p>
@@ -2574,7 +2576,7 @@
           <a:p>
             <a:fld id="{D0E3E56B-C3C4-8E4F-B314-D5C81CC34EEF}" type="slidenum">
               <a:rPr lang="en-US" smtClean="0"/>
-              <a:t>4</a:t>
+              <a:t>5</a:t>
             </a:fld>
             <a:endParaRPr lang="en-US"/>
           </a:p>
@@ -2682,7 +2684,7 @@
           <a:p>
             <a:fld id="{D0E3E56B-C3C4-8E4F-B314-D5C81CC34EEF}" type="slidenum">
               <a:rPr lang="en-US" smtClean="0"/>
-              <a:t>5</a:t>
+              <a:t>6</a:t>
             </a:fld>
             <a:endParaRPr lang="en-US"/>
           </a:p>
@@ -2766,7 +2768,7 @@
           <a:p>
             <a:fld id="{F7021451-1387-4CA6-816F-3879F97B5CBC}" type="slidenum">
               <a:rPr lang="en-US"/>
-              <a:t>6</a:t>
+              <a:t>7</a:t>
             </a:fld>
             <a:endParaRPr lang="en-US"/>
           </a:p>
@@ -2874,7 +2876,7 @@
           <a:p>
             <a:fld id="{D0E3E56B-C3C4-8E4F-B314-D5C81CC34EEF}" type="slidenum">
               <a:rPr lang="en-US" smtClean="0"/>
-              <a:t>7</a:t>
+              <a:t>8</a:t>
             </a:fld>
             <a:endParaRPr lang="en-US"/>
           </a:p>
@@ -2982,7 +2984,7 @@
           <a:p>
             <a:fld id="{D0E3E56B-C3C4-8E4F-B314-D5C81CC34EEF}" type="slidenum">
               <a:rPr lang="en-US" smtClean="0"/>
-              <a:t>8</a:t>
+              <a:t>9</a:t>
             </a:fld>
             <a:endParaRPr lang="en-US"/>
           </a:p>
@@ -3090,7 +3092,7 @@
           <a:p>
             <a:fld id="{D0E3E56B-C3C4-8E4F-B314-D5C81CC34EEF}" type="slidenum">
               <a:rPr lang="en-US" smtClean="0"/>
-              <a:t>10</a:t>
+              <a:t>11</a:t>
             </a:fld>
             <a:endParaRPr lang="en-US"/>
           </a:p>
@@ -3198,7 +3200,7 @@
           <a:p>
             <a:fld id="{D0E3E56B-C3C4-8E4F-B314-D5C81CC34EEF}" type="slidenum">
               <a:rPr lang="en-US" smtClean="0"/>
-              <a:t>11</a:t>
+              <a:t>12</a:t>
             </a:fld>
             <a:endParaRPr lang="en-US"/>
           </a:p>
@@ -5059,6 +5061,73 @@
         <p:cNvPr id="1" name="">
           <a:extLst>
             <a:ext uri="{FF2B5EF4-FFF2-40B4-BE49-F238E27FC236}">
+              <a16:creationId xmlns:a16="http://schemas.microsoft.com/office/drawing/2014/main" id="{2CEC4169-BEEB-BD26-8462-F36138417872}"/>
+            </a:ext>
+          </a:extLst>
+        </p:cNvPr>
+        <p:cNvGrpSpPr/>
+        <p:nvPr/>
+      </p:nvGrpSpPr>
+      <p:grpSpPr>
+        <a:xfrm>
+          <a:off x="0" y="0"/>
+          <a:ext cx="0" cy="0"/>
+          <a:chOff x="0" y="0"/>
+          <a:chExt cx="0" cy="0"/>
+        </a:xfrm>
+      </p:grpSpPr>
+      <p:sp>
+        <p:nvSpPr>
+          <p:cNvPr id="2" name="Title 1">
+            <a:extLst>
+              <a:ext uri="{FF2B5EF4-FFF2-40B4-BE49-F238E27FC236}">
+                <a16:creationId xmlns:a16="http://schemas.microsoft.com/office/drawing/2014/main" id="{0ED05527-06FA-6411-2815-0ADA9779BAF8}"/>
+              </a:ext>
+            </a:extLst>
+          </p:cNvPr>
+          <p:cNvSpPr>
+            <a:spLocks noGrp="1"/>
+          </p:cNvSpPr>
+          <p:nvPr>
+            <p:ph type="title"/>
+          </p:nvPr>
+        </p:nvSpPr>
+        <p:spPr/>
+        <p:txBody>
+          <a:bodyPr/>
+          <a:lstStyle/>
+          <a:p>
+            <a:r>
+              <a:rPr lang="ko-KR" altLang="en-US" dirty="0">
+                <a:latin typeface="+mn-lt"/>
+                <a:ea typeface="맑은 고딕"/>
+              </a:rPr>
+              <a:t>2. 미스터 마켓(Mr. Market) – 가격 대 가치</a:t>
+            </a:r>
+          </a:p>
+        </p:txBody>
+      </p:sp>
+    </p:spTree>
+    <p:extLst>
+      <p:ext uri="{BB962C8B-B14F-4D97-AF65-F5344CB8AC3E}">
+        <p14:creationId xmlns:p14="http://schemas.microsoft.com/office/powerpoint/2010/main" val="3516434960"/>
+      </p:ext>
+    </p:extLst>
+  </p:cSld>
+  <p:clrMapOvr>
+    <a:masterClrMapping/>
+  </p:clrMapOvr>
+</p:sld>
+</file>
+
+<file path=ppt/slides/slide11.xml><?xml version="1.0" encoding="utf-8"?>
+<p:sld xmlns:a="http://schemas.openxmlformats.org/drawingml/2006/main" xmlns:r="http://schemas.openxmlformats.org/officeDocument/2006/relationships" xmlns:p="http://schemas.openxmlformats.org/presentationml/2006/main">
+  <p:cSld>
+    <p:spTree>
+      <p:nvGrpSpPr>
+        <p:cNvPr id="1" name="">
+          <a:extLst>
+            <a:ext uri="{FF2B5EF4-FFF2-40B4-BE49-F238E27FC236}">
               <a16:creationId xmlns:a16="http://schemas.microsoft.com/office/drawing/2014/main" id="{86A67123-BA79-6371-69D8-601CA6105213}"/>
             </a:ext>
           </a:extLst>
@@ -5602,7 +5671,7 @@
 </p:sld>
 </file>
 
-<file path=ppt/slides/slide11.xml><?xml version="1.0" encoding="utf-8"?>
+<file path=ppt/slides/slide12.xml><?xml version="1.0" encoding="utf-8"?>
 <p:sld xmlns:a="http://schemas.openxmlformats.org/drawingml/2006/main" xmlns:r="http://schemas.openxmlformats.org/officeDocument/2006/relationships" xmlns:p="http://schemas.openxmlformats.org/presentationml/2006/main">
   <p:cSld>
     <p:spTree>
@@ -5893,7 +5962,7 @@
 </p:sld>
 </file>
 
-<file path=ppt/slides/slide12.xml><?xml version="1.0" encoding="utf-8"?>
+<file path=ppt/slides/slide13.xml><?xml version="1.0" encoding="utf-8"?>
 <p:sld xmlns:a="http://schemas.openxmlformats.org/drawingml/2006/main" xmlns:r="http://schemas.openxmlformats.org/officeDocument/2006/relationships" xmlns:p="http://schemas.openxmlformats.org/presentationml/2006/main">
   <p:cSld>
     <p:spTree>
@@ -6558,7 +6627,7 @@
 </p:sld>
 </file>
 
-<file path=ppt/slides/slide13.xml><?xml version="1.0" encoding="utf-8"?>
+<file path=ppt/slides/slide14.xml><?xml version="1.0" encoding="utf-8"?>
 <p:sld xmlns:a="http://schemas.openxmlformats.org/drawingml/2006/main" xmlns:r="http://schemas.openxmlformats.org/officeDocument/2006/relationships" xmlns:p="http://schemas.openxmlformats.org/presentationml/2006/main">
   <p:cSld>
     <p:spTree>
@@ -7040,7 +7109,7 @@
 </p:sld>
 </file>
 
-<file path=ppt/slides/slide14.xml><?xml version="1.0" encoding="utf-8"?>
+<file path=ppt/slides/slide15.xml><?xml version="1.0" encoding="utf-8"?>
 <p:sld xmlns:a="http://schemas.openxmlformats.org/drawingml/2006/main" xmlns:r="http://schemas.openxmlformats.org/officeDocument/2006/relationships" xmlns:p="http://schemas.openxmlformats.org/presentationml/2006/main">
   <p:cSld>
     <p:spTree>
@@ -7287,7 +7356,7 @@
 </p:sld>
 </file>
 
-<file path=ppt/slides/slide15.xml><?xml version="1.0" encoding="utf-8"?>
+<file path=ppt/slides/slide16.xml><?xml version="1.0" encoding="utf-8"?>
 <p:sld xmlns:a="http://schemas.openxmlformats.org/drawingml/2006/main" xmlns:r="http://schemas.openxmlformats.org/officeDocument/2006/relationships" xmlns:p="http://schemas.openxmlformats.org/presentationml/2006/main">
   <p:cSld>
     <p:spTree>
@@ -7354,7 +7423,7 @@
 </p:sld>
 </file>
 
-<file path=ppt/slides/slide16.xml><?xml version="1.0" encoding="utf-8"?>
+<file path=ppt/slides/slide17.xml><?xml version="1.0" encoding="utf-8"?>
 <p:sld xmlns:a="http://schemas.openxmlformats.org/drawingml/2006/main" xmlns:r="http://schemas.openxmlformats.org/officeDocument/2006/relationships" xmlns:p="http://schemas.openxmlformats.org/presentationml/2006/main">
   <p:cSld>
     <p:spTree>
@@ -8677,7 +8746,7 @@
 </p:sld>
 </file>
 
-<file path=ppt/slides/slide17.xml><?xml version="1.0" encoding="utf-8"?>
+<file path=ppt/slides/slide18.xml><?xml version="1.0" encoding="utf-8"?>
 <p:sld xmlns:a="http://schemas.openxmlformats.org/drawingml/2006/main" xmlns:r="http://schemas.openxmlformats.org/officeDocument/2006/relationships" xmlns:p="http://schemas.openxmlformats.org/presentationml/2006/main">
   <p:cSld>
     <p:spTree>
@@ -10388,7 +10457,7 @@
 </p:sld>
 </file>
 
-<file path=ppt/slides/slide18.xml><?xml version="1.0" encoding="utf-8"?>
+<file path=ppt/slides/slide19.xml><?xml version="1.0" encoding="utf-8"?>
 <p:sld xmlns:a="http://schemas.openxmlformats.org/drawingml/2006/main" xmlns:r="http://schemas.openxmlformats.org/officeDocument/2006/relationships" xmlns:p="http://schemas.openxmlformats.org/presentationml/2006/main">
   <p:cSld>
     <p:spTree>
@@ -11554,7 +11623,1141 @@
 </p:sld>
 </file>
 
-<file path=ppt/slides/slide19.xml><?xml version="1.0" encoding="utf-8"?>
+<file path=ppt/slides/slide2.xml><?xml version="1.0" encoding="utf-8"?>
+<p:sld xmlns:a="http://schemas.openxmlformats.org/drawingml/2006/main" xmlns:r="http://schemas.openxmlformats.org/officeDocument/2006/relationships" xmlns:p="http://schemas.openxmlformats.org/presentationml/2006/main">
+  <p:cSld>
+    <p:spTree>
+      <p:nvGrpSpPr>
+        <p:cNvPr id="1" name=""/>
+        <p:cNvGrpSpPr/>
+        <p:nvPr/>
+      </p:nvGrpSpPr>
+      <p:grpSpPr>
+        <a:xfrm>
+          <a:off x="0" y="0"/>
+          <a:ext cx="0" cy="0"/>
+          <a:chOff x="0" y="0"/>
+          <a:chExt cx="0" cy="0"/>
+        </a:xfrm>
+      </p:grpSpPr>
+      <p:sp>
+        <p:nvSpPr>
+          <p:cNvPr id="2" name="Title 1">
+            <a:extLst>
+              <a:ext uri="{FF2B5EF4-FFF2-40B4-BE49-F238E27FC236}">
+                <a16:creationId xmlns:a16="http://schemas.microsoft.com/office/drawing/2014/main" id="{C524781E-35ED-245C-F85D-64F5555F6948}"/>
+              </a:ext>
+            </a:extLst>
+          </p:cNvPr>
+          <p:cNvSpPr>
+            <a:spLocks noGrp="1"/>
+          </p:cNvSpPr>
+          <p:nvPr>
+            <p:ph type="title"/>
+          </p:nvPr>
+        </p:nvSpPr>
+        <p:spPr/>
+        <p:txBody>
+          <a:bodyPr/>
+          <a:lstStyle/>
+          <a:p>
+            <a:r>
+              <a:rPr lang="ko-KR" altLang="en-US" dirty="0">
+                <a:latin typeface="+mn-lt"/>
+                <a:ea typeface="맑은 고딕"/>
+              </a:rPr>
+              <a:t>목차(Table of Contents)</a:t>
+            </a:r>
+          </a:p>
+        </p:txBody>
+      </p:sp>
+      <p:sp>
+        <p:nvSpPr>
+          <p:cNvPr id="3" name="Content Placeholder 2">
+            <a:extLst>
+              <a:ext uri="{FF2B5EF4-FFF2-40B4-BE49-F238E27FC236}">
+                <a16:creationId xmlns:a16="http://schemas.microsoft.com/office/drawing/2014/main" id="{3475B7FB-EB2C-CA4B-1C14-339864FDB75E}"/>
+              </a:ext>
+            </a:extLst>
+          </p:cNvPr>
+          <p:cNvSpPr>
+            <a:spLocks noGrp="1"/>
+          </p:cNvSpPr>
+          <p:nvPr>
+            <p:ph idx="1"/>
+          </p:nvPr>
+        </p:nvSpPr>
+        <p:spPr/>
+        <p:txBody>
+          <a:bodyPr>
+            <a:normAutofit fontScale="92500" lnSpcReduction="10000"/>
+          </a:bodyPr>
+          <a:lstStyle/>
+          <a:p>
+            <a:pPr marL="0" indent="0">
+              <a:lnSpc>
+                <a:spcPct val="150000"/>
+              </a:lnSpc>
+              <a:buNone/>
+            </a:pPr>
+            <a:r>
+              <a:rPr lang="ko-KR" altLang="en-US" sz="2400" dirty="0">
+                <a:latin typeface="+mn-lt"/>
+                <a:ea typeface="맑은 고딕"/>
+              </a:rPr>
+              <a:t>Topic 1:	화폐의 시간가치(time value of money) — 가치평가의 엔진</a:t>
+            </a:r>
+          </a:p>
+          <a:p>
+            <a:pPr marL="0" indent="0">
+              <a:lnSpc>
+                <a:spcPct val="150000"/>
+              </a:lnSpc>
+              <a:buNone/>
+            </a:pPr>
+            <a:r>
+              <a:rPr lang="ko-KR" altLang="en-US" sz="2400" dirty="0">
+                <a:latin typeface="+mn-lt"/>
+                <a:ea typeface="맑은 고딕"/>
+              </a:rPr>
+              <a:t>Topic 2:	미스터 마켓(Mr. Market)을 만나다 — 가격 대 가치</a:t>
+            </a:r>
+          </a:p>
+          <a:p>
+            <a:pPr marL="0" indent="0">
+              <a:lnSpc>
+                <a:spcPct val="150000"/>
+              </a:lnSpc>
+              <a:buNone/>
+            </a:pPr>
+            <a:r>
+              <a:rPr lang="ko-KR" altLang="en-US" sz="2400" dirty="0">
+                <a:latin typeface="+mn-lt"/>
+                <a:ea typeface="맑은 고딕"/>
+              </a:rPr>
+              <a:t>Topic 3:	할인된 잉여현금흐름(discounted free cash flow, DCF) 가치평가</a:t>
+            </a:r>
+          </a:p>
+          <a:p>
+            <a:pPr marL="0" indent="0">
+              <a:lnSpc>
+                <a:spcPct val="150000"/>
+              </a:lnSpc>
+              <a:buNone/>
+            </a:pPr>
+            <a:r>
+              <a:rPr lang="ko-KR" altLang="en-US" sz="2400" dirty="0">
+                <a:latin typeface="+mn-lt"/>
+                <a:ea typeface="맑은 고딕"/>
+              </a:rPr>
+              <a:t>Topic 4:	자기자본비용(cost of equity)</a:t>
+            </a:r>
+          </a:p>
+          <a:p>
+            <a:pPr marL="0" indent="0">
+              <a:lnSpc>
+                <a:spcPct val="150000"/>
+              </a:lnSpc>
+              <a:buNone/>
+            </a:pPr>
+            <a:r>
+              <a:rPr lang="ko-KR" altLang="en-US" sz="2400" dirty="0">
+                <a:ea typeface="맑은 고딕"/>
+              </a:rPr>
+              <a:t>Topic 5:	</a:t>
+            </a:r>
+            <a:r>
+              <a:rPr lang="ko-KR" altLang="en-US" sz="2400" dirty="0">
+                <a:latin typeface="+mn-lt"/>
+                <a:ea typeface="맑은 고딕"/>
+              </a:rPr>
+              <a:t>주가수익비율(price-earnings ratio, P/E)</a:t>
+            </a:r>
+          </a:p>
+          <a:p>
+            <a:pPr marL="0" indent="0">
+              <a:lnSpc>
+                <a:spcPct val="150000"/>
+              </a:lnSpc>
+              <a:buNone/>
+            </a:pPr>
+            <a:r>
+              <a:rPr lang="ko-KR" altLang="en-US" sz="2400" dirty="0">
+                <a:latin typeface="+mn-lt"/>
+                <a:ea typeface="맑은 고딕"/>
+              </a:rPr>
+              <a:t>Topic </a:t>
+            </a:r>
+            <a:r>
+              <a:rPr lang="ko-KR" altLang="en-US" sz="2400" dirty="0">
+                <a:ea typeface="맑은 고딕"/>
+              </a:rPr>
+              <a:t>6</a:t>
+            </a:r>
+            <a:r>
+              <a:rPr lang="ko-KR" altLang="en-US" sz="2400" dirty="0">
+                <a:latin typeface="+mn-lt"/>
+                <a:ea typeface="맑은 고딕"/>
+              </a:rPr>
+              <a:t>:가치평가 투입변수로서 잉여현금흐름(free cash flow) 대 당기순이익(net income)</a:t>
+            </a:r>
+          </a:p>
+          <a:p>
+            <a:pPr marL="0" indent="0">
+              <a:lnSpc>
+                <a:spcPct val="150000"/>
+              </a:lnSpc>
+              <a:buNone/>
+            </a:pPr>
+            <a:r>
+              <a:rPr lang="en-US" altLang="ko-KR" sz="2400" strike="sngStrike" dirty="0">
+                <a:latin typeface="+mn-lt"/>
+                <a:ea typeface="맑은 고딕"/>
+              </a:rPr>
+              <a:t>Topic 7: Trailing P/E vs. Forward P/E</a:t>
+            </a:r>
+          </a:p>
+          <a:p>
+            <a:pPr marL="0" indent="0">
+              <a:lnSpc>
+                <a:spcPct val="150000"/>
+              </a:lnSpc>
+              <a:buNone/>
+            </a:pPr>
+            <a:r>
+              <a:rPr lang="ko-KR" altLang="en-US" sz="2400" dirty="0" err="1">
+                <a:latin typeface="+mn-lt"/>
+                <a:ea typeface="맑은 고딕"/>
+              </a:rPr>
+              <a:t>Topic</a:t>
+            </a:r>
+            <a:r>
+              <a:rPr lang="ko-KR" altLang="en-US" sz="2400" dirty="0">
+                <a:latin typeface="+mn-lt"/>
+                <a:ea typeface="맑은 고딕"/>
+              </a:rPr>
+              <a:t> 8:	안전마진(margin of safety)</a:t>
+            </a:r>
+          </a:p>
+          <a:p>
+            <a:pPr marL="0" indent="0">
+              <a:lnSpc>
+                <a:spcPct val="150000"/>
+              </a:lnSpc>
+              <a:buNone/>
+            </a:pPr>
+            <a:r>
+              <a:rPr lang="ko-KR" altLang="en-US" sz="2400" dirty="0" err="1">
+                <a:latin typeface="+mn-lt"/>
+                <a:ea typeface="맑은 고딕"/>
+              </a:rPr>
+              <a:t>Topic</a:t>
+            </a:r>
+            <a:r>
+              <a:rPr lang="ko-KR" altLang="en-US" sz="2400" dirty="0">
+                <a:latin typeface="+mn-lt"/>
+                <a:ea typeface="맑은 고딕"/>
+              </a:rPr>
+              <a:t> </a:t>
+            </a:r>
+            <a:r>
+              <a:rPr lang="en-US" altLang="ko-KR" sz="2400" dirty="0">
+                <a:latin typeface="+mn-lt"/>
+                <a:ea typeface="맑은 고딕"/>
+              </a:rPr>
+              <a:t>9</a:t>
+            </a:r>
+            <a:r>
+              <a:rPr lang="ko-KR" altLang="en-US" sz="2400" dirty="0">
+                <a:latin typeface="+mn-lt"/>
+                <a:ea typeface="맑은 고딕"/>
+              </a:rPr>
+              <a:t>:	이익의 질(earnings quality)</a:t>
+            </a:r>
+          </a:p>
+        </p:txBody>
+      </p:sp>
+    </p:spTree>
+    <p:extLst>
+      <p:ext uri="{BB962C8B-B14F-4D97-AF65-F5344CB8AC3E}">
+        <p14:creationId xmlns:p14="http://schemas.microsoft.com/office/powerpoint/2010/main" val="1695484269"/>
+      </p:ext>
+    </p:extLst>
+  </p:cSld>
+  <p:clrMapOvr>
+    <a:masterClrMapping/>
+  </p:clrMapOvr>
+  <p:timing>
+    <p:tnLst>
+      <p:par>
+        <p:cTn id="1" dur="indefinite" restart="never" nodeType="tmRoot">
+          <p:childTnLst>
+            <p:seq concurrent="1" nextAc="seek">
+              <p:cTn id="2" dur="indefinite" nodeType="mainSeq">
+                <p:childTnLst>
+                  <p:par>
+                    <p:cTn id="3" fill="hold">
+                      <p:stCondLst>
+                        <p:cond delay="indefinite"/>
+                      </p:stCondLst>
+                      <p:childTnLst>
+                        <p:par>
+                          <p:cTn id="4" fill="hold">
+                            <p:stCondLst>
+                              <p:cond delay="0"/>
+                            </p:stCondLst>
+                            <p:childTnLst>
+                              <p:par>
+                                <p:cTn id="5" presetID="2" presetClass="entr" presetSubtype="4" fill="hold" nodeType="clickEffect">
+                                  <p:stCondLst>
+                                    <p:cond delay="0"/>
+                                  </p:stCondLst>
+                                  <p:childTnLst>
+                                    <p:set>
+                                      <p:cBhvr>
+                                        <p:cTn id="6" dur="1" fill="hold">
+                                          <p:stCondLst>
+                                            <p:cond delay="0"/>
+                                          </p:stCondLst>
+                                        </p:cTn>
+                                        <p:tgtEl>
+                                          <p:spTgt spid="3">
+                                            <p:txEl>
+                                              <p:pRg st="0" end="0"/>
+                                            </p:txEl>
+                                          </p:spTgt>
+                                        </p:tgtEl>
+                                        <p:attrNameLst>
+                                          <p:attrName>style.visibility</p:attrName>
+                                        </p:attrNameLst>
+                                      </p:cBhvr>
+                                      <p:to>
+                                        <p:strVal val="visible"/>
+                                      </p:to>
+                                    </p:set>
+                                    <p:anim calcmode="lin" valueType="num">
+                                      <p:cBhvr additive="base">
+                                        <p:cTn id="7" dur="500" fill="hold"/>
+                                        <p:tgtEl>
+                                          <p:spTgt spid="3">
+                                            <p:txEl>
+                                              <p:pRg st="0" end="0"/>
+                                            </p:txEl>
+                                          </p:spTgt>
+                                        </p:tgtEl>
+                                        <p:attrNameLst>
+                                          <p:attrName>ppt_x</p:attrName>
+                                        </p:attrNameLst>
+                                      </p:cBhvr>
+                                      <p:tavLst>
+                                        <p:tav tm="0">
+                                          <p:val>
+                                            <p:strVal val="#ppt_x"/>
+                                          </p:val>
+                                        </p:tav>
+                                        <p:tav tm="100000">
+                                          <p:val>
+                                            <p:strVal val="#ppt_x"/>
+                                          </p:val>
+                                        </p:tav>
+                                      </p:tavLst>
+                                    </p:anim>
+                                    <p:anim calcmode="lin" valueType="num">
+                                      <p:cBhvr additive="base">
+                                        <p:cTn id="8" dur="500" fill="hold"/>
+                                        <p:tgtEl>
+                                          <p:spTgt spid="3">
+                                            <p:txEl>
+                                              <p:pRg st="0" end="0"/>
+                                            </p:txEl>
+                                          </p:spTgt>
+                                        </p:tgtEl>
+                                        <p:attrNameLst>
+                                          <p:attrName>ppt_y</p:attrName>
+                                        </p:attrNameLst>
+                                      </p:cBhvr>
+                                      <p:tavLst>
+                                        <p:tav tm="0">
+                                          <p:val>
+                                            <p:strVal val="1+#ppt_h/2"/>
+                                          </p:val>
+                                        </p:tav>
+                                        <p:tav tm="100000">
+                                          <p:val>
+                                            <p:strVal val="#ppt_y"/>
+                                          </p:val>
+                                        </p:tav>
+                                      </p:tavLst>
+                                    </p:anim>
+                                  </p:childTnLst>
+                                </p:cTn>
+                              </p:par>
+                              <p:par>
+                                <p:cTn id="9" presetID="2" presetClass="entr" presetSubtype="4" fill="hold" nodeType="withEffect">
+                                  <p:stCondLst>
+                                    <p:cond delay="0"/>
+                                  </p:stCondLst>
+                                  <p:childTnLst>
+                                    <p:set>
+                                      <p:cBhvr>
+                                        <p:cTn id="10" dur="1" fill="hold">
+                                          <p:stCondLst>
+                                            <p:cond delay="0"/>
+                                          </p:stCondLst>
+                                        </p:cTn>
+                                        <p:tgtEl>
+                                          <p:spTgt spid="3">
+                                            <p:txEl>
+                                              <p:pRg st="1" end="1"/>
+                                            </p:txEl>
+                                          </p:spTgt>
+                                        </p:tgtEl>
+                                        <p:attrNameLst>
+                                          <p:attrName>style.visibility</p:attrName>
+                                        </p:attrNameLst>
+                                      </p:cBhvr>
+                                      <p:to>
+                                        <p:strVal val="visible"/>
+                                      </p:to>
+                                    </p:set>
+                                    <p:anim calcmode="lin" valueType="num">
+                                      <p:cBhvr additive="base">
+                                        <p:cTn id="11" dur="500" fill="hold"/>
+                                        <p:tgtEl>
+                                          <p:spTgt spid="3">
+                                            <p:txEl>
+                                              <p:pRg st="1" end="1"/>
+                                            </p:txEl>
+                                          </p:spTgt>
+                                        </p:tgtEl>
+                                        <p:attrNameLst>
+                                          <p:attrName>ppt_x</p:attrName>
+                                        </p:attrNameLst>
+                                      </p:cBhvr>
+                                      <p:tavLst>
+                                        <p:tav tm="0">
+                                          <p:val>
+                                            <p:strVal val="#ppt_x"/>
+                                          </p:val>
+                                        </p:tav>
+                                        <p:tav tm="100000">
+                                          <p:val>
+                                            <p:strVal val="#ppt_x"/>
+                                          </p:val>
+                                        </p:tav>
+                                      </p:tavLst>
+                                    </p:anim>
+                                    <p:anim calcmode="lin" valueType="num">
+                                      <p:cBhvr additive="base">
+                                        <p:cTn id="12" dur="500" fill="hold"/>
+                                        <p:tgtEl>
+                                          <p:spTgt spid="3">
+                                            <p:txEl>
+                                              <p:pRg st="1" end="1"/>
+                                            </p:txEl>
+                                          </p:spTgt>
+                                        </p:tgtEl>
+                                        <p:attrNameLst>
+                                          <p:attrName>ppt_y</p:attrName>
+                                        </p:attrNameLst>
+                                      </p:cBhvr>
+                                      <p:tavLst>
+                                        <p:tav tm="0">
+                                          <p:val>
+                                            <p:strVal val="1+#ppt_h/2"/>
+                                          </p:val>
+                                        </p:tav>
+                                        <p:tav tm="100000">
+                                          <p:val>
+                                            <p:strVal val="#ppt_y"/>
+                                          </p:val>
+                                        </p:tav>
+                                      </p:tavLst>
+                                    </p:anim>
+                                  </p:childTnLst>
+                                </p:cTn>
+                              </p:par>
+                            </p:childTnLst>
+                          </p:cTn>
+                        </p:par>
+                      </p:childTnLst>
+                    </p:cTn>
+                  </p:par>
+                  <p:par>
+                    <p:cTn id="13" fill="hold">
+                      <p:stCondLst>
+                        <p:cond delay="indefinite"/>
+                      </p:stCondLst>
+                      <p:childTnLst>
+                        <p:par>
+                          <p:cTn id="14" fill="hold">
+                            <p:stCondLst>
+                              <p:cond delay="0"/>
+                            </p:stCondLst>
+                            <p:childTnLst>
+                              <p:par>
+                                <p:cTn id="15" presetID="2" presetClass="entr" presetSubtype="4" fill="hold" nodeType="clickEffect">
+                                  <p:stCondLst>
+                                    <p:cond delay="0"/>
+                                  </p:stCondLst>
+                                  <p:childTnLst>
+                                    <p:set>
+                                      <p:cBhvr>
+                                        <p:cTn id="16" dur="1" fill="hold">
+                                          <p:stCondLst>
+                                            <p:cond delay="0"/>
+                                          </p:stCondLst>
+                                        </p:cTn>
+                                        <p:tgtEl>
+                                          <p:spTgt spid="3">
+                                            <p:txEl>
+                                              <p:pRg st="2" end="2"/>
+                                            </p:txEl>
+                                          </p:spTgt>
+                                        </p:tgtEl>
+                                        <p:attrNameLst>
+                                          <p:attrName>style.visibility</p:attrName>
+                                        </p:attrNameLst>
+                                      </p:cBhvr>
+                                      <p:to>
+                                        <p:strVal val="visible"/>
+                                      </p:to>
+                                    </p:set>
+                                    <p:anim calcmode="lin" valueType="num">
+                                      <p:cBhvr additive="base">
+                                        <p:cTn id="17" dur="500" fill="hold"/>
+                                        <p:tgtEl>
+                                          <p:spTgt spid="3">
+                                            <p:txEl>
+                                              <p:pRg st="2" end="2"/>
+                                            </p:txEl>
+                                          </p:spTgt>
+                                        </p:tgtEl>
+                                        <p:attrNameLst>
+                                          <p:attrName>ppt_x</p:attrName>
+                                        </p:attrNameLst>
+                                      </p:cBhvr>
+                                      <p:tavLst>
+                                        <p:tav tm="0">
+                                          <p:val>
+                                            <p:strVal val="#ppt_x"/>
+                                          </p:val>
+                                        </p:tav>
+                                        <p:tav tm="100000">
+                                          <p:val>
+                                            <p:strVal val="#ppt_x"/>
+                                          </p:val>
+                                        </p:tav>
+                                      </p:tavLst>
+                                    </p:anim>
+                                    <p:anim calcmode="lin" valueType="num">
+                                      <p:cBhvr additive="base">
+                                        <p:cTn id="18" dur="500" fill="hold"/>
+                                        <p:tgtEl>
+                                          <p:spTgt spid="3">
+                                            <p:txEl>
+                                              <p:pRg st="2" end="2"/>
+                                            </p:txEl>
+                                          </p:spTgt>
+                                        </p:tgtEl>
+                                        <p:attrNameLst>
+                                          <p:attrName>ppt_y</p:attrName>
+                                        </p:attrNameLst>
+                                      </p:cBhvr>
+                                      <p:tavLst>
+                                        <p:tav tm="0">
+                                          <p:val>
+                                            <p:strVal val="1+#ppt_h/2"/>
+                                          </p:val>
+                                        </p:tav>
+                                        <p:tav tm="100000">
+                                          <p:val>
+                                            <p:strVal val="#ppt_y"/>
+                                          </p:val>
+                                        </p:tav>
+                                      </p:tavLst>
+                                    </p:anim>
+                                  </p:childTnLst>
+                                </p:cTn>
+                              </p:par>
+                              <p:par>
+                                <p:cTn id="19" presetID="2" presetClass="entr" presetSubtype="4" fill="hold" nodeType="withEffect">
+                                  <p:stCondLst>
+                                    <p:cond delay="0"/>
+                                  </p:stCondLst>
+                                  <p:childTnLst>
+                                    <p:set>
+                                      <p:cBhvr>
+                                        <p:cTn id="20" dur="1" fill="hold">
+                                          <p:stCondLst>
+                                            <p:cond delay="0"/>
+                                          </p:stCondLst>
+                                        </p:cTn>
+                                        <p:tgtEl>
+                                          <p:spTgt spid="3">
+                                            <p:txEl>
+                                              <p:pRg st="3" end="3"/>
+                                            </p:txEl>
+                                          </p:spTgt>
+                                        </p:tgtEl>
+                                        <p:attrNameLst>
+                                          <p:attrName>style.visibility</p:attrName>
+                                        </p:attrNameLst>
+                                      </p:cBhvr>
+                                      <p:to>
+                                        <p:strVal val="visible"/>
+                                      </p:to>
+                                    </p:set>
+                                    <p:anim calcmode="lin" valueType="num">
+                                      <p:cBhvr additive="base">
+                                        <p:cTn id="21" dur="500" fill="hold"/>
+                                        <p:tgtEl>
+                                          <p:spTgt spid="3">
+                                            <p:txEl>
+                                              <p:pRg st="3" end="3"/>
+                                            </p:txEl>
+                                          </p:spTgt>
+                                        </p:tgtEl>
+                                        <p:attrNameLst>
+                                          <p:attrName>ppt_x</p:attrName>
+                                        </p:attrNameLst>
+                                      </p:cBhvr>
+                                      <p:tavLst>
+                                        <p:tav tm="0">
+                                          <p:val>
+                                            <p:strVal val="#ppt_x"/>
+                                          </p:val>
+                                        </p:tav>
+                                        <p:tav tm="100000">
+                                          <p:val>
+                                            <p:strVal val="#ppt_x"/>
+                                          </p:val>
+                                        </p:tav>
+                                      </p:tavLst>
+                                    </p:anim>
+                                    <p:anim calcmode="lin" valueType="num">
+                                      <p:cBhvr additive="base">
+                                        <p:cTn id="22" dur="500" fill="hold"/>
+                                        <p:tgtEl>
+                                          <p:spTgt spid="3">
+                                            <p:txEl>
+                                              <p:pRg st="3" end="3"/>
+                                            </p:txEl>
+                                          </p:spTgt>
+                                        </p:tgtEl>
+                                        <p:attrNameLst>
+                                          <p:attrName>ppt_y</p:attrName>
+                                        </p:attrNameLst>
+                                      </p:cBhvr>
+                                      <p:tavLst>
+                                        <p:tav tm="0">
+                                          <p:val>
+                                            <p:strVal val="1+#ppt_h/2"/>
+                                          </p:val>
+                                        </p:tav>
+                                        <p:tav tm="100000">
+                                          <p:val>
+                                            <p:strVal val="#ppt_y"/>
+                                          </p:val>
+                                        </p:tav>
+                                      </p:tavLst>
+                                    </p:anim>
+                                  </p:childTnLst>
+                                </p:cTn>
+                              </p:par>
+                            </p:childTnLst>
+                          </p:cTn>
+                        </p:par>
+                      </p:childTnLst>
+                    </p:cTn>
+                  </p:par>
+                  <p:par>
+                    <p:cTn id="23" fill="hold">
+                      <p:stCondLst>
+                        <p:cond delay="indefinite"/>
+                      </p:stCondLst>
+                      <p:childTnLst>
+                        <p:par>
+                          <p:cTn id="24" fill="hold">
+                            <p:stCondLst>
+                              <p:cond delay="0"/>
+                            </p:stCondLst>
+                            <p:childTnLst>
+                              <p:par>
+                                <p:cTn id="25" presetID="2" presetClass="entr" presetSubtype="4" fill="hold" nodeType="clickEffect">
+                                  <p:stCondLst>
+                                    <p:cond delay="0"/>
+                                  </p:stCondLst>
+                                  <p:childTnLst>
+                                    <p:set>
+                                      <p:cBhvr>
+                                        <p:cTn id="26" dur="1" fill="hold">
+                                          <p:stCondLst>
+                                            <p:cond delay="0"/>
+                                          </p:stCondLst>
+                                        </p:cTn>
+                                        <p:tgtEl>
+                                          <p:spTgt spid="3">
+                                            <p:txEl>
+                                              <p:pRg st="4" end="4"/>
+                                            </p:txEl>
+                                          </p:spTgt>
+                                        </p:tgtEl>
+                                        <p:attrNameLst>
+                                          <p:attrName>style.visibility</p:attrName>
+                                        </p:attrNameLst>
+                                      </p:cBhvr>
+                                      <p:to>
+                                        <p:strVal val="visible"/>
+                                      </p:to>
+                                    </p:set>
+                                    <p:anim calcmode="lin" valueType="num">
+                                      <p:cBhvr additive="base">
+                                        <p:cTn id="27" dur="500" fill="hold"/>
+                                        <p:tgtEl>
+                                          <p:spTgt spid="3">
+                                            <p:txEl>
+                                              <p:pRg st="4" end="4"/>
+                                            </p:txEl>
+                                          </p:spTgt>
+                                        </p:tgtEl>
+                                        <p:attrNameLst>
+                                          <p:attrName>ppt_x</p:attrName>
+                                        </p:attrNameLst>
+                                      </p:cBhvr>
+                                      <p:tavLst>
+                                        <p:tav tm="0">
+                                          <p:val>
+                                            <p:strVal val="#ppt_x"/>
+                                          </p:val>
+                                        </p:tav>
+                                        <p:tav tm="100000">
+                                          <p:val>
+                                            <p:strVal val="#ppt_x"/>
+                                          </p:val>
+                                        </p:tav>
+                                      </p:tavLst>
+                                    </p:anim>
+                                    <p:anim calcmode="lin" valueType="num">
+                                      <p:cBhvr additive="base">
+                                        <p:cTn id="28" dur="500" fill="hold"/>
+                                        <p:tgtEl>
+                                          <p:spTgt spid="3">
+                                            <p:txEl>
+                                              <p:pRg st="4" end="4"/>
+                                            </p:txEl>
+                                          </p:spTgt>
+                                        </p:tgtEl>
+                                        <p:attrNameLst>
+                                          <p:attrName>ppt_y</p:attrName>
+                                        </p:attrNameLst>
+                                      </p:cBhvr>
+                                      <p:tavLst>
+                                        <p:tav tm="0">
+                                          <p:val>
+                                            <p:strVal val="1+#ppt_h/2"/>
+                                          </p:val>
+                                        </p:tav>
+                                        <p:tav tm="100000">
+                                          <p:val>
+                                            <p:strVal val="#ppt_y"/>
+                                          </p:val>
+                                        </p:tav>
+                                      </p:tavLst>
+                                    </p:anim>
+                                  </p:childTnLst>
+                                </p:cTn>
+                              </p:par>
+                              <p:par>
+                                <p:cTn id="29" presetID="2" presetClass="entr" presetSubtype="4" fill="hold" nodeType="withEffect">
+                                  <p:stCondLst>
+                                    <p:cond delay="0"/>
+                                  </p:stCondLst>
+                                  <p:childTnLst>
+                                    <p:set>
+                                      <p:cBhvr>
+                                        <p:cTn id="30" dur="1" fill="hold">
+                                          <p:stCondLst>
+                                            <p:cond delay="0"/>
+                                          </p:stCondLst>
+                                        </p:cTn>
+                                        <p:tgtEl>
+                                          <p:spTgt spid="3">
+                                            <p:txEl>
+                                              <p:pRg st="5" end="5"/>
+                                            </p:txEl>
+                                          </p:spTgt>
+                                        </p:tgtEl>
+                                        <p:attrNameLst>
+                                          <p:attrName>style.visibility</p:attrName>
+                                        </p:attrNameLst>
+                                      </p:cBhvr>
+                                      <p:to>
+                                        <p:strVal val="visible"/>
+                                      </p:to>
+                                    </p:set>
+                                    <p:anim calcmode="lin" valueType="num">
+                                      <p:cBhvr additive="base">
+                                        <p:cTn id="31" dur="500" fill="hold"/>
+                                        <p:tgtEl>
+                                          <p:spTgt spid="3">
+                                            <p:txEl>
+                                              <p:pRg st="5" end="5"/>
+                                            </p:txEl>
+                                          </p:spTgt>
+                                        </p:tgtEl>
+                                        <p:attrNameLst>
+                                          <p:attrName>ppt_x</p:attrName>
+                                        </p:attrNameLst>
+                                      </p:cBhvr>
+                                      <p:tavLst>
+                                        <p:tav tm="0">
+                                          <p:val>
+                                            <p:strVal val="#ppt_x"/>
+                                          </p:val>
+                                        </p:tav>
+                                        <p:tav tm="100000">
+                                          <p:val>
+                                            <p:strVal val="#ppt_x"/>
+                                          </p:val>
+                                        </p:tav>
+                                      </p:tavLst>
+                                    </p:anim>
+                                    <p:anim calcmode="lin" valueType="num">
+                                      <p:cBhvr additive="base">
+                                        <p:cTn id="32" dur="500" fill="hold"/>
+                                        <p:tgtEl>
+                                          <p:spTgt spid="3">
+                                            <p:txEl>
+                                              <p:pRg st="5" end="5"/>
+                                            </p:txEl>
+                                          </p:spTgt>
+                                        </p:tgtEl>
+                                        <p:attrNameLst>
+                                          <p:attrName>ppt_y</p:attrName>
+                                        </p:attrNameLst>
+                                      </p:cBhvr>
+                                      <p:tavLst>
+                                        <p:tav tm="0">
+                                          <p:val>
+                                            <p:strVal val="1+#ppt_h/2"/>
+                                          </p:val>
+                                        </p:tav>
+                                        <p:tav tm="100000">
+                                          <p:val>
+                                            <p:strVal val="#ppt_y"/>
+                                          </p:val>
+                                        </p:tav>
+                                      </p:tavLst>
+                                    </p:anim>
+                                  </p:childTnLst>
+                                </p:cTn>
+                              </p:par>
+                            </p:childTnLst>
+                          </p:cTn>
+                        </p:par>
+                      </p:childTnLst>
+                    </p:cTn>
+                  </p:par>
+                  <p:par>
+                    <p:cTn id="33" fill="hold">
+                      <p:stCondLst>
+                        <p:cond delay="indefinite"/>
+                      </p:stCondLst>
+                      <p:childTnLst>
+                        <p:par>
+                          <p:cTn id="34" fill="hold">
+                            <p:stCondLst>
+                              <p:cond delay="0"/>
+                            </p:stCondLst>
+                            <p:childTnLst>
+                              <p:par>
+                                <p:cTn id="35" presetID="2" presetClass="entr" presetSubtype="4" fill="hold" nodeType="clickEffect">
+                                  <p:stCondLst>
+                                    <p:cond delay="0"/>
+                                  </p:stCondLst>
+                                  <p:childTnLst>
+                                    <p:set>
+                                      <p:cBhvr>
+                                        <p:cTn id="36" dur="1" fill="hold">
+                                          <p:stCondLst>
+                                            <p:cond delay="0"/>
+                                          </p:stCondLst>
+                                        </p:cTn>
+                                        <p:tgtEl>
+                                          <p:spTgt spid="3">
+                                            <p:txEl>
+                                              <p:pRg st="6" end="6"/>
+                                            </p:txEl>
+                                          </p:spTgt>
+                                        </p:tgtEl>
+                                        <p:attrNameLst>
+                                          <p:attrName>style.visibility</p:attrName>
+                                        </p:attrNameLst>
+                                      </p:cBhvr>
+                                      <p:to>
+                                        <p:strVal val="visible"/>
+                                      </p:to>
+                                    </p:set>
+                                    <p:anim calcmode="lin" valueType="num">
+                                      <p:cBhvr additive="base">
+                                        <p:cTn id="37" dur="500" fill="hold"/>
+                                        <p:tgtEl>
+                                          <p:spTgt spid="3">
+                                            <p:txEl>
+                                              <p:pRg st="6" end="6"/>
+                                            </p:txEl>
+                                          </p:spTgt>
+                                        </p:tgtEl>
+                                        <p:attrNameLst>
+                                          <p:attrName>ppt_x</p:attrName>
+                                        </p:attrNameLst>
+                                      </p:cBhvr>
+                                      <p:tavLst>
+                                        <p:tav tm="0">
+                                          <p:val>
+                                            <p:strVal val="#ppt_x"/>
+                                          </p:val>
+                                        </p:tav>
+                                        <p:tav tm="100000">
+                                          <p:val>
+                                            <p:strVal val="#ppt_x"/>
+                                          </p:val>
+                                        </p:tav>
+                                      </p:tavLst>
+                                    </p:anim>
+                                    <p:anim calcmode="lin" valueType="num">
+                                      <p:cBhvr additive="base">
+                                        <p:cTn id="38" dur="500" fill="hold"/>
+                                        <p:tgtEl>
+                                          <p:spTgt spid="3">
+                                            <p:txEl>
+                                              <p:pRg st="6" end="6"/>
+                                            </p:txEl>
+                                          </p:spTgt>
+                                        </p:tgtEl>
+                                        <p:attrNameLst>
+                                          <p:attrName>ppt_y</p:attrName>
+                                        </p:attrNameLst>
+                                      </p:cBhvr>
+                                      <p:tavLst>
+                                        <p:tav tm="0">
+                                          <p:val>
+                                            <p:strVal val="1+#ppt_h/2"/>
+                                          </p:val>
+                                        </p:tav>
+                                        <p:tav tm="100000">
+                                          <p:val>
+                                            <p:strVal val="#ppt_y"/>
+                                          </p:val>
+                                        </p:tav>
+                                      </p:tavLst>
+                                    </p:anim>
+                                  </p:childTnLst>
+                                </p:cTn>
+                              </p:par>
+                              <p:par>
+                                <p:cTn id="39" presetID="2" presetClass="entr" presetSubtype="4" fill="hold" nodeType="withEffect">
+                                  <p:stCondLst>
+                                    <p:cond delay="0"/>
+                                  </p:stCondLst>
+                                  <p:childTnLst>
+                                    <p:set>
+                                      <p:cBhvr>
+                                        <p:cTn id="40" dur="1" fill="hold">
+                                          <p:stCondLst>
+                                            <p:cond delay="0"/>
+                                          </p:stCondLst>
+                                        </p:cTn>
+                                        <p:tgtEl>
+                                          <p:spTgt spid="3">
+                                            <p:txEl>
+                                              <p:pRg st="7" end="7"/>
+                                            </p:txEl>
+                                          </p:spTgt>
+                                        </p:tgtEl>
+                                        <p:attrNameLst>
+                                          <p:attrName>style.visibility</p:attrName>
+                                        </p:attrNameLst>
+                                      </p:cBhvr>
+                                      <p:to>
+                                        <p:strVal val="visible"/>
+                                      </p:to>
+                                    </p:set>
+                                    <p:anim calcmode="lin" valueType="num">
+                                      <p:cBhvr additive="base">
+                                        <p:cTn id="41" dur="500" fill="hold"/>
+                                        <p:tgtEl>
+                                          <p:spTgt spid="3">
+                                            <p:txEl>
+                                              <p:pRg st="7" end="7"/>
+                                            </p:txEl>
+                                          </p:spTgt>
+                                        </p:tgtEl>
+                                        <p:attrNameLst>
+                                          <p:attrName>ppt_x</p:attrName>
+                                        </p:attrNameLst>
+                                      </p:cBhvr>
+                                      <p:tavLst>
+                                        <p:tav tm="0">
+                                          <p:val>
+                                            <p:strVal val="#ppt_x"/>
+                                          </p:val>
+                                        </p:tav>
+                                        <p:tav tm="100000">
+                                          <p:val>
+                                            <p:strVal val="#ppt_x"/>
+                                          </p:val>
+                                        </p:tav>
+                                      </p:tavLst>
+                                    </p:anim>
+                                    <p:anim calcmode="lin" valueType="num">
+                                      <p:cBhvr additive="base">
+                                        <p:cTn id="42" dur="500" fill="hold"/>
+                                        <p:tgtEl>
+                                          <p:spTgt spid="3">
+                                            <p:txEl>
+                                              <p:pRg st="7" end="7"/>
+                                            </p:txEl>
+                                          </p:spTgt>
+                                        </p:tgtEl>
+                                        <p:attrNameLst>
+                                          <p:attrName>ppt_y</p:attrName>
+                                        </p:attrNameLst>
+                                      </p:cBhvr>
+                                      <p:tavLst>
+                                        <p:tav tm="0">
+                                          <p:val>
+                                            <p:strVal val="1+#ppt_h/2"/>
+                                          </p:val>
+                                        </p:tav>
+                                        <p:tav tm="100000">
+                                          <p:val>
+                                            <p:strVal val="#ppt_y"/>
+                                          </p:val>
+                                        </p:tav>
+                                      </p:tavLst>
+                                    </p:anim>
+                                  </p:childTnLst>
+                                </p:cTn>
+                              </p:par>
+                              <p:par>
+                                <p:cTn id="43" presetID="2" presetClass="entr" presetSubtype="4" fill="hold" nodeType="withEffect">
+                                  <p:stCondLst>
+                                    <p:cond delay="0"/>
+                                  </p:stCondLst>
+                                  <p:childTnLst>
+                                    <p:set>
+                                      <p:cBhvr>
+                                        <p:cTn id="44" dur="1" fill="hold">
+                                          <p:stCondLst>
+                                            <p:cond delay="0"/>
+                                          </p:stCondLst>
+                                        </p:cTn>
+                                        <p:tgtEl>
+                                          <p:spTgt spid="3">
+                                            <p:txEl>
+                                              <p:pRg st="8" end="8"/>
+                                            </p:txEl>
+                                          </p:spTgt>
+                                        </p:tgtEl>
+                                        <p:attrNameLst>
+                                          <p:attrName>style.visibility</p:attrName>
+                                        </p:attrNameLst>
+                                      </p:cBhvr>
+                                      <p:to>
+                                        <p:strVal val="visible"/>
+                                      </p:to>
+                                    </p:set>
+                                    <p:anim calcmode="lin" valueType="num">
+                                      <p:cBhvr additive="base">
+                                        <p:cTn id="45" dur="500" fill="hold"/>
+                                        <p:tgtEl>
+                                          <p:spTgt spid="3">
+                                            <p:txEl>
+                                              <p:pRg st="8" end="8"/>
+                                            </p:txEl>
+                                          </p:spTgt>
+                                        </p:tgtEl>
+                                        <p:attrNameLst>
+                                          <p:attrName>ppt_x</p:attrName>
+                                        </p:attrNameLst>
+                                      </p:cBhvr>
+                                      <p:tavLst>
+                                        <p:tav tm="0">
+                                          <p:val>
+                                            <p:strVal val="#ppt_x"/>
+                                          </p:val>
+                                        </p:tav>
+                                        <p:tav tm="100000">
+                                          <p:val>
+                                            <p:strVal val="#ppt_x"/>
+                                          </p:val>
+                                        </p:tav>
+                                      </p:tavLst>
+                                    </p:anim>
+                                    <p:anim calcmode="lin" valueType="num">
+                                      <p:cBhvr additive="base">
+                                        <p:cTn id="46" dur="500" fill="hold"/>
+                                        <p:tgtEl>
+                                          <p:spTgt spid="3">
+                                            <p:txEl>
+                                              <p:pRg st="8" end="8"/>
+                                            </p:txEl>
+                                          </p:spTgt>
+                                        </p:tgtEl>
+                                        <p:attrNameLst>
+                                          <p:attrName>ppt_y</p:attrName>
+                                        </p:attrNameLst>
+                                      </p:cBhvr>
+                                      <p:tavLst>
+                                        <p:tav tm="0">
+                                          <p:val>
+                                            <p:strVal val="1+#ppt_h/2"/>
+                                          </p:val>
+                                        </p:tav>
+                                        <p:tav tm="100000">
+                                          <p:val>
+                                            <p:strVal val="#ppt_y"/>
+                                          </p:val>
+                                        </p:tav>
+                                      </p:tavLst>
+                                    </p:anim>
+                                  </p:childTnLst>
+                                </p:cTn>
+                              </p:par>
+                            </p:childTnLst>
+                          </p:cTn>
+                        </p:par>
+                      </p:childTnLst>
+                    </p:cTn>
+                  </p:par>
+                </p:childTnLst>
+              </p:cTn>
+              <p:prevCondLst>
+                <p:cond evt="onPrev" delay="0">
+                  <p:tgtEl>
+                    <p:sldTgt/>
+                  </p:tgtEl>
+                </p:cond>
+              </p:prevCondLst>
+              <p:nextCondLst>
+                <p:cond evt="onNext" delay="0">
+                  <p:tgtEl>
+                    <p:sldTgt/>
+                  </p:tgtEl>
+                </p:cond>
+              </p:nextCondLst>
+            </p:seq>
+          </p:childTnLst>
+        </p:cTn>
+      </p:par>
+    </p:tnLst>
+  </p:timing>
+</p:sld>
+</file>
+
+<file path=ppt/slides/slide20.xml><?xml version="1.0" encoding="utf-8"?>
 <p:sld xmlns:a="http://schemas.openxmlformats.org/drawingml/2006/main" xmlns:r="http://schemas.openxmlformats.org/officeDocument/2006/relationships" xmlns:p="http://schemas.openxmlformats.org/presentationml/2006/main">
   <p:cSld>
     <p:spTree>
@@ -11659,259 +12862,7 @@
 </p:sld>
 </file>
 
-<file path=ppt/slides/slide2.xml><?xml version="1.0" encoding="utf-8"?>
-<p:sld xmlns:a="http://schemas.openxmlformats.org/drawingml/2006/main" xmlns:r="http://schemas.openxmlformats.org/officeDocument/2006/relationships" xmlns:p="http://schemas.openxmlformats.org/presentationml/2006/main">
-  <p:cSld>
-    <p:spTree>
-      <p:nvGrpSpPr>
-        <p:cNvPr id="1" name=""/>
-        <p:cNvGrpSpPr/>
-        <p:nvPr/>
-      </p:nvGrpSpPr>
-      <p:grpSpPr>
-        <a:xfrm>
-          <a:off x="0" y="0"/>
-          <a:ext cx="0" cy="0"/>
-          <a:chOff x="0" y="0"/>
-          <a:chExt cx="0" cy="0"/>
-        </a:xfrm>
-      </p:grpSpPr>
-      <p:sp>
-        <p:nvSpPr>
-          <p:cNvPr id="2" name="Title 1">
-            <a:extLst>
-              <a:ext uri="{FF2B5EF4-FFF2-40B4-BE49-F238E27FC236}">
-                <a16:creationId xmlns:a16="http://schemas.microsoft.com/office/drawing/2014/main" id="{C524781E-35ED-245C-F85D-64F5555F6948}"/>
-              </a:ext>
-            </a:extLst>
-          </p:cNvPr>
-          <p:cNvSpPr>
-            <a:spLocks noGrp="1"/>
-          </p:cNvSpPr>
-          <p:nvPr>
-            <p:ph type="title"/>
-          </p:nvPr>
-        </p:nvSpPr>
-        <p:spPr/>
-        <p:txBody>
-          <a:bodyPr/>
-          <a:lstStyle/>
-          <a:p>
-            <a:r>
-              <a:rPr lang="ko-KR" altLang="en-US" dirty="0">
-                <a:latin typeface="+mn-lt"/>
-                <a:ea typeface="맑은 고딕"/>
-              </a:rPr>
-              <a:t>목차(Table of Contents)</a:t>
-            </a:r>
-          </a:p>
-        </p:txBody>
-      </p:sp>
-      <p:sp>
-        <p:nvSpPr>
-          <p:cNvPr id="3" name="Content Placeholder 2">
-            <a:extLst>
-              <a:ext uri="{FF2B5EF4-FFF2-40B4-BE49-F238E27FC236}">
-                <a16:creationId xmlns:a16="http://schemas.microsoft.com/office/drawing/2014/main" id="{3475B7FB-EB2C-CA4B-1C14-339864FDB75E}"/>
-              </a:ext>
-            </a:extLst>
-          </p:cNvPr>
-          <p:cNvSpPr>
-            <a:spLocks noGrp="1"/>
-          </p:cNvSpPr>
-          <p:nvPr>
-            <p:ph idx="1"/>
-          </p:nvPr>
-        </p:nvSpPr>
-        <p:spPr/>
-        <p:txBody>
-          <a:bodyPr>
-            <a:normAutofit fontScale="92500" lnSpcReduction="10000"/>
-          </a:bodyPr>
-          <a:lstStyle/>
-          <a:p>
-            <a:pPr marL="0" indent="0">
-              <a:lnSpc>
-                <a:spcPct val="150000"/>
-              </a:lnSpc>
-              <a:buNone/>
-            </a:pPr>
-            <a:r>
-              <a:rPr lang="ko-KR" altLang="en-US" sz="2400" dirty="0">
-                <a:latin typeface="+mn-lt"/>
-                <a:ea typeface="맑은 고딕"/>
-              </a:rPr>
-              <a:t>Topic 1:	화폐의 시간가치(time value of money) — 가치평가의 엔진</a:t>
-            </a:r>
-          </a:p>
-          <a:p>
-            <a:pPr marL="0" indent="0">
-              <a:lnSpc>
-                <a:spcPct val="150000"/>
-              </a:lnSpc>
-              <a:buNone/>
-            </a:pPr>
-            <a:r>
-              <a:rPr lang="ko-KR" altLang="en-US" sz="2400" dirty="0">
-                <a:latin typeface="+mn-lt"/>
-                <a:ea typeface="맑은 고딕"/>
-              </a:rPr>
-              <a:t>Topic 2:	미스터 마켓(Mr. Market)을 만나다 — 가격 대 가치</a:t>
-            </a:r>
-          </a:p>
-          <a:p>
-            <a:pPr marL="0" indent="0">
-              <a:lnSpc>
-                <a:spcPct val="150000"/>
-              </a:lnSpc>
-              <a:buNone/>
-            </a:pPr>
-            <a:r>
-              <a:rPr lang="ko-KR" altLang="en-US" sz="2400" dirty="0">
-                <a:latin typeface="+mn-lt"/>
-                <a:ea typeface="맑은 고딕"/>
-              </a:rPr>
-              <a:t>Topic 3:	할인된 잉여현금흐름(discounted free cash flow, DCF) 가치평가</a:t>
-            </a:r>
-          </a:p>
-          <a:p>
-            <a:pPr marL="0" indent="0">
-              <a:lnSpc>
-                <a:spcPct val="150000"/>
-              </a:lnSpc>
-              <a:buNone/>
-            </a:pPr>
-            <a:r>
-              <a:rPr lang="ko-KR" altLang="en-US" sz="2400" dirty="0">
-                <a:latin typeface="+mn-lt"/>
-                <a:ea typeface="맑은 고딕"/>
-              </a:rPr>
-              <a:t>Topic 4:	자기자본비용(cost of equity)</a:t>
-            </a:r>
-          </a:p>
-          <a:p>
-            <a:pPr marL="0" indent="0">
-              <a:lnSpc>
-                <a:spcPct val="150000"/>
-              </a:lnSpc>
-              <a:buNone/>
-            </a:pPr>
-            <a:r>
-              <a:rPr lang="ko-KR" altLang="en-US" sz="2400" dirty="0">
-                <a:ea typeface="맑은 고딕"/>
-              </a:rPr>
-              <a:t>Topic 5:	</a:t>
-            </a:r>
-            <a:r>
-              <a:rPr lang="ko-KR" altLang="en-US" sz="2400" dirty="0">
-                <a:latin typeface="+mn-lt"/>
-                <a:ea typeface="맑은 고딕"/>
-              </a:rPr>
-              <a:t>주가수익비율(price-earnings ratio, P/E)</a:t>
-            </a:r>
-          </a:p>
-          <a:p>
-            <a:pPr marL="0" indent="0">
-              <a:lnSpc>
-                <a:spcPct val="150000"/>
-              </a:lnSpc>
-              <a:buNone/>
-            </a:pPr>
-            <a:r>
-              <a:rPr lang="ko-KR" altLang="en-US" sz="2400" dirty="0">
-                <a:latin typeface="+mn-lt"/>
-                <a:ea typeface="맑은 고딕"/>
-              </a:rPr>
-              <a:t>Topic </a:t>
-            </a:r>
-            <a:r>
-              <a:rPr lang="ko-KR" altLang="en-US" sz="2400" dirty="0">
-                <a:ea typeface="맑은 고딕"/>
-              </a:rPr>
-              <a:t>6</a:t>
-            </a:r>
-            <a:r>
-              <a:rPr lang="ko-KR" altLang="en-US" sz="2400" dirty="0">
-                <a:latin typeface="+mn-lt"/>
-                <a:ea typeface="맑은 고딕"/>
-              </a:rPr>
-              <a:t>:   	가치평가 투입변수로서 잉여현금흐름(free cash flow) 대 당기순이익(net income)</a:t>
-            </a:r>
-          </a:p>
-          <a:p>
-            <a:pPr marL="0" indent="0">
-              <a:lnSpc>
-                <a:spcPct val="150000"/>
-              </a:lnSpc>
-              <a:buNone/>
-            </a:pPr>
-            <a:r>
-              <a:rPr lang="ko-KR" altLang="en-US" sz="2400" dirty="0" err="1">
-                <a:latin typeface="+mn-lt"/>
-                <a:ea typeface="맑은 고딕"/>
-              </a:rPr>
-              <a:t>Topic</a:t>
-            </a:r>
-            <a:r>
-              <a:rPr lang="ko-KR" altLang="en-US" sz="2400" dirty="0">
-                <a:latin typeface="+mn-lt"/>
-                <a:ea typeface="맑은 고딕"/>
-              </a:rPr>
-              <a:t> 8:	안전마진(margin of safety)</a:t>
-            </a:r>
-          </a:p>
-          <a:p>
-            <a:pPr marL="0" indent="0">
-              <a:lnSpc>
-                <a:spcPct val="150000"/>
-              </a:lnSpc>
-              <a:buNone/>
-            </a:pPr>
-            <a:r>
-              <a:rPr lang="ko-KR" altLang="en-US" sz="2400" dirty="0" err="1">
-                <a:latin typeface="+mn-lt"/>
-                <a:ea typeface="맑은 고딕"/>
-              </a:rPr>
-              <a:t>Topic</a:t>
-            </a:r>
-            <a:r>
-              <a:rPr lang="ko-KR" altLang="en-US" sz="2400" dirty="0">
-                <a:latin typeface="+mn-lt"/>
-                <a:ea typeface="맑은 고딕"/>
-              </a:rPr>
-              <a:t> </a:t>
-            </a:r>
-            <a:r>
-              <a:rPr lang="en-US" altLang="ko-KR" sz="2400" dirty="0">
-                <a:latin typeface="+mn-lt"/>
-                <a:ea typeface="맑은 고딕"/>
-              </a:rPr>
-              <a:t>9</a:t>
-            </a:r>
-            <a:r>
-              <a:rPr lang="ko-KR" altLang="en-US" sz="2400" dirty="0">
-                <a:latin typeface="+mn-lt"/>
-                <a:ea typeface="맑은 고딕"/>
-              </a:rPr>
-              <a:t>:	이익의 질(earnings quality)</a:t>
-            </a:r>
-          </a:p>
-        </p:txBody>
-      </p:sp>
-    </p:spTree>
-    <p:extLst>
-      <p:ext uri="{BB962C8B-B14F-4D97-AF65-F5344CB8AC3E}">
-        <p14:creationId xmlns:p14="http://schemas.microsoft.com/office/powerpoint/2010/main" val="1695484269"/>
-      </p:ext>
-    </p:extLst>
-  </p:cSld>
-  <p:clrMapOvr>
-    <a:masterClrMapping/>
-  </p:clrMapOvr>
-</p:sld>
-</file>
-
-<file path=ppt/slides/slide20.xml><?xml version="1.0" encoding="utf-8"?>
+<file path=ppt/slides/slide21.xml><?xml version="1.0" encoding="utf-8"?>
 <p:sld xmlns:a="http://schemas.openxmlformats.org/drawingml/2006/main" xmlns:r="http://schemas.openxmlformats.org/officeDocument/2006/relationships" xmlns:p="http://schemas.openxmlformats.org/presentationml/2006/main">
   <p:cSld>
     <p:spTree>
@@ -11971,763 +12922,6 @@
         <p14:creationId xmlns:p14="http://schemas.microsoft.com/office/powerpoint/2010/main" val="3639973755"/>
       </p:ext>
     </p:extLst>
-  </p:cSld>
-  <p:clrMapOvr>
-    <a:masterClrMapping/>
-  </p:clrMapOvr>
-</p:sld>
-</file>
-
-<file path=ppt/slides/slide21.xml><?xml version="1.0" encoding="utf-8"?>
-<p:sld xmlns:a="http://schemas.openxmlformats.org/drawingml/2006/main" xmlns:r="http://schemas.openxmlformats.org/officeDocument/2006/relationships" xmlns:p="http://schemas.openxmlformats.org/presentationml/2006/main">
-  <p:cSld>
-    <p:spTree>
-      <p:nvGrpSpPr>
-        <p:cNvPr id="1" name=""/>
-        <p:cNvGrpSpPr/>
-        <p:nvPr/>
-      </p:nvGrpSpPr>
-      <p:grpSpPr>
-        <a:xfrm>
-          <a:off x="0" y="0"/>
-          <a:ext cx="0" cy="0"/>
-          <a:chOff x="0" y="0"/>
-          <a:chExt cx="0" cy="0"/>
-        </a:xfrm>
-      </p:grpSpPr>
-      <p:sp>
-        <p:nvSpPr>
-          <p:cNvPr id="2" name="Shape 0"/>
-          <p:cNvSpPr/>
-          <p:nvPr/>
-        </p:nvSpPr>
-        <p:spPr>
-          <a:xfrm>
-            <a:off x="11686032" y="0"/>
-            <a:ext cx="505663" cy="6858000"/>
-          </a:xfrm>
-          <a:prstGeom prst="rect">
-            <a:avLst/>
-          </a:prstGeom>
-          <a:solidFill>
-            <a:srgbClr val="1F4899"/>
-          </a:solidFill>
-          <a:ln/>
-        </p:spPr>
-        <p:txBody>
-          <a:bodyPr/>
-          <a:lstStyle/>
-          <a:p>
-            <a:endParaRPr lang="en-US">
-              <a:ea typeface="맑은 고딕"/>
-            </a:endParaRPr>
-          </a:p>
-        </p:txBody>
-      </p:sp>
-      <p:sp>
-        <p:nvSpPr>
-          <p:cNvPr id="3" name="Text 1"/>
-          <p:cNvSpPr/>
-          <p:nvPr/>
-        </p:nvSpPr>
-        <p:spPr>
-          <a:xfrm>
-            <a:off x="502920" y="274320"/>
-            <a:ext cx="10881360" cy="777240"/>
-          </a:xfrm>
-          <a:prstGeom prst="rect">
-            <a:avLst/>
-          </a:prstGeom>
-          <a:noFill/>
-          <a:ln/>
-        </p:spPr>
-        <p:txBody>
-          <a:bodyPr wrap="square" lIns="0" tIns="0" rIns="0" bIns="0" rtlCol="0" anchor="ctr"/>
-          <a:lstStyle/>
-          <a:p>
-            <a:pPr marL="0" indent="0" algn="l">
-              <a:buNone/>
-            </a:pPr>
-            <a:r>
-              <a:rPr lang="ko-KR" altLang="en-US" sz="2700" b="1" dirty="0">
-                <a:solidFill>
-                  <a:srgbClr val="1F4899"/>
-                </a:solidFill>
-                <a:latin typeface="Calibri" pitchFamily="34" charset="0"/>
-                <a:ea typeface="맑은 고딕" pitchFamily="34" charset="-122"/>
-                <a:cs typeface="Calibri" pitchFamily="34" charset="-120"/>
-              </a:rPr>
-              <a:t>4.  하나의 숫자, 세 가지 이름</a:t>
-            </a:r>
-            <a:endParaRPr lang="en-US" sz="2700" dirty="0">
-              <a:ea typeface="맑은 고딕"/>
-            </a:endParaRPr>
-          </a:p>
-        </p:txBody>
-      </p:sp>
-      <p:sp>
-        <p:nvSpPr>
-          <p:cNvPr id="4" name="Text 2"/>
-          <p:cNvSpPr/>
-          <p:nvPr/>
-        </p:nvSpPr>
-        <p:spPr>
-          <a:xfrm>
-            <a:off x="502920" y="18288"/>
-            <a:ext cx="10881360" cy="256032"/>
-          </a:xfrm>
-          <a:prstGeom prst="rect">
-            <a:avLst/>
-          </a:prstGeom>
-          <a:noFill/>
-          <a:ln/>
-        </p:spPr>
-        <p:txBody>
-          <a:bodyPr wrap="square" lIns="0" tIns="0" rIns="0" bIns="0" rtlCol="0" anchor="ctr"/>
-          <a:lstStyle/>
-          <a:p>
-            <a:pPr marL="0" indent="0" algn="l">
-              <a:buNone/>
-            </a:pPr>
-            <a:r>
-              <a:rPr lang="en-US" sz="1100" b="1" kern="0" spc="100" dirty="0">
-                <a:solidFill>
-                  <a:srgbClr val="6B7280"/>
-                </a:solidFill>
-                <a:latin typeface="Calibri" pitchFamily="34" charset="0"/>
-                <a:ea typeface="Calibri" pitchFamily="34" charset="-122"/>
-                <a:cs typeface="Calibri" pitchFamily="34" charset="-120"/>
-              </a:rPr>
-              <a:t>TOPIC 4</a:t>
-            </a:r>
-            <a:endParaRPr lang="en-US" sz="1100" dirty="0">
-              <a:ea typeface="맑은 고딕"/>
-            </a:endParaRPr>
-          </a:p>
-        </p:txBody>
-      </p:sp>
-      <p:sp>
-        <p:nvSpPr>
-          <p:cNvPr id="5" name="Text 3"/>
-          <p:cNvSpPr/>
-          <p:nvPr/>
-        </p:nvSpPr>
-        <p:spPr>
-          <a:xfrm>
-            <a:off x="11686032" y="6446520"/>
-            <a:ext cx="505663" cy="320040"/>
-          </a:xfrm>
-          <a:prstGeom prst="rect">
-            <a:avLst/>
-          </a:prstGeom>
-          <a:noFill/>
-          <a:ln/>
-        </p:spPr>
-        <p:txBody>
-          <a:bodyPr wrap="square" lIns="0" tIns="0" rIns="0" bIns="0" rtlCol="0" anchor="ctr"/>
-          <a:lstStyle/>
-          <a:p>
-            <a:pPr marL="0" indent="0" algn="ctr">
-              <a:buNone/>
-            </a:pPr>
-            <a:r>
-              <a:rPr lang="en-US" sz="1100" dirty="0">
-                <a:solidFill>
-                  <a:srgbClr val="FFFFFF"/>
-                </a:solidFill>
-                <a:latin typeface="Calibri" pitchFamily="34" charset="0"/>
-                <a:ea typeface="Calibri" pitchFamily="34" charset="-122"/>
-                <a:cs typeface="Calibri" pitchFamily="34" charset="-120"/>
-              </a:rPr>
-              <a:t>18</a:t>
-            </a:r>
-            <a:endParaRPr lang="en-US" sz="1100" dirty="0">
-              <a:ea typeface="맑은 고딕"/>
-            </a:endParaRPr>
-          </a:p>
-        </p:txBody>
-      </p:sp>
-      <p:sp>
-        <p:nvSpPr>
-          <p:cNvPr id="6" name="Text 4"/>
-          <p:cNvSpPr/>
-          <p:nvPr/>
-        </p:nvSpPr>
-        <p:spPr>
-          <a:xfrm>
-            <a:off x="502920" y="1188720"/>
-            <a:ext cx="10972800" cy="411480"/>
-          </a:xfrm>
-          <a:prstGeom prst="rect">
-            <a:avLst/>
-          </a:prstGeom>
-          <a:noFill/>
-          <a:ln/>
-        </p:spPr>
-        <p:txBody>
-          <a:bodyPr wrap="square" rtlCol="0" anchor="ctr"/>
-          <a:lstStyle/>
-          <a:p>
-            <a:pPr marL="0" indent="0">
-              <a:buNone/>
-            </a:pPr>
-            <a:r>
-              <a:rPr lang="ko-KR" altLang="en-US" i="1" dirty="0">
-                <a:solidFill>
-                  <a:srgbClr val="374151"/>
-                </a:solidFill>
-                <a:latin typeface="Calibri" pitchFamily="34" charset="0"/>
-                <a:ea typeface="맑은 고딕" pitchFamily="34" charset="-122"/>
-                <a:cs typeface="Calibri" pitchFamily="34" charset="-120"/>
-              </a:rPr>
-              <a:t>자기자본에 적용하는 할인율은 세 자리에서 바라본 동일한 숫자다 — 효율적 시장에서는 서로 일치한다.</a:t>
-            </a:r>
-            <a:endParaRPr lang="en-US" dirty="0">
-              <a:ea typeface="맑은 고딕"/>
-            </a:endParaRPr>
-          </a:p>
-        </p:txBody>
-      </p:sp>
-      <p:sp>
-        <p:nvSpPr>
-          <p:cNvPr id="7" name="Shape 5"/>
-          <p:cNvSpPr/>
-          <p:nvPr/>
-        </p:nvSpPr>
-        <p:spPr>
-          <a:xfrm>
-            <a:off x="502920" y="1783080"/>
-            <a:ext cx="3474720" cy="2148840"/>
-          </a:xfrm>
-          <a:prstGeom prst="roundRect">
-            <a:avLst>
-              <a:gd name="adj" fmla="val 0"/>
-            </a:avLst>
-          </a:prstGeom>
-          <a:solidFill>
-            <a:srgbClr val="EFF6FF"/>
-          </a:solidFill>
-          <a:ln w="15875">
-            <a:solidFill>
-              <a:srgbClr val="3B82F6"/>
-            </a:solidFill>
-            <a:prstDash val="solid"/>
-          </a:ln>
-        </p:spPr>
-        <p:txBody>
-          <a:bodyPr/>
-          <a:lstStyle/>
-          <a:p>
-            <a:endParaRPr lang="en-US" sz="2800">
-              <a:ea typeface="맑은 고딕"/>
-            </a:endParaRPr>
-          </a:p>
-        </p:txBody>
-      </p:sp>
-      <p:sp>
-        <p:nvSpPr>
-          <p:cNvPr id="8" name="Text 6"/>
-          <p:cNvSpPr/>
-          <p:nvPr/>
-        </p:nvSpPr>
-        <p:spPr>
-          <a:xfrm>
-            <a:off x="630936" y="1874520"/>
-            <a:ext cx="3218688" cy="274320"/>
-          </a:xfrm>
-          <a:prstGeom prst="rect">
-            <a:avLst/>
-          </a:prstGeom>
-          <a:noFill/>
-          <a:ln/>
-        </p:spPr>
-        <p:txBody>
-          <a:bodyPr wrap="square" lIns="0" tIns="0" rIns="0" bIns="0" rtlCol="0" anchor="ctr"/>
-          <a:lstStyle/>
-          <a:p>
-            <a:pPr marL="0" indent="0" algn="l">
-              <a:buNone/>
-            </a:pPr>
-            <a:r>
-              <a:rPr lang="ko-KR" altLang="en-US" sz="2000" b="1" dirty="0">
-                <a:solidFill>
-                  <a:srgbClr val="1E40AF"/>
-                </a:solidFill>
-                <a:latin typeface="Calibri" pitchFamily="34" charset="0"/>
-                <a:ea typeface="맑은 고딕" pitchFamily="34" charset="-122"/>
-                <a:cs typeface="Calibri" pitchFamily="34" charset="-120"/>
-              </a:rPr>
-              <a:t>기대수익률(Expected return)</a:t>
-            </a:r>
-            <a:endParaRPr lang="en-US" sz="2000" dirty="0">
-              <a:ea typeface="맑은 고딕"/>
-            </a:endParaRPr>
-          </a:p>
-        </p:txBody>
-      </p:sp>
-      <p:sp>
-        <p:nvSpPr>
-          <p:cNvPr id="9" name="Text 7"/>
-          <p:cNvSpPr/>
-          <p:nvPr/>
-        </p:nvSpPr>
-        <p:spPr>
-          <a:xfrm>
-            <a:off x="649224" y="2203704"/>
-            <a:ext cx="3182112" cy="1618488"/>
-          </a:xfrm>
-          <a:prstGeom prst="rect">
-            <a:avLst/>
-          </a:prstGeom>
-          <a:noFill/>
-          <a:ln/>
-        </p:spPr>
-        <p:txBody>
-          <a:bodyPr wrap="square" lIns="0" tIns="0" rIns="0" bIns="0" rtlCol="0" anchor="t"/>
-          <a:lstStyle/>
-          <a:p>
-            <a:pPr marL="0" indent="0" algn="l">
-              <a:lnSpc>
-                <a:spcPct val="102000"/>
-              </a:lnSpc>
-              <a:buNone/>
-            </a:pPr>
-            <a:r>
-              <a:rPr lang="ko-KR" altLang="en-US" dirty="0">
-                <a:solidFill>
-                  <a:srgbClr val="374151"/>
-                </a:solidFill>
-                <a:latin typeface="Calibri" pitchFamily="34" charset="0"/>
-                <a:ea typeface="맑은 고딕" pitchFamily="34" charset="-122"/>
-                <a:cs typeface="Calibri" pitchFamily="34" charset="-120"/>
-              </a:rPr>
-              <a:t>투자자의 관점 — 위험을 부담한 대가로 주주가 기대하는 수익률.</a:t>
-            </a:r>
-            <a:endParaRPr lang="en-US" dirty="0">
-              <a:ea typeface="맑은 고딕"/>
-            </a:endParaRPr>
-          </a:p>
-        </p:txBody>
-      </p:sp>
-      <p:sp>
-        <p:nvSpPr>
-          <p:cNvPr id="10" name="Shape 8"/>
-          <p:cNvSpPr/>
-          <p:nvPr/>
-        </p:nvSpPr>
-        <p:spPr>
-          <a:xfrm>
-            <a:off x="4206240" y="1783080"/>
-            <a:ext cx="3474720" cy="2148840"/>
-          </a:xfrm>
-          <a:prstGeom prst="roundRect">
-            <a:avLst>
-              <a:gd name="adj" fmla="val 0"/>
-            </a:avLst>
-          </a:prstGeom>
-          <a:solidFill>
-            <a:srgbClr val="E5FCED"/>
-          </a:solidFill>
-          <a:ln w="15875">
-            <a:solidFill>
-              <a:srgbClr val="63B84B"/>
-            </a:solidFill>
-            <a:prstDash val="solid"/>
-          </a:ln>
-        </p:spPr>
-        <p:txBody>
-          <a:bodyPr/>
-          <a:lstStyle/>
-          <a:p>
-            <a:endParaRPr lang="en-US" sz="2800">
-              <a:ea typeface="맑은 고딕"/>
-            </a:endParaRPr>
-          </a:p>
-        </p:txBody>
-      </p:sp>
-      <p:sp>
-        <p:nvSpPr>
-          <p:cNvPr id="11" name="Text 9"/>
-          <p:cNvSpPr/>
-          <p:nvPr/>
-        </p:nvSpPr>
-        <p:spPr>
-          <a:xfrm>
-            <a:off x="4334256" y="1874520"/>
-            <a:ext cx="3218688" cy="274320"/>
-          </a:xfrm>
-          <a:prstGeom prst="rect">
-            <a:avLst/>
-          </a:prstGeom>
-          <a:noFill/>
-          <a:ln/>
-        </p:spPr>
-        <p:txBody>
-          <a:bodyPr wrap="square" lIns="0" tIns="0" rIns="0" bIns="0" rtlCol="0" anchor="ctr"/>
-          <a:lstStyle/>
-          <a:p>
-            <a:pPr marL="0" indent="0" algn="l">
-              <a:buNone/>
-            </a:pPr>
-            <a:r>
-              <a:rPr lang="ko-KR" altLang="en-US" sz="2000" b="1" dirty="0">
-                <a:solidFill>
-                  <a:srgbClr val="15803D"/>
-                </a:solidFill>
-                <a:latin typeface="Calibri" pitchFamily="34" charset="0"/>
-                <a:ea typeface="맑은 고딕" pitchFamily="34" charset="-122"/>
-                <a:cs typeface="Calibri" pitchFamily="34" charset="-120"/>
-              </a:rPr>
-              <a:t>자본비용(Cost of capital)</a:t>
-            </a:r>
-            <a:endParaRPr lang="en-US" sz="2000" dirty="0">
-              <a:ea typeface="맑은 고딕"/>
-            </a:endParaRPr>
-          </a:p>
-        </p:txBody>
-      </p:sp>
-      <p:sp>
-        <p:nvSpPr>
-          <p:cNvPr id="12" name="Text 10"/>
-          <p:cNvSpPr/>
-          <p:nvPr/>
-        </p:nvSpPr>
-        <p:spPr>
-          <a:xfrm>
-            <a:off x="4352544" y="2203704"/>
-            <a:ext cx="3182112" cy="1618488"/>
-          </a:xfrm>
-          <a:prstGeom prst="rect">
-            <a:avLst/>
-          </a:prstGeom>
-          <a:noFill/>
-          <a:ln/>
-        </p:spPr>
-        <p:txBody>
-          <a:bodyPr wrap="square" lIns="0" tIns="0" rIns="0" bIns="0" rtlCol="0" anchor="t"/>
-          <a:lstStyle/>
-          <a:p>
-            <a:pPr marL="0" indent="0" algn="l">
-              <a:lnSpc>
-                <a:spcPct val="102000"/>
-              </a:lnSpc>
-              <a:buNone/>
-            </a:pPr>
-            <a:r>
-              <a:rPr lang="ko-KR" altLang="en-US" dirty="0">
-                <a:solidFill>
-                  <a:srgbClr val="374151"/>
-                </a:solidFill>
-                <a:latin typeface="Calibri" pitchFamily="34" charset="0"/>
-                <a:ea typeface="맑은 고딕" pitchFamily="34" charset="-122"/>
-                <a:cs typeface="Calibri" pitchFamily="34" charset="-120"/>
-              </a:rPr>
-              <a:t>기업의 관점 — 자기자본을 유치하기 위해 제공해야 하는 수익률. 한쪽의 수익은 다른 쪽의 비용이다.</a:t>
-            </a:r>
-            <a:endParaRPr lang="en-US" dirty="0">
-              <a:ea typeface="맑은 고딕"/>
-            </a:endParaRPr>
-          </a:p>
-        </p:txBody>
-      </p:sp>
-      <p:sp>
-        <p:nvSpPr>
-          <p:cNvPr id="13" name="Shape 11"/>
-          <p:cNvSpPr/>
-          <p:nvPr/>
-        </p:nvSpPr>
-        <p:spPr>
-          <a:xfrm>
-            <a:off x="7909560" y="1783080"/>
-            <a:ext cx="3474720" cy="2148840"/>
-          </a:xfrm>
-          <a:prstGeom prst="roundRect">
-            <a:avLst>
-              <a:gd name="adj" fmla="val 0"/>
-            </a:avLst>
-          </a:prstGeom>
-          <a:solidFill>
-            <a:srgbClr val="FEF3C7"/>
-          </a:solidFill>
-          <a:ln w="15875">
-            <a:solidFill>
-              <a:srgbClr val="F59E0B"/>
-            </a:solidFill>
-            <a:prstDash val="solid"/>
-          </a:ln>
-        </p:spPr>
-        <p:txBody>
-          <a:bodyPr/>
-          <a:lstStyle/>
-          <a:p>
-            <a:endParaRPr lang="en-US" sz="2800">
-              <a:ea typeface="맑은 고딕"/>
-            </a:endParaRPr>
-          </a:p>
-        </p:txBody>
-      </p:sp>
-      <p:sp>
-        <p:nvSpPr>
-          <p:cNvPr id="14" name="Text 12"/>
-          <p:cNvSpPr/>
-          <p:nvPr/>
-        </p:nvSpPr>
-        <p:spPr>
-          <a:xfrm>
-            <a:off x="8037576" y="1874520"/>
-            <a:ext cx="3218688" cy="274320"/>
-          </a:xfrm>
-          <a:prstGeom prst="rect">
-            <a:avLst/>
-          </a:prstGeom>
-          <a:noFill/>
-          <a:ln/>
-        </p:spPr>
-        <p:txBody>
-          <a:bodyPr wrap="square" lIns="0" tIns="0" rIns="0" bIns="0" rtlCol="0" anchor="ctr"/>
-          <a:lstStyle/>
-          <a:p>
-            <a:pPr marL="0" indent="0" algn="l">
-              <a:buNone/>
-            </a:pPr>
-            <a:r>
-              <a:rPr lang="ko-KR" altLang="en-US" sz="2000" b="1" dirty="0">
-                <a:solidFill>
-                  <a:srgbClr val="92400E"/>
-                </a:solidFill>
-                <a:latin typeface="Calibri" pitchFamily="34" charset="0"/>
-                <a:ea typeface="맑은 고딕" pitchFamily="34" charset="-122"/>
-                <a:cs typeface="Calibri" pitchFamily="34" charset="-120"/>
-              </a:rPr>
-              <a:t>할인율(Discount rate)</a:t>
-            </a:r>
-            <a:endParaRPr lang="en-US" sz="2000" dirty="0">
-              <a:ea typeface="맑은 고딕"/>
-            </a:endParaRPr>
-          </a:p>
-        </p:txBody>
-      </p:sp>
-      <p:sp>
-        <p:nvSpPr>
-          <p:cNvPr id="15" name="Text 13"/>
-          <p:cNvSpPr/>
-          <p:nvPr/>
-        </p:nvSpPr>
-        <p:spPr>
-          <a:xfrm>
-            <a:off x="8055864" y="2203704"/>
-            <a:ext cx="3182112" cy="1618488"/>
-          </a:xfrm>
-          <a:prstGeom prst="rect">
-            <a:avLst/>
-          </a:prstGeom>
-          <a:noFill/>
-          <a:ln/>
-        </p:spPr>
-        <p:txBody>
-          <a:bodyPr wrap="square" lIns="0" tIns="0" rIns="0" bIns="0" rtlCol="0" anchor="t"/>
-          <a:lstStyle/>
-          <a:p>
-            <a:pPr marL="0" indent="0" algn="l">
-              <a:lnSpc>
-                <a:spcPct val="102000"/>
-              </a:lnSpc>
-              <a:buNone/>
-            </a:pPr>
-            <a:r>
-              <a:rPr lang="ko-KR" altLang="en-US" dirty="0">
-                <a:solidFill>
-                  <a:srgbClr val="374151"/>
-                </a:solidFill>
-                <a:latin typeface="Calibri" pitchFamily="34" charset="0"/>
-                <a:ea typeface="맑은 고딕" pitchFamily="34" charset="-122"/>
-                <a:cs typeface="Calibri" pitchFamily="34" charset="-120"/>
-              </a:rPr>
-              <a:t>분석가의 관점 — 미래현금흐름을 오늘의 가치로 환산하는 비율.</a:t>
-            </a:r>
-            <a:endParaRPr lang="en-US" dirty="0">
-              <a:ea typeface="맑은 고딕"/>
-            </a:endParaRPr>
-          </a:p>
-        </p:txBody>
-      </p:sp>
-      <p:sp>
-        <p:nvSpPr>
-          <p:cNvPr id="16" name="Shape 14"/>
-          <p:cNvSpPr/>
-          <p:nvPr/>
-        </p:nvSpPr>
-        <p:spPr>
-          <a:xfrm>
-            <a:off x="502920" y="4160520"/>
-            <a:ext cx="10972800" cy="1737360"/>
-          </a:xfrm>
-          <a:prstGeom prst="roundRect">
-            <a:avLst>
-              <a:gd name="adj" fmla="val 0"/>
-            </a:avLst>
-          </a:prstGeom>
-          <a:solidFill>
-            <a:srgbClr val="EEF2FB"/>
-          </a:solidFill>
-          <a:ln w="15875">
-            <a:solidFill>
-              <a:srgbClr val="1F4899"/>
-            </a:solidFill>
-            <a:prstDash val="solid"/>
-          </a:ln>
-        </p:spPr>
-        <p:txBody>
-          <a:bodyPr/>
-          <a:lstStyle/>
-          <a:p>
-            <a:endParaRPr lang="en-US" sz="2800">
-              <a:ea typeface="맑은 고딕"/>
-            </a:endParaRPr>
-          </a:p>
-        </p:txBody>
-      </p:sp>
-      <p:sp>
-        <p:nvSpPr>
-          <p:cNvPr id="17" name="Text 15"/>
-          <p:cNvSpPr/>
-          <p:nvPr/>
-        </p:nvSpPr>
-        <p:spPr>
-          <a:xfrm>
-            <a:off x="630936" y="4251960"/>
-            <a:ext cx="10716768" cy="274320"/>
-          </a:xfrm>
-          <a:prstGeom prst="rect">
-            <a:avLst/>
-          </a:prstGeom>
-          <a:noFill/>
-          <a:ln/>
-        </p:spPr>
-        <p:txBody>
-          <a:bodyPr wrap="square" lIns="0" tIns="0" rIns="0" bIns="0" rtlCol="0" anchor="ctr"/>
-          <a:lstStyle/>
-          <a:p>
-            <a:pPr marL="0" indent="0" algn="l">
-              <a:buNone/>
-            </a:pPr>
-            <a:r>
-              <a:rPr lang="ko-KR" altLang="en-US" sz="2000" b="1" dirty="0">
-                <a:solidFill>
-                  <a:srgbClr val="16346B"/>
-                </a:solidFill>
-                <a:latin typeface="Calibri" pitchFamily="34" charset="0"/>
-                <a:ea typeface="맑은 고딕" pitchFamily="34" charset="-122"/>
-                <a:cs typeface="Calibri" pitchFamily="34" charset="-120"/>
-              </a:rPr>
-              <a:t>황금률 — 현금흐름에 맞는 할인율을 사용하라</a:t>
-            </a:r>
-            <a:endParaRPr lang="en-US" sz="2000" dirty="0">
-              <a:ea typeface="맑은 고딕"/>
-            </a:endParaRPr>
-          </a:p>
-        </p:txBody>
-      </p:sp>
-      <p:sp>
-        <p:nvSpPr>
-          <p:cNvPr id="18" name="Text 16"/>
-          <p:cNvSpPr/>
-          <p:nvPr/>
-        </p:nvSpPr>
-        <p:spPr>
-          <a:xfrm>
-            <a:off x="649224" y="4581144"/>
-            <a:ext cx="10680192" cy="1207008"/>
-          </a:xfrm>
-          <a:prstGeom prst="rect">
-            <a:avLst/>
-          </a:prstGeom>
-          <a:noFill/>
-          <a:ln/>
-        </p:spPr>
-        <p:txBody>
-          <a:bodyPr wrap="square" lIns="0" tIns="0" rIns="0" bIns="0" rtlCol="0" anchor="t"/>
-          <a:lstStyle/>
-          <a:p>
-            <a:pPr marL="152400" indent="-152400" algn="l">
-              <a:lnSpc>
-                <a:spcPct val="102000"/>
-              </a:lnSpc>
-              <a:spcAft>
-                <a:spcPts val="400"/>
-              </a:spcAft>
-              <a:buSzPct val="100000"/>
-              <a:buChar char="•"/>
-            </a:pPr>
-            <a:r>
-              <a:rPr lang="ko-KR" altLang="en-US" dirty="0">
-                <a:solidFill>
-                  <a:srgbClr val="374151"/>
-                </a:solidFill>
-                <a:latin typeface="Calibri" pitchFamily="34" charset="0"/>
-                <a:ea typeface="맑은 고딕" pitchFamily="34" charset="-122"/>
-                <a:cs typeface="Calibri" pitchFamily="34" charset="-120"/>
-              </a:rPr>
-              <a:t>주주 귀속 현금흐름(배당, FCFE)  →  자기자본비용(cost of equity)으로 할인.</a:t>
-            </a:r>
-            <a:endParaRPr lang="en-US" dirty="0">
-              <a:ea typeface="맑은 고딕"/>
-            </a:endParaRPr>
-          </a:p>
-          <a:p>
-            <a:pPr marL="152400" indent="-152400" algn="l">
-              <a:lnSpc>
-                <a:spcPct val="102000"/>
-              </a:lnSpc>
-              <a:spcAft>
-                <a:spcPts val="400"/>
-              </a:spcAft>
-              <a:buSzPct val="100000"/>
-              <a:buChar char="•"/>
-            </a:pPr>
-            <a:r>
-              <a:rPr lang="ko-KR" altLang="en-US" dirty="0">
-                <a:solidFill>
-                  <a:srgbClr val="374151"/>
-                </a:solidFill>
-                <a:latin typeface="Calibri" pitchFamily="34" charset="0"/>
-                <a:ea typeface="맑은 고딕" pitchFamily="34" charset="-122"/>
-                <a:cs typeface="Calibri" pitchFamily="34" charset="-120"/>
-              </a:rPr>
-              <a:t>기업 전체 현금흐름(FCFF)  →  가중평균자본비용(WACC)으로 할인.</a:t>
-            </a:r>
-            <a:endParaRPr lang="en-US" dirty="0">
-              <a:ea typeface="맑은 고딕"/>
-            </a:endParaRPr>
-          </a:p>
-          <a:p>
-            <a:pPr marL="0" indent="0" algn="l">
-              <a:lnSpc>
-                <a:spcPct val="102000"/>
-              </a:lnSpc>
-              <a:spcBef>
-                <a:spcPts val="200"/>
-              </a:spcBef>
-              <a:buNone/>
-            </a:pPr>
-            <a:r>
-              <a:rPr lang="ko-KR" altLang="en-US" i="1" dirty="0">
-                <a:solidFill>
-                  <a:srgbClr val="991B1B"/>
-                </a:solidFill>
-                <a:latin typeface="Calibri" pitchFamily="34" charset="0"/>
-                <a:ea typeface="맑은 고딕" pitchFamily="34" charset="-122"/>
-                <a:cs typeface="Calibri" pitchFamily="34" charset="-120"/>
-              </a:rPr>
-              <a:t>주주 귀속 현금흐름을 WACC로 할인하면 가치가 과대평가된다 — 전형적인 오류.</a:t>
-            </a:r>
-            <a:endParaRPr lang="en-US" dirty="0">
-              <a:ea typeface="맑은 고딕"/>
-            </a:endParaRPr>
-          </a:p>
-        </p:txBody>
-      </p:sp>
-    </p:spTree>
   </p:cSld>
   <p:clrMapOvr>
     <a:masterClrMapping/>
@@ -12814,7 +13008,7 @@
                 <a:ea typeface="맑은 고딕" pitchFamily="34" charset="-122"/>
                 <a:cs typeface="Calibri" pitchFamily="34" charset="-120"/>
               </a:rPr>
-              <a:t>4.  구성요소 — 자본자산가격결정모형(CAPM)</a:t>
+              <a:t>4.  하나의 숫자, 세 가지 이름</a:t>
             </a:r>
             <a:endParaRPr lang="en-US" sz="2700" dirty="0">
               <a:ea typeface="맑은 고딕"/>
@@ -12896,7 +13090,7 @@
                 <a:ea typeface="Calibri" pitchFamily="34" charset="-122"/>
                 <a:cs typeface="Calibri" pitchFamily="34" charset="-120"/>
               </a:rPr>
-              <a:t>19</a:t>
+              <a:t>18</a:t>
             </a:r>
             <a:endParaRPr lang="en-US" sz="1100" dirty="0">
               <a:ea typeface="맑은 고딕"/>
@@ -12906,45 +13100,14 @@
       </p:sp>
       <p:sp>
         <p:nvSpPr>
-          <p:cNvPr id="6" name="Shape 4"/>
+          <p:cNvPr id="6" name="Text 4"/>
           <p:cNvSpPr/>
           <p:nvPr/>
         </p:nvSpPr>
         <p:spPr>
           <a:xfrm>
-            <a:off x="502920" y="1234440"/>
-            <a:ext cx="10972800" cy="640080"/>
-          </a:xfrm>
-          <a:prstGeom prst="roundRect">
-            <a:avLst>
-              <a:gd name="adj" fmla="val 7143"/>
-            </a:avLst>
-          </a:prstGeom>
-          <a:solidFill>
-            <a:srgbClr val="16346B"/>
-          </a:solidFill>
-          <a:ln/>
-        </p:spPr>
-        <p:txBody>
-          <a:bodyPr/>
-          <a:lstStyle/>
-          <a:p>
-            <a:endParaRPr lang="en-US">
-              <a:ea typeface="맑은 고딕"/>
-            </a:endParaRPr>
-          </a:p>
-        </p:txBody>
-      </p:sp>
-      <p:sp>
-        <p:nvSpPr>
-          <p:cNvPr id="7" name="Text 5"/>
-          <p:cNvSpPr/>
-          <p:nvPr/>
-        </p:nvSpPr>
-        <p:spPr>
-          <a:xfrm>
-            <a:off x="502920" y="1234440"/>
-            <a:ext cx="10972800" cy="640080"/>
+            <a:off x="502920" y="1188720"/>
+            <a:ext cx="10972800" cy="411480"/>
           </a:xfrm>
           <a:prstGeom prst="rect">
             <a:avLst/>
@@ -12956,312 +13119,40 @@
           <a:bodyPr wrap="square" rtlCol="0" anchor="ctr"/>
           <a:lstStyle/>
           <a:p>
-            <a:pPr marL="0" indent="0" algn="ctr">
+            <a:pPr marL="0" indent="0">
               <a:buNone/>
             </a:pPr>
             <a:r>
-              <a:rPr lang="ko-KR" altLang="en-US" sz="1700" b="1" dirty="0">
+              <a:rPr lang="ko-KR" altLang="en-US" i="1" dirty="0">
                 <a:solidFill>
-                  <a:srgbClr val="FFFFFF"/>
-                </a:solidFill>
-                <a:latin typeface="Cambria" pitchFamily="34" charset="0"/>
-                <a:ea typeface="맑은 고딕" pitchFamily="34" charset="-122"/>
-                <a:cs typeface="Cambria" pitchFamily="34" charset="-120"/>
-              </a:rPr>
-              <a:t>자기자본비용 = 무위험이자율 + β × 시장위험프리미엄(ERP)</a:t>
-            </a:r>
-            <a:endParaRPr lang="en-US" sz="1700" dirty="0">
-              <a:ea typeface="맑은 고딕"/>
-            </a:endParaRPr>
-          </a:p>
-        </p:txBody>
-      </p:sp>
-      <p:sp>
-        <p:nvSpPr>
-          <p:cNvPr id="8" name="Shape 6"/>
-          <p:cNvSpPr/>
-          <p:nvPr/>
-        </p:nvSpPr>
-        <p:spPr>
-          <a:xfrm>
-            <a:off x="1005840" y="4480560"/>
-            <a:ext cx="2194560" cy="914400"/>
-          </a:xfrm>
-          <a:prstGeom prst="rect">
-            <a:avLst/>
-          </a:prstGeom>
-          <a:solidFill>
-            <a:srgbClr val="3B82F6"/>
-          </a:solidFill>
-          <a:ln/>
-        </p:spPr>
-        <p:txBody>
-          <a:bodyPr/>
-          <a:lstStyle/>
-          <a:p>
-            <a:endParaRPr lang="en-US" sz="2800">
-              <a:ea typeface="맑은 고딕"/>
-            </a:endParaRPr>
-          </a:p>
-        </p:txBody>
-      </p:sp>
-      <p:sp>
-        <p:nvSpPr>
-          <p:cNvPr id="9" name="Text 7"/>
-          <p:cNvSpPr/>
-          <p:nvPr/>
-        </p:nvSpPr>
-        <p:spPr>
-          <a:xfrm>
-            <a:off x="1005840" y="4480560"/>
-            <a:ext cx="2194560" cy="914400"/>
-          </a:xfrm>
-          <a:prstGeom prst="rect">
-            <a:avLst/>
-          </a:prstGeom>
-          <a:noFill/>
-          <a:ln/>
-        </p:spPr>
-        <p:txBody>
-          <a:bodyPr wrap="square" lIns="0" tIns="0" rIns="0" bIns="0" rtlCol="0" anchor="ctr"/>
-          <a:lstStyle/>
-          <a:p>
-            <a:pPr marL="0" indent="0" algn="ctr">
-              <a:buNone/>
-            </a:pPr>
-            <a:r>
-              <a:rPr lang="ko-KR" altLang="en-US" b="1" dirty="0">
-                <a:solidFill>
-                  <a:srgbClr val="FFFFFF"/>
+                  <a:srgbClr val="374151"/>
                 </a:solidFill>
                 <a:latin typeface="Calibri" pitchFamily="34" charset="0"/>
                 <a:ea typeface="맑은 고딕" pitchFamily="34" charset="-122"/>
                 <a:cs typeface="Calibri" pitchFamily="34" charset="-120"/>
               </a:rPr>
-              <a:t>무위험이자율</a:t>
+              <a:t>자기자본에 적용하는 할인율은 세 자리에서 바라본 동일한 숫자다 — 효율적 시장에서는 서로 일치한다.</a:t>
             </a:r>
             <a:endParaRPr lang="en-US" dirty="0">
               <a:ea typeface="맑은 고딕"/>
             </a:endParaRPr>
           </a:p>
-          <a:p>
-            <a:pPr marL="0" indent="0" algn="ctr">
-              <a:buNone/>
-            </a:pPr>
-            <a:r>
-              <a:rPr lang="ko-KR" altLang="en-US" b="1" dirty="0">
-                <a:solidFill>
-                  <a:srgbClr val="FFFFFF"/>
-                </a:solidFill>
-                <a:latin typeface="Calibri" pitchFamily="34" charset="0"/>
-                <a:ea typeface="맑은 고딕" pitchFamily="34" charset="-122"/>
-                <a:cs typeface="Calibri" pitchFamily="34" charset="-120"/>
-              </a:rPr>
-              <a:t>(시간의 대가)</a:t>
-            </a:r>
-            <a:endParaRPr lang="en-US" dirty="0">
-              <a:ea typeface="맑은 고딕"/>
-            </a:endParaRPr>
-          </a:p>
-        </p:txBody>
-      </p:sp>
-      <p:sp>
-        <p:nvSpPr>
-          <p:cNvPr id="10" name="Shape 8"/>
+        </p:txBody>
+      </p:sp>
+      <p:sp>
+        <p:nvSpPr>
+          <p:cNvPr id="7" name="Shape 5"/>
           <p:cNvSpPr/>
           <p:nvPr/>
         </p:nvSpPr>
         <p:spPr>
           <a:xfrm>
-            <a:off x="1005840" y="3108960"/>
-            <a:ext cx="2194560" cy="1371600"/>
-          </a:xfrm>
-          <a:prstGeom prst="rect">
-            <a:avLst/>
-          </a:prstGeom>
-          <a:solidFill>
-            <a:srgbClr val="63B84B"/>
-          </a:solidFill>
-          <a:ln/>
-        </p:spPr>
-        <p:txBody>
-          <a:bodyPr/>
-          <a:lstStyle/>
-          <a:p>
-            <a:endParaRPr lang="en-US" sz="2800">
-              <a:ea typeface="맑은 고딕"/>
-            </a:endParaRPr>
-          </a:p>
-        </p:txBody>
-      </p:sp>
-      <p:sp>
-        <p:nvSpPr>
-          <p:cNvPr id="11" name="Text 9"/>
-          <p:cNvSpPr/>
-          <p:nvPr/>
-        </p:nvSpPr>
-        <p:spPr>
-          <a:xfrm>
-            <a:off x="1005840" y="3108960"/>
-            <a:ext cx="2194560" cy="1371600"/>
-          </a:xfrm>
-          <a:prstGeom prst="rect">
-            <a:avLst/>
-          </a:prstGeom>
-          <a:noFill/>
-          <a:ln/>
-        </p:spPr>
-        <p:txBody>
-          <a:bodyPr wrap="square" lIns="0" tIns="0" rIns="0" bIns="0" rtlCol="0" anchor="ctr"/>
-          <a:lstStyle/>
-          <a:p>
-            <a:pPr marL="0" indent="0" algn="ctr">
-              <a:buNone/>
-            </a:pPr>
-            <a:r>
-              <a:rPr lang="en-US" b="1" dirty="0">
-                <a:solidFill>
-                  <a:srgbClr val="FFFFFF"/>
-                </a:solidFill>
-                <a:latin typeface="Calibri" pitchFamily="34" charset="0"/>
-                <a:ea typeface="Calibri" pitchFamily="34" charset="-122"/>
-                <a:cs typeface="Calibri" pitchFamily="34" charset="-120"/>
-              </a:rPr>
-              <a:t>β × ERP</a:t>
-            </a:r>
-            <a:endParaRPr lang="en-US" dirty="0">
-              <a:ea typeface="맑은 고딕"/>
-            </a:endParaRPr>
-          </a:p>
-          <a:p>
-            <a:pPr marL="0" indent="0" algn="ctr">
-              <a:buNone/>
-            </a:pPr>
-            <a:r>
-              <a:rPr lang="ko-KR" altLang="en-US" b="1" dirty="0">
-                <a:solidFill>
-                  <a:srgbClr val="FFFFFF"/>
-                </a:solidFill>
-                <a:latin typeface="Calibri" pitchFamily="34" charset="0"/>
-                <a:ea typeface="맑은 고딕" pitchFamily="34" charset="-122"/>
-                <a:cs typeface="Calibri" pitchFamily="34" charset="-120"/>
-              </a:rPr>
-              <a:t>(위험의 대가)</a:t>
-            </a:r>
-            <a:endParaRPr lang="en-US" dirty="0">
-              <a:ea typeface="맑은 고딕"/>
-            </a:endParaRPr>
-          </a:p>
-        </p:txBody>
-      </p:sp>
-      <p:sp>
-        <p:nvSpPr>
-          <p:cNvPr id="12" name="Shape 10"/>
-          <p:cNvSpPr/>
-          <p:nvPr/>
-        </p:nvSpPr>
-        <p:spPr>
-          <a:xfrm>
-            <a:off x="3383280" y="3108960"/>
-            <a:ext cx="0" cy="2286000"/>
-          </a:xfrm>
-          <a:prstGeom prst="line">
-            <a:avLst/>
-          </a:prstGeom>
-          <a:noFill/>
-          <a:ln w="19050">
-            <a:solidFill>
-              <a:srgbClr val="1F4899"/>
-            </a:solidFill>
-            <a:prstDash val="solid"/>
-            <a:headEnd type="triangle"/>
-            <a:tailEnd type="triangle"/>
-          </a:ln>
-        </p:spPr>
-        <p:txBody>
-          <a:bodyPr/>
-          <a:lstStyle/>
-          <a:p>
-            <a:endParaRPr lang="en-US" sz="2800">
-              <a:ea typeface="맑은 고딕"/>
-            </a:endParaRPr>
-          </a:p>
-        </p:txBody>
-      </p:sp>
-      <p:sp>
-        <p:nvSpPr>
-          <p:cNvPr id="13" name="Text 11"/>
-          <p:cNvSpPr/>
-          <p:nvPr/>
-        </p:nvSpPr>
-        <p:spPr>
-          <a:xfrm>
-            <a:off x="3474720" y="4023360"/>
-            <a:ext cx="1097280" cy="548640"/>
-          </a:xfrm>
-          <a:prstGeom prst="rect">
-            <a:avLst/>
-          </a:prstGeom>
-          <a:noFill/>
-          <a:ln/>
-        </p:spPr>
-        <p:txBody>
-          <a:bodyPr wrap="square" lIns="0" tIns="0" rIns="0" bIns="0" rtlCol="0" anchor="ctr"/>
-          <a:lstStyle/>
-          <a:p>
-            <a:pPr marL="0" indent="0">
-              <a:buNone/>
-            </a:pPr>
-            <a:r>
-              <a:rPr lang="ko-KR" altLang="en-US" b="1" dirty="0">
-                <a:solidFill>
-                  <a:srgbClr val="1F4899"/>
-                </a:solidFill>
-                <a:latin typeface="Calibri" pitchFamily="34" charset="0"/>
-                <a:ea typeface="맑은 고딕" pitchFamily="34" charset="-122"/>
-                <a:cs typeface="Calibri" pitchFamily="34" charset="-120"/>
-              </a:rPr>
-              <a:t>자기자본</a:t>
-            </a:r>
-            <a:endParaRPr lang="en-US" dirty="0">
-              <a:ea typeface="맑은 고딕"/>
-            </a:endParaRPr>
-          </a:p>
-          <a:p>
-            <a:pPr marL="0" indent="0">
-              <a:buNone/>
-            </a:pPr>
-            <a:r>
-              <a:rPr lang="ko-KR" altLang="en-US" b="1" dirty="0">
-                <a:solidFill>
-                  <a:srgbClr val="1F4899"/>
-                </a:solidFill>
-                <a:latin typeface="Calibri" pitchFamily="34" charset="0"/>
-                <a:ea typeface="맑은 고딕" pitchFamily="34" charset="-122"/>
-                <a:cs typeface="Calibri" pitchFamily="34" charset="-120"/>
-              </a:rPr>
-              <a:t>비용</a:t>
-            </a:r>
-            <a:endParaRPr lang="en-US" dirty="0">
-              <a:ea typeface="맑은 고딕"/>
-            </a:endParaRPr>
-          </a:p>
-        </p:txBody>
-      </p:sp>
-      <p:sp>
-        <p:nvSpPr>
-          <p:cNvPr id="14" name="Shape 12"/>
-          <p:cNvSpPr/>
-          <p:nvPr/>
-        </p:nvSpPr>
-        <p:spPr>
-          <a:xfrm>
-            <a:off x="5760720" y="2103120"/>
-            <a:ext cx="5715000" cy="3474720"/>
+            <a:off x="502920" y="1783080"/>
+            <a:ext cx="3474720" cy="2148840"/>
           </a:xfrm>
           <a:prstGeom prst="roundRect">
             <a:avLst>
-              <a:gd name="adj" fmla="val 1429"/>
+              <a:gd name="adj" fmla="val 0"/>
             </a:avLst>
           </a:prstGeom>
           <a:solidFill>
@@ -13286,14 +13177,14 @@
       </p:sp>
       <p:sp>
         <p:nvSpPr>
-          <p:cNvPr id="15" name="Text 13"/>
+          <p:cNvPr id="8" name="Text 6"/>
           <p:cNvSpPr/>
           <p:nvPr/>
         </p:nvSpPr>
         <p:spPr>
           <a:xfrm>
-            <a:off x="5888736" y="2194560"/>
-            <a:ext cx="5458968" cy="274320"/>
+            <a:off x="630936" y="1874520"/>
+            <a:ext cx="3218688" cy="274320"/>
           </a:xfrm>
           <a:prstGeom prst="rect">
             <a:avLst/>
@@ -13309,7 +13200,7 @@
               <a:buNone/>
             </a:pPr>
             <a:r>
-              <a:rPr lang="ko-KR" altLang="en-US" b="1" dirty="0">
+              <a:rPr lang="ko-KR" altLang="en-US" sz="2000" b="1" dirty="0">
                 <a:solidFill>
                   <a:srgbClr val="1E40AF"/>
                 </a:solidFill>
@@ -13317,9 +13208,9 @@
                 <a:ea typeface="맑은 고딕" pitchFamily="34" charset="-122"/>
                 <a:cs typeface="Calibri" pitchFamily="34" charset="-120"/>
               </a:rPr>
-              <a:t>세 가지 구성요소</a:t>
-            </a:r>
-            <a:endParaRPr lang="en-US" dirty="0">
+              <a:t>기대수익률(Expected return)</a:t>
+            </a:r>
+            <a:endParaRPr lang="en-US" sz="2000" dirty="0">
               <a:ea typeface="맑은 고딕"/>
             </a:endParaRPr>
           </a:p>
@@ -13327,14 +13218,14 @@
       </p:sp>
       <p:sp>
         <p:nvSpPr>
-          <p:cNvPr id="16" name="Text 14"/>
+          <p:cNvPr id="9" name="Text 7"/>
           <p:cNvSpPr/>
           <p:nvPr/>
         </p:nvSpPr>
         <p:spPr>
           <a:xfrm>
-            <a:off x="5907024" y="2523744"/>
-            <a:ext cx="5422392" cy="2670048"/>
+            <a:off x="649224" y="2203704"/>
+            <a:ext cx="3182112" cy="1618488"/>
           </a:xfrm>
           <a:prstGeom prst="rect">
             <a:avLst/>
@@ -13346,15 +13237,11 @@
           <a:bodyPr wrap="square" lIns="0" tIns="0" rIns="0" bIns="0" rtlCol="0" anchor="t"/>
           <a:lstStyle/>
           <a:p>
-            <a:pPr marL="285750" indent="-285750" algn="l">
+            <a:pPr marL="0" indent="0" algn="l">
               <a:lnSpc>
                 <a:spcPct val="102000"/>
               </a:lnSpc>
-              <a:spcAft>
-                <a:spcPts val="600"/>
-              </a:spcAft>
-              <a:buFont typeface="Wingdings" panose="05000000000000000000" pitchFamily="2" charset="2"/>
-              <a:buChar char="§"/>
+              <a:buNone/>
             </a:pPr>
             <a:r>
               <a:rPr lang="ko-KR" altLang="en-US" dirty="0">
@@ -13365,36 +13252,117 @@
                 <a:ea typeface="맑은 고딕" pitchFamily="34" charset="-122"/>
                 <a:cs typeface="Calibri" pitchFamily="34" charset="-120"/>
               </a:rPr>
-              <a:t>무위험이자율(risk-free rate) — 국채수익률이며, 현금흐름의 기간에 만기를 맞춘다(3개월물이 아니라 10년물).  </a:t>
-            </a:r>
-            <a:r>
-              <a:rPr lang="ko-KR" altLang="en-US" b="1" dirty="0">
+              <a:t>투자자의 관점 — 위험을 부담한 대가로 주주가 기대하는 수익률.</a:t>
+            </a:r>
+            <a:endParaRPr lang="en-US" dirty="0">
+              <a:ea typeface="맑은 고딕"/>
+            </a:endParaRPr>
+          </a:p>
+        </p:txBody>
+      </p:sp>
+      <p:sp>
+        <p:nvSpPr>
+          <p:cNvPr id="10" name="Shape 8"/>
+          <p:cNvSpPr/>
+          <p:nvPr/>
+        </p:nvSpPr>
+        <p:spPr>
+          <a:xfrm>
+            <a:off x="4206240" y="1783080"/>
+            <a:ext cx="3474720" cy="2148840"/>
+          </a:xfrm>
+          <a:prstGeom prst="roundRect">
+            <a:avLst>
+              <a:gd name="adj" fmla="val 0"/>
+            </a:avLst>
+          </a:prstGeom>
+          <a:solidFill>
+            <a:srgbClr val="E5FCED"/>
+          </a:solidFill>
+          <a:ln w="15875">
+            <a:solidFill>
+              <a:srgbClr val="63B84B"/>
+            </a:solidFill>
+            <a:prstDash val="solid"/>
+          </a:ln>
+        </p:spPr>
+        <p:txBody>
+          <a:bodyPr/>
+          <a:lstStyle/>
+          <a:p>
+            <a:endParaRPr lang="en-US" sz="2800">
+              <a:ea typeface="맑은 고딕"/>
+            </a:endParaRPr>
+          </a:p>
+        </p:txBody>
+      </p:sp>
+      <p:sp>
+        <p:nvSpPr>
+          <p:cNvPr id="11" name="Text 9"/>
+          <p:cNvSpPr/>
+          <p:nvPr/>
+        </p:nvSpPr>
+        <p:spPr>
+          <a:xfrm>
+            <a:off x="4334256" y="1874520"/>
+            <a:ext cx="3218688" cy="274320"/>
+          </a:xfrm>
+          <a:prstGeom prst="rect">
+            <a:avLst/>
+          </a:prstGeom>
+          <a:noFill/>
+          <a:ln/>
+        </p:spPr>
+        <p:txBody>
+          <a:bodyPr wrap="square" lIns="0" tIns="0" rIns="0" bIns="0" rtlCol="0" anchor="ctr"/>
+          <a:lstStyle/>
+          <a:p>
+            <a:pPr marL="0" indent="0" algn="l">
+              <a:buNone/>
+            </a:pPr>
+            <a:r>
+              <a:rPr lang="ko-KR" altLang="en-US" sz="2000" b="1" dirty="0">
                 <a:solidFill>
-                  <a:srgbClr val="C00000"/>
+                  <a:srgbClr val="15803D"/>
                 </a:solidFill>
                 <a:latin typeface="Calibri" pitchFamily="34" charset="0"/>
                 <a:ea typeface="맑은 고딕" pitchFamily="34" charset="-122"/>
                 <a:cs typeface="Calibri" pitchFamily="34" charset="-120"/>
               </a:rPr>
-              <a:t>4.6% (2026년 8월)</a:t>
-            </a:r>
-            <a:endParaRPr lang="en-US" b="1" dirty="0">
-              <a:solidFill>
-                <a:srgbClr val="C00000"/>
-              </a:solidFill>
+              <a:t>자본비용(Cost of capital)</a:t>
+            </a:r>
+            <a:endParaRPr lang="en-US" sz="2000" dirty="0">
               <a:ea typeface="맑은 고딕"/>
             </a:endParaRPr>
           </a:p>
-          <a:p>
-            <a:pPr marL="285750" indent="-285750" algn="l">
+        </p:txBody>
+      </p:sp>
+      <p:sp>
+        <p:nvSpPr>
+          <p:cNvPr id="12" name="Text 10"/>
+          <p:cNvSpPr/>
+          <p:nvPr/>
+        </p:nvSpPr>
+        <p:spPr>
+          <a:xfrm>
+            <a:off x="4352544" y="2203704"/>
+            <a:ext cx="3182112" cy="1618488"/>
+          </a:xfrm>
+          <a:prstGeom prst="rect">
+            <a:avLst/>
+          </a:prstGeom>
+          <a:noFill/>
+          <a:ln/>
+        </p:spPr>
+        <p:txBody>
+          <a:bodyPr wrap="square" lIns="0" tIns="0" rIns="0" bIns="0" rtlCol="0" anchor="t"/>
+          <a:lstStyle/>
+          <a:p>
+            <a:pPr marL="0" indent="0" algn="l">
               <a:lnSpc>
                 <a:spcPct val="102000"/>
               </a:lnSpc>
-              <a:spcAft>
-                <a:spcPts val="600"/>
-              </a:spcAft>
-              <a:buFont typeface="Wingdings" panose="05000000000000000000" pitchFamily="2" charset="2"/>
-              <a:buChar char="§"/>
+              <a:buNone/>
             </a:pPr>
             <a:r>
               <a:rPr lang="ko-KR" altLang="en-US" dirty="0">
@@ -13405,19 +13373,118 @@
                 <a:ea typeface="맑은 고딕" pitchFamily="34" charset="-122"/>
                 <a:cs typeface="Calibri" pitchFamily="34" charset="-120"/>
               </a:rPr>
-              <a:t>β(베타) — 주식이 시장위험을 얼마나 증폭시키는가; </a:t>
-            </a:r>
-            <a:r>
-              <a:rPr lang="en-US" b="1" dirty="0">
+              <a:t>기업의 관점 — 자기자본을 유치하기 위해 제공해야 하는 수익률. 한쪽의 수익은 다른 쪽의 비용이다.</a:t>
+            </a:r>
+            <a:endParaRPr lang="en-US" dirty="0">
+              <a:ea typeface="맑은 고딕"/>
+            </a:endParaRPr>
+          </a:p>
+        </p:txBody>
+      </p:sp>
+      <p:sp>
+        <p:nvSpPr>
+          <p:cNvPr id="13" name="Shape 11"/>
+          <p:cNvSpPr/>
+          <p:nvPr/>
+        </p:nvSpPr>
+        <p:spPr>
+          <a:xfrm>
+            <a:off x="7909560" y="1783080"/>
+            <a:ext cx="3474720" cy="2148840"/>
+          </a:xfrm>
+          <a:prstGeom prst="roundRect">
+            <a:avLst>
+              <a:gd name="adj" fmla="val 0"/>
+            </a:avLst>
+          </a:prstGeom>
+          <a:solidFill>
+            <a:srgbClr val="FEF3C7"/>
+          </a:solidFill>
+          <a:ln w="15875">
+            <a:solidFill>
+              <a:srgbClr val="F59E0B"/>
+            </a:solidFill>
+            <a:prstDash val="solid"/>
+          </a:ln>
+        </p:spPr>
+        <p:txBody>
+          <a:bodyPr/>
+          <a:lstStyle/>
+          <a:p>
+            <a:endParaRPr lang="en-US" sz="2800">
+              <a:ea typeface="맑은 고딕"/>
+            </a:endParaRPr>
+          </a:p>
+        </p:txBody>
+      </p:sp>
+      <p:sp>
+        <p:nvSpPr>
+          <p:cNvPr id="14" name="Text 12"/>
+          <p:cNvSpPr/>
+          <p:nvPr/>
+        </p:nvSpPr>
+        <p:spPr>
+          <a:xfrm>
+            <a:off x="8037576" y="1874520"/>
+            <a:ext cx="3218688" cy="274320"/>
+          </a:xfrm>
+          <a:prstGeom prst="rect">
+            <a:avLst/>
+          </a:prstGeom>
+          <a:noFill/>
+          <a:ln/>
+        </p:spPr>
+        <p:txBody>
+          <a:bodyPr wrap="square" lIns="0" tIns="0" rIns="0" bIns="0" rtlCol="0" anchor="ctr"/>
+          <a:lstStyle/>
+          <a:p>
+            <a:pPr marL="0" indent="0" algn="l">
+              <a:buNone/>
+            </a:pPr>
+            <a:r>
+              <a:rPr lang="ko-KR" altLang="en-US" sz="2000" b="1" dirty="0">
                 <a:solidFill>
-                  <a:srgbClr val="C00000"/>
+                  <a:srgbClr val="92400E"/>
                 </a:solidFill>
                 <a:latin typeface="Calibri" pitchFamily="34" charset="0"/>
-                <a:ea typeface="Calibri" pitchFamily="34" charset="-122"/>
+                <a:ea typeface="맑은 고딕" pitchFamily="34" charset="-122"/>
                 <a:cs typeface="Calibri" pitchFamily="34" charset="-120"/>
               </a:rPr>
-              <a:t>β = 1 </a:t>
-            </a:r>
+              <a:t>할인율(Discount rate)</a:t>
+            </a:r>
+            <a:endParaRPr lang="en-US" sz="2000" dirty="0">
+              <a:ea typeface="맑은 고딕"/>
+            </a:endParaRPr>
+          </a:p>
+        </p:txBody>
+      </p:sp>
+      <p:sp>
+        <p:nvSpPr>
+          <p:cNvPr id="15" name="Text 13"/>
+          <p:cNvSpPr/>
+          <p:nvPr/>
+        </p:nvSpPr>
+        <p:spPr>
+          <a:xfrm>
+            <a:off x="8055864" y="2203704"/>
+            <a:ext cx="3182112" cy="1618488"/>
+          </a:xfrm>
+          <a:prstGeom prst="rect">
+            <a:avLst/>
+          </a:prstGeom>
+          <a:noFill/>
+          <a:ln/>
+        </p:spPr>
+        <p:txBody>
+          <a:bodyPr wrap="square" lIns="0" tIns="0" rIns="0" bIns="0" rtlCol="0" anchor="t"/>
+          <a:lstStyle/>
+          <a:p>
+            <a:pPr marL="0" indent="0" algn="l">
+              <a:lnSpc>
+                <a:spcPct val="102000"/>
+              </a:lnSpc>
+              <a:buNone/>
+            </a:pPr>
             <a:r>
               <a:rPr lang="ko-KR" altLang="en-US" dirty="0">
                 <a:solidFill>
@@ -13427,22 +13494,121 @@
                 <a:ea typeface="맑은 고딕" pitchFamily="34" charset="-122"/>
                 <a:cs typeface="Calibri" pitchFamily="34" charset="-120"/>
               </a:rPr>
-              <a:t>이면 시장 평균이다.</a:t>
+              <a:t>분석가의 관점 — 미래현금흐름을 오늘의 가치로 환산하는 비율.</a:t>
             </a:r>
             <a:endParaRPr lang="en-US" dirty="0">
               <a:ea typeface="맑은 고딕"/>
             </a:endParaRPr>
           </a:p>
-          <a:p>
-            <a:pPr marL="285750" indent="-285750" algn="l">
+        </p:txBody>
+      </p:sp>
+      <p:sp>
+        <p:nvSpPr>
+          <p:cNvPr id="16" name="Shape 14"/>
+          <p:cNvSpPr/>
+          <p:nvPr/>
+        </p:nvSpPr>
+        <p:spPr>
+          <a:xfrm>
+            <a:off x="502920" y="4160520"/>
+            <a:ext cx="10972800" cy="1737360"/>
+          </a:xfrm>
+          <a:prstGeom prst="roundRect">
+            <a:avLst>
+              <a:gd name="adj" fmla="val 0"/>
+            </a:avLst>
+          </a:prstGeom>
+          <a:solidFill>
+            <a:srgbClr val="EEF2FB"/>
+          </a:solidFill>
+          <a:ln w="15875">
+            <a:solidFill>
+              <a:srgbClr val="1F4899"/>
+            </a:solidFill>
+            <a:prstDash val="solid"/>
+          </a:ln>
+        </p:spPr>
+        <p:txBody>
+          <a:bodyPr/>
+          <a:lstStyle/>
+          <a:p>
+            <a:endParaRPr lang="en-US" sz="2800">
+              <a:ea typeface="맑은 고딕"/>
+            </a:endParaRPr>
+          </a:p>
+        </p:txBody>
+      </p:sp>
+      <p:sp>
+        <p:nvSpPr>
+          <p:cNvPr id="17" name="Text 15"/>
+          <p:cNvSpPr/>
+          <p:nvPr/>
+        </p:nvSpPr>
+        <p:spPr>
+          <a:xfrm>
+            <a:off x="630936" y="4251960"/>
+            <a:ext cx="10716768" cy="274320"/>
+          </a:xfrm>
+          <a:prstGeom prst="rect">
+            <a:avLst/>
+          </a:prstGeom>
+          <a:noFill/>
+          <a:ln/>
+        </p:spPr>
+        <p:txBody>
+          <a:bodyPr wrap="square" lIns="0" tIns="0" rIns="0" bIns="0" rtlCol="0" anchor="ctr"/>
+          <a:lstStyle/>
+          <a:p>
+            <a:pPr marL="0" indent="0" algn="l">
+              <a:buNone/>
+            </a:pPr>
+            <a:r>
+              <a:rPr lang="ko-KR" altLang="en-US" sz="2000" b="1" dirty="0">
+                <a:solidFill>
+                  <a:srgbClr val="16346B"/>
+                </a:solidFill>
+                <a:latin typeface="Calibri" pitchFamily="34" charset="0"/>
+                <a:ea typeface="맑은 고딕" pitchFamily="34" charset="-122"/>
+                <a:cs typeface="Calibri" pitchFamily="34" charset="-120"/>
+              </a:rPr>
+              <a:t>황금률 — 현금흐름에 맞는 할인율을 사용하라</a:t>
+            </a:r>
+            <a:endParaRPr lang="en-US" sz="2000" dirty="0">
+              <a:ea typeface="맑은 고딕"/>
+            </a:endParaRPr>
+          </a:p>
+        </p:txBody>
+      </p:sp>
+      <p:sp>
+        <p:nvSpPr>
+          <p:cNvPr id="18" name="Text 16"/>
+          <p:cNvSpPr/>
+          <p:nvPr/>
+        </p:nvSpPr>
+        <p:spPr>
+          <a:xfrm>
+            <a:off x="649224" y="4581144"/>
+            <a:ext cx="10680192" cy="1207008"/>
+          </a:xfrm>
+          <a:prstGeom prst="rect">
+            <a:avLst/>
+          </a:prstGeom>
+          <a:noFill/>
+          <a:ln/>
+        </p:spPr>
+        <p:txBody>
+          <a:bodyPr wrap="square" lIns="0" tIns="0" rIns="0" bIns="0" rtlCol="0" anchor="t"/>
+          <a:lstStyle/>
+          <a:p>
+            <a:pPr marL="152400" indent="-152400" algn="l">
               <a:lnSpc>
                 <a:spcPct val="102000"/>
               </a:lnSpc>
               <a:spcAft>
-                <a:spcPts val="600"/>
+                <a:spcPts val="400"/>
               </a:spcAft>
-              <a:buFont typeface="Wingdings" panose="05000000000000000000" pitchFamily="2" charset="2"/>
-              <a:buChar char="§"/>
+              <a:buSzPct val="100000"/>
+              <a:buChar char="•"/>
             </a:pPr>
             <a:r>
               <a:rPr lang="ko-KR" altLang="en-US" dirty="0">
@@ -13453,54 +13619,25 @@
                 <a:ea typeface="맑은 고딕" pitchFamily="34" charset="-122"/>
                 <a:cs typeface="Calibri" pitchFamily="34" charset="-120"/>
               </a:rPr>
-              <a:t>ERP — 채권 대신 주식을 보유하는 대가로 요구되는 추가수익률. (</a:t>
-            </a:r>
-            <a:r>
-              <a:rPr lang="ko-KR" altLang="en-US" b="1" dirty="0">
-                <a:solidFill>
-                  <a:srgbClr val="C00000"/>
-                </a:solidFill>
-                <a:latin typeface="Calibri" pitchFamily="34" charset="0"/>
-                <a:ea typeface="맑은 고딕" pitchFamily="34" charset="-122"/>
-                <a:cs typeface="Calibri" pitchFamily="34" charset="-120"/>
-              </a:rPr>
-              <a:t>약 5%</a:t>
-            </a:r>
-            <a:r>
-              <a:rPr lang="en-US" dirty="0">
-                <a:solidFill>
-                  <a:srgbClr val="374151"/>
-                </a:solidFill>
-                <a:latin typeface="Calibri" pitchFamily="34" charset="0"/>
-                <a:ea typeface="Calibri" pitchFamily="34" charset="-122"/>
-                <a:cs typeface="Calibri" pitchFamily="34" charset="-120"/>
-              </a:rPr>
-              <a:t>)</a:t>
+              <a:t>주주 귀속 현금흐름(배당, FCFE)  →  자기자본비용(cost of equity)으로 할인.</a:t>
             </a:r>
             <a:endParaRPr lang="en-US" dirty="0">
               <a:ea typeface="맑은 고딕"/>
             </a:endParaRPr>
           </a:p>
           <a:p>
-            <a:pPr marL="0" indent="0" algn="l">
+            <a:pPr marL="152400" indent="-152400" algn="l">
               <a:lnSpc>
                 <a:spcPct val="102000"/>
               </a:lnSpc>
-              <a:buNone/>
+              <a:spcAft>
+                <a:spcPts val="400"/>
+              </a:spcAft>
+              <a:buSzPct val="100000"/>
+              <a:buChar char="•"/>
             </a:pPr>
             <a:r>
-              <a:rPr lang="ko-KR" altLang="en-US" b="1" dirty="0">
-                <a:solidFill>
-                  <a:srgbClr val="1F4899"/>
-                </a:solidFill>
-                <a:latin typeface="Calibri" pitchFamily="34" charset="0"/>
-                <a:ea typeface="맑은 고딕" pitchFamily="34" charset="-122"/>
-                <a:cs typeface="Calibri" pitchFamily="34" charset="-120"/>
-              </a:rPr>
-              <a:t>요약하면:  </a:t>
-            </a:r>
-            <a:r>
-              <a:rPr lang="ko-KR" altLang="en-US" i="1" dirty="0">
+              <a:rPr lang="ko-KR" altLang="en-US" dirty="0">
                 <a:solidFill>
                   <a:srgbClr val="374151"/>
                 </a:solidFill>
@@ -13508,118 +13645,32 @@
                 <a:ea typeface="맑은 고딕" pitchFamily="34" charset="-122"/>
                 <a:cs typeface="Calibri" pitchFamily="34" charset="-120"/>
               </a:rPr>
-              <a:t>기다림의 대가 + 걱정의 대가.</a:t>
-            </a:r>
+              <a:t>기업 전체 현금흐름(FCFF)  →  가중평균자본비용(WACC)으로 할인.</a:t>
+            </a:r>
+            <a:endParaRPr lang="en-US" dirty="0">
+              <a:ea typeface="맑은 고딕"/>
+            </a:endParaRPr>
           </a:p>
           <a:p>
             <a:pPr marL="0" indent="0" algn="l">
               <a:lnSpc>
                 <a:spcPct val="102000"/>
               </a:lnSpc>
+              <a:spcBef>
+                <a:spcPts val="200"/>
+              </a:spcBef>
               <a:buNone/>
             </a:pPr>
-            <a:endParaRPr lang="en-US" i="1" dirty="0">
-              <a:solidFill>
-                <a:srgbClr val="374151"/>
-              </a:solidFill>
-              <a:latin typeface="Calibri" pitchFamily="34" charset="0"/>
-              <a:ea typeface="맑은 고딕" pitchFamily="34" charset="-122"/>
-              <a:cs typeface="Calibri" pitchFamily="34" charset="-120"/>
-            </a:endParaRPr>
-          </a:p>
-          <a:p>
-            <a:pPr marL="0" indent="0" algn="l">
-              <a:lnSpc>
-                <a:spcPct val="102000"/>
-              </a:lnSpc>
-              <a:buNone/>
-            </a:pPr>
-            <a:r>
-              <a:rPr lang="en-US" i="1" dirty="0">
+            <a:r>
+              <a:rPr lang="ko-KR" altLang="en-US" i="1" dirty="0">
                 <a:solidFill>
-                  <a:srgbClr val="374151"/>
-                </a:solidFill>
-                <a:latin typeface="Calibri" pitchFamily="34" charset="0"/>
-                <a:ea typeface="Calibri" pitchFamily="34" charset="-122"/>
-                <a:cs typeface="Calibri" pitchFamily="34" charset="-120"/>
-              </a:rPr>
-              <a:t> </a:t>
-            </a:r>
-            <a:r>
-              <a:rPr lang="ko-KR" altLang="en-US" b="1" i="1" dirty="0">
-                <a:solidFill>
-                  <a:srgbClr val="C00000"/>
+                  <a:srgbClr val="991B1B"/>
                 </a:solidFill>
                 <a:latin typeface="Calibri" pitchFamily="34" charset="0"/>
                 <a:ea typeface="맑은 고딕" pitchFamily="34" charset="-122"/>
                 <a:cs typeface="Calibri" pitchFamily="34" charset="-120"/>
               </a:rPr>
-              <a:t>자기자본비용 =  4.6% + 1×5% = 9.6%</a:t>
-            </a:r>
-          </a:p>
-          <a:p>
-            <a:pPr marL="0" indent="0" algn="l">
-              <a:lnSpc>
-                <a:spcPct val="102000"/>
-              </a:lnSpc>
-              <a:buNone/>
-            </a:pPr>
-            <a:endParaRPr lang="en-US" i="1" dirty="0">
-              <a:solidFill>
-                <a:srgbClr val="374151"/>
-              </a:solidFill>
-              <a:latin typeface="Calibri" pitchFamily="34" charset="0"/>
-              <a:ea typeface="맑은 고딕" pitchFamily="34" charset="-122"/>
-              <a:cs typeface="Calibri" pitchFamily="34" charset="-120"/>
-            </a:endParaRPr>
-          </a:p>
-          <a:p>
-            <a:pPr marL="0" indent="0" algn="l">
-              <a:lnSpc>
-                <a:spcPct val="102000"/>
-              </a:lnSpc>
-              <a:buNone/>
-            </a:pPr>
-            <a:endParaRPr lang="en-US" dirty="0">
-              <a:ea typeface="맑은 고딕"/>
-            </a:endParaRPr>
-          </a:p>
-        </p:txBody>
-      </p:sp>
-      <p:sp>
-        <p:nvSpPr>
-          <p:cNvPr id="17" name="Text 15"/>
-          <p:cNvSpPr/>
-          <p:nvPr/>
-        </p:nvSpPr>
-        <p:spPr>
-          <a:xfrm>
-            <a:off x="502920" y="5840730"/>
-            <a:ext cx="10972800" cy="365760"/>
-          </a:xfrm>
-          <a:prstGeom prst="rect">
-            <a:avLst/>
-          </a:prstGeom>
-          <a:noFill/>
-          <a:ln/>
-        </p:spPr>
-        <p:txBody>
-          <a:bodyPr wrap="square" rtlCol="0" anchor="ctr"/>
-          <a:lstStyle/>
-          <a:p>
-            <a:pPr marL="0" indent="0">
-              <a:buNone/>
-            </a:pPr>
-            <a:r>
-              <a:rPr lang="ko-KR" altLang="en-US" i="1" dirty="0">
-                <a:solidFill>
-                  <a:srgbClr val="6B7280"/>
-                </a:solidFill>
-                <a:latin typeface="Calibri" pitchFamily="34" charset="0"/>
-                <a:ea typeface="맑은 고딕" pitchFamily="34" charset="-122"/>
-                <a:cs typeface="Calibri" pitchFamily="34" charset="-120"/>
-              </a:rPr>
-              <a:t>기대주식수익률 = 시간에 대한 보상 + 위험에 대한 보상.</a:t>
+              <a:t>주주 귀속 현금흐름을 WACC로 할인하면 가치가 과대평가된다 — 전형적인 오류.</a:t>
             </a:r>
             <a:endParaRPr lang="en-US" dirty="0">
               <a:ea typeface="맑은 고딕"/>
@@ -13714,6 +13765,906 @@
                 <a:ea typeface="맑은 고딕" pitchFamily="34" charset="-122"/>
                 <a:cs typeface="Calibri" pitchFamily="34" charset="-120"/>
               </a:rPr>
+              <a:t>4.  구성요소 — 자본자산가격결정모형(CAPM)</a:t>
+            </a:r>
+            <a:endParaRPr lang="en-US" sz="2700" dirty="0">
+              <a:ea typeface="맑은 고딕"/>
+            </a:endParaRPr>
+          </a:p>
+        </p:txBody>
+      </p:sp>
+      <p:sp>
+        <p:nvSpPr>
+          <p:cNvPr id="4" name="Text 2"/>
+          <p:cNvSpPr/>
+          <p:nvPr/>
+        </p:nvSpPr>
+        <p:spPr>
+          <a:xfrm>
+            <a:off x="502920" y="18288"/>
+            <a:ext cx="10881360" cy="256032"/>
+          </a:xfrm>
+          <a:prstGeom prst="rect">
+            <a:avLst/>
+          </a:prstGeom>
+          <a:noFill/>
+          <a:ln/>
+        </p:spPr>
+        <p:txBody>
+          <a:bodyPr wrap="square" lIns="0" tIns="0" rIns="0" bIns="0" rtlCol="0" anchor="ctr"/>
+          <a:lstStyle/>
+          <a:p>
+            <a:pPr marL="0" indent="0" algn="l">
+              <a:buNone/>
+            </a:pPr>
+            <a:r>
+              <a:rPr lang="en-US" sz="1100" b="1" kern="0" spc="100" dirty="0">
+                <a:solidFill>
+                  <a:srgbClr val="6B7280"/>
+                </a:solidFill>
+                <a:latin typeface="Calibri" pitchFamily="34" charset="0"/>
+                <a:ea typeface="Calibri" pitchFamily="34" charset="-122"/>
+                <a:cs typeface="Calibri" pitchFamily="34" charset="-120"/>
+              </a:rPr>
+              <a:t>TOPIC 4</a:t>
+            </a:r>
+            <a:endParaRPr lang="en-US" sz="1100" dirty="0">
+              <a:ea typeface="맑은 고딕"/>
+            </a:endParaRPr>
+          </a:p>
+        </p:txBody>
+      </p:sp>
+      <p:sp>
+        <p:nvSpPr>
+          <p:cNvPr id="5" name="Text 3"/>
+          <p:cNvSpPr/>
+          <p:nvPr/>
+        </p:nvSpPr>
+        <p:spPr>
+          <a:xfrm>
+            <a:off x="11686032" y="6446520"/>
+            <a:ext cx="505663" cy="320040"/>
+          </a:xfrm>
+          <a:prstGeom prst="rect">
+            <a:avLst/>
+          </a:prstGeom>
+          <a:noFill/>
+          <a:ln/>
+        </p:spPr>
+        <p:txBody>
+          <a:bodyPr wrap="square" lIns="0" tIns="0" rIns="0" bIns="0" rtlCol="0" anchor="ctr"/>
+          <a:lstStyle/>
+          <a:p>
+            <a:pPr marL="0" indent="0" algn="ctr">
+              <a:buNone/>
+            </a:pPr>
+            <a:r>
+              <a:rPr lang="en-US" sz="1100" dirty="0">
+                <a:solidFill>
+                  <a:srgbClr val="FFFFFF"/>
+                </a:solidFill>
+                <a:latin typeface="Calibri" pitchFamily="34" charset="0"/>
+                <a:ea typeface="Calibri" pitchFamily="34" charset="-122"/>
+                <a:cs typeface="Calibri" pitchFamily="34" charset="-120"/>
+              </a:rPr>
+              <a:t>19</a:t>
+            </a:r>
+            <a:endParaRPr lang="en-US" sz="1100" dirty="0">
+              <a:ea typeface="맑은 고딕"/>
+            </a:endParaRPr>
+          </a:p>
+        </p:txBody>
+      </p:sp>
+      <p:sp>
+        <p:nvSpPr>
+          <p:cNvPr id="6" name="Shape 4"/>
+          <p:cNvSpPr/>
+          <p:nvPr/>
+        </p:nvSpPr>
+        <p:spPr>
+          <a:xfrm>
+            <a:off x="502920" y="1234440"/>
+            <a:ext cx="10972800" cy="640080"/>
+          </a:xfrm>
+          <a:prstGeom prst="roundRect">
+            <a:avLst>
+              <a:gd name="adj" fmla="val 7143"/>
+            </a:avLst>
+          </a:prstGeom>
+          <a:solidFill>
+            <a:srgbClr val="16346B"/>
+          </a:solidFill>
+          <a:ln/>
+        </p:spPr>
+        <p:txBody>
+          <a:bodyPr/>
+          <a:lstStyle/>
+          <a:p>
+            <a:endParaRPr lang="en-US">
+              <a:ea typeface="맑은 고딕"/>
+            </a:endParaRPr>
+          </a:p>
+        </p:txBody>
+      </p:sp>
+      <p:sp>
+        <p:nvSpPr>
+          <p:cNvPr id="7" name="Text 5"/>
+          <p:cNvSpPr/>
+          <p:nvPr/>
+        </p:nvSpPr>
+        <p:spPr>
+          <a:xfrm>
+            <a:off x="502920" y="1234440"/>
+            <a:ext cx="10972800" cy="640080"/>
+          </a:xfrm>
+          <a:prstGeom prst="rect">
+            <a:avLst/>
+          </a:prstGeom>
+          <a:noFill/>
+          <a:ln/>
+        </p:spPr>
+        <p:txBody>
+          <a:bodyPr wrap="square" rtlCol="0" anchor="ctr"/>
+          <a:lstStyle/>
+          <a:p>
+            <a:pPr marL="0" indent="0" algn="ctr">
+              <a:buNone/>
+            </a:pPr>
+            <a:r>
+              <a:rPr lang="ko-KR" altLang="en-US" sz="1700" b="1" dirty="0">
+                <a:solidFill>
+                  <a:srgbClr val="FFFFFF"/>
+                </a:solidFill>
+                <a:latin typeface="Cambria" pitchFamily="34" charset="0"/>
+                <a:ea typeface="맑은 고딕" pitchFamily="34" charset="-122"/>
+                <a:cs typeface="Cambria" pitchFamily="34" charset="-120"/>
+              </a:rPr>
+              <a:t>자기자본비용 = 무위험이자율 + β × 시장위험프리미엄(ERP)</a:t>
+            </a:r>
+            <a:endParaRPr lang="en-US" sz="1700" dirty="0">
+              <a:ea typeface="맑은 고딕"/>
+            </a:endParaRPr>
+          </a:p>
+        </p:txBody>
+      </p:sp>
+      <p:sp>
+        <p:nvSpPr>
+          <p:cNvPr id="8" name="Shape 6"/>
+          <p:cNvSpPr/>
+          <p:nvPr/>
+        </p:nvSpPr>
+        <p:spPr>
+          <a:xfrm>
+            <a:off x="1005840" y="4480560"/>
+            <a:ext cx="2194560" cy="914400"/>
+          </a:xfrm>
+          <a:prstGeom prst="rect">
+            <a:avLst/>
+          </a:prstGeom>
+          <a:solidFill>
+            <a:srgbClr val="3B82F6"/>
+          </a:solidFill>
+          <a:ln/>
+        </p:spPr>
+        <p:txBody>
+          <a:bodyPr/>
+          <a:lstStyle/>
+          <a:p>
+            <a:endParaRPr lang="en-US" sz="2800">
+              <a:ea typeface="맑은 고딕"/>
+            </a:endParaRPr>
+          </a:p>
+        </p:txBody>
+      </p:sp>
+      <p:sp>
+        <p:nvSpPr>
+          <p:cNvPr id="9" name="Text 7"/>
+          <p:cNvSpPr/>
+          <p:nvPr/>
+        </p:nvSpPr>
+        <p:spPr>
+          <a:xfrm>
+            <a:off x="1005840" y="4480560"/>
+            <a:ext cx="2194560" cy="914400"/>
+          </a:xfrm>
+          <a:prstGeom prst="rect">
+            <a:avLst/>
+          </a:prstGeom>
+          <a:noFill/>
+          <a:ln/>
+        </p:spPr>
+        <p:txBody>
+          <a:bodyPr wrap="square" lIns="0" tIns="0" rIns="0" bIns="0" rtlCol="0" anchor="ctr"/>
+          <a:lstStyle/>
+          <a:p>
+            <a:pPr marL="0" indent="0" algn="ctr">
+              <a:buNone/>
+            </a:pPr>
+            <a:r>
+              <a:rPr lang="ko-KR" altLang="en-US" b="1" dirty="0">
+                <a:solidFill>
+                  <a:srgbClr val="FFFFFF"/>
+                </a:solidFill>
+                <a:latin typeface="Calibri" pitchFamily="34" charset="0"/>
+                <a:ea typeface="맑은 고딕" pitchFamily="34" charset="-122"/>
+                <a:cs typeface="Calibri" pitchFamily="34" charset="-120"/>
+              </a:rPr>
+              <a:t>무위험이자율</a:t>
+            </a:r>
+            <a:endParaRPr lang="en-US" dirty="0">
+              <a:ea typeface="맑은 고딕"/>
+            </a:endParaRPr>
+          </a:p>
+          <a:p>
+            <a:pPr marL="0" indent="0" algn="ctr">
+              <a:buNone/>
+            </a:pPr>
+            <a:r>
+              <a:rPr lang="ko-KR" altLang="en-US" b="1" dirty="0">
+                <a:solidFill>
+                  <a:srgbClr val="FFFFFF"/>
+                </a:solidFill>
+                <a:latin typeface="Calibri" pitchFamily="34" charset="0"/>
+                <a:ea typeface="맑은 고딕" pitchFamily="34" charset="-122"/>
+                <a:cs typeface="Calibri" pitchFamily="34" charset="-120"/>
+              </a:rPr>
+              <a:t>(시간의 대가)</a:t>
+            </a:r>
+            <a:endParaRPr lang="en-US" dirty="0">
+              <a:ea typeface="맑은 고딕"/>
+            </a:endParaRPr>
+          </a:p>
+        </p:txBody>
+      </p:sp>
+      <p:sp>
+        <p:nvSpPr>
+          <p:cNvPr id="10" name="Shape 8"/>
+          <p:cNvSpPr/>
+          <p:nvPr/>
+        </p:nvSpPr>
+        <p:spPr>
+          <a:xfrm>
+            <a:off x="1005840" y="3108960"/>
+            <a:ext cx="2194560" cy="1371600"/>
+          </a:xfrm>
+          <a:prstGeom prst="rect">
+            <a:avLst/>
+          </a:prstGeom>
+          <a:solidFill>
+            <a:srgbClr val="63B84B"/>
+          </a:solidFill>
+          <a:ln/>
+        </p:spPr>
+        <p:txBody>
+          <a:bodyPr/>
+          <a:lstStyle/>
+          <a:p>
+            <a:endParaRPr lang="en-US" sz="2800">
+              <a:ea typeface="맑은 고딕"/>
+            </a:endParaRPr>
+          </a:p>
+        </p:txBody>
+      </p:sp>
+      <p:sp>
+        <p:nvSpPr>
+          <p:cNvPr id="11" name="Text 9"/>
+          <p:cNvSpPr/>
+          <p:nvPr/>
+        </p:nvSpPr>
+        <p:spPr>
+          <a:xfrm>
+            <a:off x="1005840" y="3108960"/>
+            <a:ext cx="2194560" cy="1371600"/>
+          </a:xfrm>
+          <a:prstGeom prst="rect">
+            <a:avLst/>
+          </a:prstGeom>
+          <a:noFill/>
+          <a:ln/>
+        </p:spPr>
+        <p:txBody>
+          <a:bodyPr wrap="square" lIns="0" tIns="0" rIns="0" bIns="0" rtlCol="0" anchor="ctr"/>
+          <a:lstStyle/>
+          <a:p>
+            <a:pPr marL="0" indent="0" algn="ctr">
+              <a:buNone/>
+            </a:pPr>
+            <a:r>
+              <a:rPr lang="en-US" b="1" dirty="0">
+                <a:solidFill>
+                  <a:srgbClr val="FFFFFF"/>
+                </a:solidFill>
+                <a:latin typeface="Calibri" pitchFamily="34" charset="0"/>
+                <a:ea typeface="Calibri" pitchFamily="34" charset="-122"/>
+                <a:cs typeface="Calibri" pitchFamily="34" charset="-120"/>
+              </a:rPr>
+              <a:t>β × ERP</a:t>
+            </a:r>
+            <a:endParaRPr lang="en-US" dirty="0">
+              <a:ea typeface="맑은 고딕"/>
+            </a:endParaRPr>
+          </a:p>
+          <a:p>
+            <a:pPr marL="0" indent="0" algn="ctr">
+              <a:buNone/>
+            </a:pPr>
+            <a:r>
+              <a:rPr lang="ko-KR" altLang="en-US" b="1" dirty="0">
+                <a:solidFill>
+                  <a:srgbClr val="FFFFFF"/>
+                </a:solidFill>
+                <a:latin typeface="Calibri" pitchFamily="34" charset="0"/>
+                <a:ea typeface="맑은 고딕" pitchFamily="34" charset="-122"/>
+                <a:cs typeface="Calibri" pitchFamily="34" charset="-120"/>
+              </a:rPr>
+              <a:t>(위험의 대가)</a:t>
+            </a:r>
+            <a:endParaRPr lang="en-US" dirty="0">
+              <a:ea typeface="맑은 고딕"/>
+            </a:endParaRPr>
+          </a:p>
+        </p:txBody>
+      </p:sp>
+      <p:sp>
+        <p:nvSpPr>
+          <p:cNvPr id="12" name="Shape 10"/>
+          <p:cNvSpPr/>
+          <p:nvPr/>
+        </p:nvSpPr>
+        <p:spPr>
+          <a:xfrm>
+            <a:off x="3383280" y="3108960"/>
+            <a:ext cx="0" cy="2286000"/>
+          </a:xfrm>
+          <a:prstGeom prst="line">
+            <a:avLst/>
+          </a:prstGeom>
+          <a:noFill/>
+          <a:ln w="19050">
+            <a:solidFill>
+              <a:srgbClr val="1F4899"/>
+            </a:solidFill>
+            <a:prstDash val="solid"/>
+            <a:headEnd type="triangle"/>
+            <a:tailEnd type="triangle"/>
+          </a:ln>
+        </p:spPr>
+        <p:txBody>
+          <a:bodyPr/>
+          <a:lstStyle/>
+          <a:p>
+            <a:endParaRPr lang="en-US" sz="2800">
+              <a:ea typeface="맑은 고딕"/>
+            </a:endParaRPr>
+          </a:p>
+        </p:txBody>
+      </p:sp>
+      <p:sp>
+        <p:nvSpPr>
+          <p:cNvPr id="13" name="Text 11"/>
+          <p:cNvSpPr/>
+          <p:nvPr/>
+        </p:nvSpPr>
+        <p:spPr>
+          <a:xfrm>
+            <a:off x="3474720" y="4023360"/>
+            <a:ext cx="1097280" cy="548640"/>
+          </a:xfrm>
+          <a:prstGeom prst="rect">
+            <a:avLst/>
+          </a:prstGeom>
+          <a:noFill/>
+          <a:ln/>
+        </p:spPr>
+        <p:txBody>
+          <a:bodyPr wrap="square" lIns="0" tIns="0" rIns="0" bIns="0" rtlCol="0" anchor="ctr"/>
+          <a:lstStyle/>
+          <a:p>
+            <a:pPr marL="0" indent="0">
+              <a:buNone/>
+            </a:pPr>
+            <a:r>
+              <a:rPr lang="ko-KR" altLang="en-US" b="1" dirty="0">
+                <a:solidFill>
+                  <a:srgbClr val="1F4899"/>
+                </a:solidFill>
+                <a:latin typeface="Calibri" pitchFamily="34" charset="0"/>
+                <a:ea typeface="맑은 고딕" pitchFamily="34" charset="-122"/>
+                <a:cs typeface="Calibri" pitchFamily="34" charset="-120"/>
+              </a:rPr>
+              <a:t>자기자본</a:t>
+            </a:r>
+            <a:endParaRPr lang="en-US" dirty="0">
+              <a:ea typeface="맑은 고딕"/>
+            </a:endParaRPr>
+          </a:p>
+          <a:p>
+            <a:pPr marL="0" indent="0">
+              <a:buNone/>
+            </a:pPr>
+            <a:r>
+              <a:rPr lang="ko-KR" altLang="en-US" b="1" dirty="0">
+                <a:solidFill>
+                  <a:srgbClr val="1F4899"/>
+                </a:solidFill>
+                <a:latin typeface="Calibri" pitchFamily="34" charset="0"/>
+                <a:ea typeface="맑은 고딕" pitchFamily="34" charset="-122"/>
+                <a:cs typeface="Calibri" pitchFamily="34" charset="-120"/>
+              </a:rPr>
+              <a:t>비용</a:t>
+            </a:r>
+            <a:endParaRPr lang="en-US" dirty="0">
+              <a:ea typeface="맑은 고딕"/>
+            </a:endParaRPr>
+          </a:p>
+        </p:txBody>
+      </p:sp>
+      <p:sp>
+        <p:nvSpPr>
+          <p:cNvPr id="14" name="Shape 12"/>
+          <p:cNvSpPr/>
+          <p:nvPr/>
+        </p:nvSpPr>
+        <p:spPr>
+          <a:xfrm>
+            <a:off x="5760720" y="2103120"/>
+            <a:ext cx="5715000" cy="3474720"/>
+          </a:xfrm>
+          <a:prstGeom prst="roundRect">
+            <a:avLst>
+              <a:gd name="adj" fmla="val 1429"/>
+            </a:avLst>
+          </a:prstGeom>
+          <a:solidFill>
+            <a:srgbClr val="EFF6FF"/>
+          </a:solidFill>
+          <a:ln w="15875">
+            <a:solidFill>
+              <a:srgbClr val="3B82F6"/>
+            </a:solidFill>
+            <a:prstDash val="solid"/>
+          </a:ln>
+        </p:spPr>
+        <p:txBody>
+          <a:bodyPr/>
+          <a:lstStyle/>
+          <a:p>
+            <a:endParaRPr lang="en-US" sz="2800">
+              <a:ea typeface="맑은 고딕"/>
+            </a:endParaRPr>
+          </a:p>
+        </p:txBody>
+      </p:sp>
+      <p:sp>
+        <p:nvSpPr>
+          <p:cNvPr id="15" name="Text 13"/>
+          <p:cNvSpPr/>
+          <p:nvPr/>
+        </p:nvSpPr>
+        <p:spPr>
+          <a:xfrm>
+            <a:off x="5888736" y="2194560"/>
+            <a:ext cx="5458968" cy="274320"/>
+          </a:xfrm>
+          <a:prstGeom prst="rect">
+            <a:avLst/>
+          </a:prstGeom>
+          <a:noFill/>
+          <a:ln/>
+        </p:spPr>
+        <p:txBody>
+          <a:bodyPr wrap="square" lIns="0" tIns="0" rIns="0" bIns="0" rtlCol="0" anchor="ctr"/>
+          <a:lstStyle/>
+          <a:p>
+            <a:pPr marL="0" indent="0" algn="l">
+              <a:buNone/>
+            </a:pPr>
+            <a:r>
+              <a:rPr lang="ko-KR" altLang="en-US" b="1" dirty="0">
+                <a:solidFill>
+                  <a:srgbClr val="1E40AF"/>
+                </a:solidFill>
+                <a:latin typeface="Calibri" pitchFamily="34" charset="0"/>
+                <a:ea typeface="맑은 고딕" pitchFamily="34" charset="-122"/>
+                <a:cs typeface="Calibri" pitchFamily="34" charset="-120"/>
+              </a:rPr>
+              <a:t>세 가지 구성요소</a:t>
+            </a:r>
+            <a:endParaRPr lang="en-US" dirty="0">
+              <a:ea typeface="맑은 고딕"/>
+            </a:endParaRPr>
+          </a:p>
+        </p:txBody>
+      </p:sp>
+      <p:sp>
+        <p:nvSpPr>
+          <p:cNvPr id="16" name="Text 14"/>
+          <p:cNvSpPr/>
+          <p:nvPr/>
+        </p:nvSpPr>
+        <p:spPr>
+          <a:xfrm>
+            <a:off x="5907024" y="2523744"/>
+            <a:ext cx="5422392" cy="2670048"/>
+          </a:xfrm>
+          <a:prstGeom prst="rect">
+            <a:avLst/>
+          </a:prstGeom>
+          <a:noFill/>
+          <a:ln/>
+        </p:spPr>
+        <p:txBody>
+          <a:bodyPr wrap="square" lIns="0" tIns="0" rIns="0" bIns="0" rtlCol="0" anchor="t"/>
+          <a:lstStyle/>
+          <a:p>
+            <a:pPr marL="285750" indent="-285750" algn="l">
+              <a:lnSpc>
+                <a:spcPct val="102000"/>
+              </a:lnSpc>
+              <a:spcAft>
+                <a:spcPts val="600"/>
+              </a:spcAft>
+              <a:buFont typeface="Wingdings" panose="05000000000000000000" pitchFamily="2" charset="2"/>
+              <a:buChar char="§"/>
+            </a:pPr>
+            <a:r>
+              <a:rPr lang="ko-KR" altLang="en-US" dirty="0">
+                <a:solidFill>
+                  <a:srgbClr val="374151"/>
+                </a:solidFill>
+                <a:latin typeface="Calibri" pitchFamily="34" charset="0"/>
+                <a:ea typeface="맑은 고딕" pitchFamily="34" charset="-122"/>
+                <a:cs typeface="Calibri" pitchFamily="34" charset="-120"/>
+              </a:rPr>
+              <a:t>무위험이자율(risk-free rate) — 국채수익률이며, 현금흐름의 기간에 만기를 맞춘다(3개월물이 아니라 10년물).  </a:t>
+            </a:r>
+            <a:r>
+              <a:rPr lang="ko-KR" altLang="en-US" b="1" dirty="0">
+                <a:solidFill>
+                  <a:srgbClr val="C00000"/>
+                </a:solidFill>
+                <a:latin typeface="Calibri" pitchFamily="34" charset="0"/>
+                <a:ea typeface="맑은 고딕" pitchFamily="34" charset="-122"/>
+                <a:cs typeface="Calibri" pitchFamily="34" charset="-120"/>
+              </a:rPr>
+              <a:t>4.6% (2026년 8월)</a:t>
+            </a:r>
+            <a:endParaRPr lang="en-US" b="1" dirty="0">
+              <a:solidFill>
+                <a:srgbClr val="C00000"/>
+              </a:solidFill>
+              <a:ea typeface="맑은 고딕"/>
+            </a:endParaRPr>
+          </a:p>
+          <a:p>
+            <a:pPr marL="285750" indent="-285750" algn="l">
+              <a:lnSpc>
+                <a:spcPct val="102000"/>
+              </a:lnSpc>
+              <a:spcAft>
+                <a:spcPts val="600"/>
+              </a:spcAft>
+              <a:buFont typeface="Wingdings" panose="05000000000000000000" pitchFamily="2" charset="2"/>
+              <a:buChar char="§"/>
+            </a:pPr>
+            <a:r>
+              <a:rPr lang="ko-KR" altLang="en-US" dirty="0">
+                <a:solidFill>
+                  <a:srgbClr val="374151"/>
+                </a:solidFill>
+                <a:latin typeface="Calibri" pitchFamily="34" charset="0"/>
+                <a:ea typeface="맑은 고딕" pitchFamily="34" charset="-122"/>
+                <a:cs typeface="Calibri" pitchFamily="34" charset="-120"/>
+              </a:rPr>
+              <a:t>β(베타) — 주식이 시장위험을 얼마나 증폭시키는가; </a:t>
+            </a:r>
+            <a:r>
+              <a:rPr lang="en-US" b="1" dirty="0">
+                <a:solidFill>
+                  <a:srgbClr val="C00000"/>
+                </a:solidFill>
+                <a:latin typeface="Calibri" pitchFamily="34" charset="0"/>
+                <a:ea typeface="Calibri" pitchFamily="34" charset="-122"/>
+                <a:cs typeface="Calibri" pitchFamily="34" charset="-120"/>
+              </a:rPr>
+              <a:t>β = 1 </a:t>
+            </a:r>
+            <a:r>
+              <a:rPr lang="ko-KR" altLang="en-US" dirty="0">
+                <a:solidFill>
+                  <a:srgbClr val="374151"/>
+                </a:solidFill>
+                <a:latin typeface="Calibri" pitchFamily="34" charset="0"/>
+                <a:ea typeface="맑은 고딕" pitchFamily="34" charset="-122"/>
+                <a:cs typeface="Calibri" pitchFamily="34" charset="-120"/>
+              </a:rPr>
+              <a:t>이면 시장 평균이다.</a:t>
+            </a:r>
+            <a:endParaRPr lang="en-US" dirty="0">
+              <a:ea typeface="맑은 고딕"/>
+            </a:endParaRPr>
+          </a:p>
+          <a:p>
+            <a:pPr marL="285750" indent="-285750" algn="l">
+              <a:lnSpc>
+                <a:spcPct val="102000"/>
+              </a:lnSpc>
+              <a:spcAft>
+                <a:spcPts val="600"/>
+              </a:spcAft>
+              <a:buFont typeface="Wingdings" panose="05000000000000000000" pitchFamily="2" charset="2"/>
+              <a:buChar char="§"/>
+            </a:pPr>
+            <a:r>
+              <a:rPr lang="ko-KR" altLang="en-US" dirty="0">
+                <a:solidFill>
+                  <a:srgbClr val="374151"/>
+                </a:solidFill>
+                <a:latin typeface="Calibri" pitchFamily="34" charset="0"/>
+                <a:ea typeface="맑은 고딕" pitchFamily="34" charset="-122"/>
+                <a:cs typeface="Calibri" pitchFamily="34" charset="-120"/>
+              </a:rPr>
+              <a:t>ERP — 채권 대신 주식을 보유하는 대가로 요구되는 추가수익률. (</a:t>
+            </a:r>
+            <a:r>
+              <a:rPr lang="ko-KR" altLang="en-US" b="1" dirty="0">
+                <a:solidFill>
+                  <a:srgbClr val="C00000"/>
+                </a:solidFill>
+                <a:latin typeface="Calibri" pitchFamily="34" charset="0"/>
+                <a:ea typeface="맑은 고딕" pitchFamily="34" charset="-122"/>
+                <a:cs typeface="Calibri" pitchFamily="34" charset="-120"/>
+              </a:rPr>
+              <a:t>약 5%</a:t>
+            </a:r>
+            <a:r>
+              <a:rPr lang="en-US" dirty="0">
+                <a:solidFill>
+                  <a:srgbClr val="374151"/>
+                </a:solidFill>
+                <a:latin typeface="Calibri" pitchFamily="34" charset="0"/>
+                <a:ea typeface="Calibri" pitchFamily="34" charset="-122"/>
+                <a:cs typeface="Calibri" pitchFamily="34" charset="-120"/>
+              </a:rPr>
+              <a:t>)</a:t>
+            </a:r>
+            <a:endParaRPr lang="en-US" dirty="0">
+              <a:ea typeface="맑은 고딕"/>
+            </a:endParaRPr>
+          </a:p>
+          <a:p>
+            <a:pPr marL="0" indent="0" algn="l">
+              <a:lnSpc>
+                <a:spcPct val="102000"/>
+              </a:lnSpc>
+              <a:buNone/>
+            </a:pPr>
+            <a:r>
+              <a:rPr lang="ko-KR" altLang="en-US" b="1" dirty="0">
+                <a:solidFill>
+                  <a:srgbClr val="1F4899"/>
+                </a:solidFill>
+                <a:latin typeface="Calibri" pitchFamily="34" charset="0"/>
+                <a:ea typeface="맑은 고딕" pitchFamily="34" charset="-122"/>
+                <a:cs typeface="Calibri" pitchFamily="34" charset="-120"/>
+              </a:rPr>
+              <a:t>요약하면:  </a:t>
+            </a:r>
+            <a:r>
+              <a:rPr lang="ko-KR" altLang="en-US" i="1" dirty="0">
+                <a:solidFill>
+                  <a:srgbClr val="374151"/>
+                </a:solidFill>
+                <a:latin typeface="Calibri" pitchFamily="34" charset="0"/>
+                <a:ea typeface="맑은 고딕" pitchFamily="34" charset="-122"/>
+                <a:cs typeface="Calibri" pitchFamily="34" charset="-120"/>
+              </a:rPr>
+              <a:t>기다림의 대가 + 걱정의 대가.</a:t>
+            </a:r>
+          </a:p>
+          <a:p>
+            <a:pPr marL="0" indent="0" algn="l">
+              <a:lnSpc>
+                <a:spcPct val="102000"/>
+              </a:lnSpc>
+              <a:buNone/>
+            </a:pPr>
+            <a:endParaRPr lang="en-US" i="1" dirty="0">
+              <a:solidFill>
+                <a:srgbClr val="374151"/>
+              </a:solidFill>
+              <a:latin typeface="Calibri" pitchFamily="34" charset="0"/>
+              <a:ea typeface="맑은 고딕" pitchFamily="34" charset="-122"/>
+              <a:cs typeface="Calibri" pitchFamily="34" charset="-120"/>
+            </a:endParaRPr>
+          </a:p>
+          <a:p>
+            <a:pPr marL="0" indent="0" algn="l">
+              <a:lnSpc>
+                <a:spcPct val="102000"/>
+              </a:lnSpc>
+              <a:buNone/>
+            </a:pPr>
+            <a:r>
+              <a:rPr lang="en-US" i="1" dirty="0">
+                <a:solidFill>
+                  <a:srgbClr val="374151"/>
+                </a:solidFill>
+                <a:latin typeface="Calibri" pitchFamily="34" charset="0"/>
+                <a:ea typeface="Calibri" pitchFamily="34" charset="-122"/>
+                <a:cs typeface="Calibri" pitchFamily="34" charset="-120"/>
+              </a:rPr>
+              <a:t> </a:t>
+            </a:r>
+            <a:r>
+              <a:rPr lang="ko-KR" altLang="en-US" b="1" i="1" dirty="0">
+                <a:solidFill>
+                  <a:srgbClr val="C00000"/>
+                </a:solidFill>
+                <a:latin typeface="Calibri" pitchFamily="34" charset="0"/>
+                <a:ea typeface="맑은 고딕" pitchFamily="34" charset="-122"/>
+                <a:cs typeface="Calibri" pitchFamily="34" charset="-120"/>
+              </a:rPr>
+              <a:t>자기자본비용 =  4.6% + 1×5% = 9.6%</a:t>
+            </a:r>
+          </a:p>
+          <a:p>
+            <a:pPr marL="0" indent="0" algn="l">
+              <a:lnSpc>
+                <a:spcPct val="102000"/>
+              </a:lnSpc>
+              <a:buNone/>
+            </a:pPr>
+            <a:endParaRPr lang="en-US" i="1" dirty="0">
+              <a:solidFill>
+                <a:srgbClr val="374151"/>
+              </a:solidFill>
+              <a:latin typeface="Calibri" pitchFamily="34" charset="0"/>
+              <a:ea typeface="맑은 고딕" pitchFamily="34" charset="-122"/>
+              <a:cs typeface="Calibri" pitchFamily="34" charset="-120"/>
+            </a:endParaRPr>
+          </a:p>
+          <a:p>
+            <a:pPr marL="0" indent="0" algn="l">
+              <a:lnSpc>
+                <a:spcPct val="102000"/>
+              </a:lnSpc>
+              <a:buNone/>
+            </a:pPr>
+            <a:endParaRPr lang="en-US" dirty="0">
+              <a:ea typeface="맑은 고딕"/>
+            </a:endParaRPr>
+          </a:p>
+        </p:txBody>
+      </p:sp>
+      <p:sp>
+        <p:nvSpPr>
+          <p:cNvPr id="17" name="Text 15"/>
+          <p:cNvSpPr/>
+          <p:nvPr/>
+        </p:nvSpPr>
+        <p:spPr>
+          <a:xfrm>
+            <a:off x="502920" y="5840730"/>
+            <a:ext cx="10972800" cy="365760"/>
+          </a:xfrm>
+          <a:prstGeom prst="rect">
+            <a:avLst/>
+          </a:prstGeom>
+          <a:noFill/>
+          <a:ln/>
+        </p:spPr>
+        <p:txBody>
+          <a:bodyPr wrap="square" rtlCol="0" anchor="ctr"/>
+          <a:lstStyle/>
+          <a:p>
+            <a:pPr marL="0" indent="0">
+              <a:buNone/>
+            </a:pPr>
+            <a:r>
+              <a:rPr lang="ko-KR" altLang="en-US" i="1" dirty="0">
+                <a:solidFill>
+                  <a:srgbClr val="6B7280"/>
+                </a:solidFill>
+                <a:latin typeface="Calibri" pitchFamily="34" charset="0"/>
+                <a:ea typeface="맑은 고딕" pitchFamily="34" charset="-122"/>
+                <a:cs typeface="Calibri" pitchFamily="34" charset="-120"/>
+              </a:rPr>
+              <a:t>기대주식수익률 = 시간에 대한 보상 + 위험에 대한 보상.</a:t>
+            </a:r>
+            <a:endParaRPr lang="en-US" dirty="0">
+              <a:ea typeface="맑은 고딕"/>
+            </a:endParaRPr>
+          </a:p>
+        </p:txBody>
+      </p:sp>
+    </p:spTree>
+  </p:cSld>
+  <p:clrMapOvr>
+    <a:masterClrMapping/>
+  </p:clrMapOvr>
+</p:sld>
+</file>
+
+<file path=ppt/slides/slide24.xml><?xml version="1.0" encoding="utf-8"?>
+<p:sld xmlns:a="http://schemas.openxmlformats.org/drawingml/2006/main" xmlns:r="http://schemas.openxmlformats.org/officeDocument/2006/relationships" xmlns:p="http://schemas.openxmlformats.org/presentationml/2006/main">
+  <p:cSld>
+    <p:spTree>
+      <p:nvGrpSpPr>
+        <p:cNvPr id="1" name=""/>
+        <p:cNvGrpSpPr/>
+        <p:nvPr/>
+      </p:nvGrpSpPr>
+      <p:grpSpPr>
+        <a:xfrm>
+          <a:off x="0" y="0"/>
+          <a:ext cx="0" cy="0"/>
+          <a:chOff x="0" y="0"/>
+          <a:chExt cx="0" cy="0"/>
+        </a:xfrm>
+      </p:grpSpPr>
+      <p:sp>
+        <p:nvSpPr>
+          <p:cNvPr id="2" name="Shape 0"/>
+          <p:cNvSpPr/>
+          <p:nvPr/>
+        </p:nvSpPr>
+        <p:spPr>
+          <a:xfrm>
+            <a:off x="11686032" y="0"/>
+            <a:ext cx="505663" cy="6858000"/>
+          </a:xfrm>
+          <a:prstGeom prst="rect">
+            <a:avLst/>
+          </a:prstGeom>
+          <a:solidFill>
+            <a:srgbClr val="1F4899"/>
+          </a:solidFill>
+          <a:ln/>
+        </p:spPr>
+        <p:txBody>
+          <a:bodyPr/>
+          <a:lstStyle/>
+          <a:p>
+            <a:endParaRPr lang="en-US">
+              <a:ea typeface="맑은 고딕"/>
+            </a:endParaRPr>
+          </a:p>
+        </p:txBody>
+      </p:sp>
+      <p:sp>
+        <p:nvSpPr>
+          <p:cNvPr id="3" name="Text 1"/>
+          <p:cNvSpPr/>
+          <p:nvPr/>
+        </p:nvSpPr>
+        <p:spPr>
+          <a:xfrm>
+            <a:off x="502920" y="274320"/>
+            <a:ext cx="10881360" cy="777240"/>
+          </a:xfrm>
+          <a:prstGeom prst="rect">
+            <a:avLst/>
+          </a:prstGeom>
+          <a:noFill/>
+          <a:ln/>
+        </p:spPr>
+        <p:txBody>
+          <a:bodyPr wrap="square" lIns="0" tIns="0" rIns="0" bIns="0" rtlCol="0" anchor="ctr"/>
+          <a:lstStyle/>
+          <a:p>
+            <a:pPr marL="0" indent="0" algn="l">
+              <a:buNone/>
+            </a:pPr>
+            <a:r>
+              <a:rPr lang="ko-KR" altLang="en-US" sz="2700" b="1" dirty="0">
+                <a:solidFill>
+                  <a:srgbClr val="1F4899"/>
+                </a:solidFill>
+                <a:latin typeface="Calibri" pitchFamily="34" charset="0"/>
+                <a:ea typeface="맑은 고딕" pitchFamily="34" charset="-122"/>
+                <a:cs typeface="Calibri" pitchFamily="34" charset="-120"/>
+              </a:rPr>
               <a:t>4.  시장위험프리미엄(Equity Risk Premium)과 자본비용</a:t>
             </a:r>
             <a:endParaRPr lang="en-US" sz="2700" dirty="0">
@@ -14524,7 +15475,7 @@
 </p:sld>
 </file>
 
-<file path=ppt/slides/slide24.xml><?xml version="1.0" encoding="utf-8"?>
+<file path=ppt/slides/slide25.xml><?xml version="1.0" encoding="utf-8"?>
 <p:sld xmlns:a="http://schemas.openxmlformats.org/drawingml/2006/main" xmlns:r="http://schemas.openxmlformats.org/officeDocument/2006/relationships" xmlns:p="http://schemas.openxmlformats.org/presentationml/2006/main">
   <p:cSld>
     <p:spTree>
@@ -14591,7 +15542,7 @@
 </p:sld>
 </file>
 
-<file path=ppt/slides/slide25.xml><?xml version="1.0" encoding="utf-8"?>
+<file path=ppt/slides/slide26.xml><?xml version="1.0" encoding="utf-8"?>
 <p:sld xmlns:a="http://schemas.openxmlformats.org/drawingml/2006/main" xmlns:r="http://schemas.openxmlformats.org/officeDocument/2006/relationships" xmlns:p="http://schemas.openxmlformats.org/presentationml/2006/main">
   <p:cSld>
     <p:spTree>
@@ -16514,7 +17465,7 @@
 </p:sld>
 </file>
 
-<file path=ppt/slides/slide26.xml><?xml version="1.0" encoding="utf-8"?>
+<file path=ppt/slides/slide27.xml><?xml version="1.0" encoding="utf-8"?>
 <p:sld xmlns:a="http://schemas.openxmlformats.org/drawingml/2006/main" xmlns:r="http://schemas.openxmlformats.org/officeDocument/2006/relationships" xmlns:p="http://schemas.openxmlformats.org/presentationml/2006/main">
   <p:cSld>
     <p:spTree>
@@ -17449,7 +18400,7 @@
 </p:sld>
 </file>
 
-<file path=ppt/slides/slide27.xml><?xml version="1.0" encoding="utf-8"?>
+<file path=ppt/slides/slide28.xml><?xml version="1.0" encoding="utf-8"?>
 <p:sld xmlns:a="http://schemas.openxmlformats.org/drawingml/2006/main" xmlns:r="http://schemas.openxmlformats.org/officeDocument/2006/relationships" xmlns:p="http://schemas.openxmlformats.org/presentationml/2006/main">
   <p:cSld>
     <p:spTree>
@@ -18525,7 +19476,7 @@
 </p:sld>
 </file>
 
-<file path=ppt/slides/slide28.xml><?xml version="1.0" encoding="utf-8"?>
+<file path=ppt/slides/slide29.xml><?xml version="1.0" encoding="utf-8"?>
 <p:sld xmlns:a="http://schemas.openxmlformats.org/drawingml/2006/main" xmlns:r="http://schemas.openxmlformats.org/officeDocument/2006/relationships" xmlns:p="http://schemas.openxmlformats.org/presentationml/2006/main">
   <p:cSld>
     <p:spTree>
@@ -19743,7 +20694,74 @@
 </p:sld>
 </file>
 
-<file path=ppt/slides/slide29.xml><?xml version="1.0" encoding="utf-8"?>
+<file path=ppt/slides/slide3.xml><?xml version="1.0" encoding="utf-8"?>
+<p:sld xmlns:a="http://schemas.openxmlformats.org/drawingml/2006/main" xmlns:r="http://schemas.openxmlformats.org/officeDocument/2006/relationships" xmlns:p="http://schemas.openxmlformats.org/presentationml/2006/main">
+  <p:cSld>
+    <p:spTree>
+      <p:nvGrpSpPr>
+        <p:cNvPr id="1" name="">
+          <a:extLst>
+            <a:ext uri="{FF2B5EF4-FFF2-40B4-BE49-F238E27FC236}">
+              <a16:creationId xmlns:a16="http://schemas.microsoft.com/office/drawing/2014/main" id="{40B431E1-DCCD-AECB-5CC6-A6A28CC98607}"/>
+            </a:ext>
+          </a:extLst>
+        </p:cNvPr>
+        <p:cNvGrpSpPr/>
+        <p:nvPr/>
+      </p:nvGrpSpPr>
+      <p:grpSpPr>
+        <a:xfrm>
+          <a:off x="0" y="0"/>
+          <a:ext cx="0" cy="0"/>
+          <a:chOff x="0" y="0"/>
+          <a:chExt cx="0" cy="0"/>
+        </a:xfrm>
+      </p:grpSpPr>
+      <p:sp>
+        <p:nvSpPr>
+          <p:cNvPr id="2" name="Title 1">
+            <a:extLst>
+              <a:ext uri="{FF2B5EF4-FFF2-40B4-BE49-F238E27FC236}">
+                <a16:creationId xmlns:a16="http://schemas.microsoft.com/office/drawing/2014/main" id="{A9A70150-E3CD-D6F5-4134-EB4ADB857847}"/>
+              </a:ext>
+            </a:extLst>
+          </p:cNvPr>
+          <p:cNvSpPr>
+            <a:spLocks noGrp="1"/>
+          </p:cNvSpPr>
+          <p:nvPr>
+            <p:ph type="title"/>
+          </p:nvPr>
+        </p:nvSpPr>
+        <p:spPr/>
+        <p:txBody>
+          <a:bodyPr/>
+          <a:lstStyle/>
+          <a:p>
+            <a:r>
+              <a:rPr lang="ko-KR" altLang="en-US" dirty="0">
+                <a:latin typeface="+mn-lt"/>
+                <a:ea typeface="맑은 고딕"/>
+              </a:rPr>
+              <a:t>1. 화폐의 시간가치(The Time Value of Money)</a:t>
+            </a:r>
+          </a:p>
+        </p:txBody>
+      </p:sp>
+    </p:spTree>
+    <p:extLst>
+      <p:ext uri="{BB962C8B-B14F-4D97-AF65-F5344CB8AC3E}">
+        <p14:creationId xmlns:p14="http://schemas.microsoft.com/office/powerpoint/2010/main" val="4098012946"/>
+      </p:ext>
+    </p:extLst>
+  </p:cSld>
+  <p:clrMapOvr>
+    <a:masterClrMapping/>
+  </p:clrMapOvr>
+</p:sld>
+</file>
+
+<file path=ppt/slides/slide30.xml><?xml version="1.0" encoding="utf-8"?>
 <p:sld xmlns:a="http://schemas.openxmlformats.org/drawingml/2006/main" xmlns:r="http://schemas.openxmlformats.org/officeDocument/2006/relationships" xmlns:p="http://schemas.openxmlformats.org/presentationml/2006/main">
   <p:cSld>
     <p:spTree>
@@ -20724,74 +21742,7 @@
 </p:sld>
 </file>
 
-<file path=ppt/slides/slide3.xml><?xml version="1.0" encoding="utf-8"?>
-<p:sld xmlns:a="http://schemas.openxmlformats.org/drawingml/2006/main" xmlns:r="http://schemas.openxmlformats.org/officeDocument/2006/relationships" xmlns:p="http://schemas.openxmlformats.org/presentationml/2006/main">
-  <p:cSld>
-    <p:spTree>
-      <p:nvGrpSpPr>
-        <p:cNvPr id="1" name="">
-          <a:extLst>
-            <a:ext uri="{FF2B5EF4-FFF2-40B4-BE49-F238E27FC236}">
-              <a16:creationId xmlns:a16="http://schemas.microsoft.com/office/drawing/2014/main" id="{40B431E1-DCCD-AECB-5CC6-A6A28CC98607}"/>
-            </a:ext>
-          </a:extLst>
-        </p:cNvPr>
-        <p:cNvGrpSpPr/>
-        <p:nvPr/>
-      </p:nvGrpSpPr>
-      <p:grpSpPr>
-        <a:xfrm>
-          <a:off x="0" y="0"/>
-          <a:ext cx="0" cy="0"/>
-          <a:chOff x="0" y="0"/>
-          <a:chExt cx="0" cy="0"/>
-        </a:xfrm>
-      </p:grpSpPr>
-      <p:sp>
-        <p:nvSpPr>
-          <p:cNvPr id="2" name="Title 1">
-            <a:extLst>
-              <a:ext uri="{FF2B5EF4-FFF2-40B4-BE49-F238E27FC236}">
-                <a16:creationId xmlns:a16="http://schemas.microsoft.com/office/drawing/2014/main" id="{A9A70150-E3CD-D6F5-4134-EB4ADB857847}"/>
-              </a:ext>
-            </a:extLst>
-          </p:cNvPr>
-          <p:cNvSpPr>
-            <a:spLocks noGrp="1"/>
-          </p:cNvSpPr>
-          <p:nvPr>
-            <p:ph type="title"/>
-          </p:nvPr>
-        </p:nvSpPr>
-        <p:spPr/>
-        <p:txBody>
-          <a:bodyPr/>
-          <a:lstStyle/>
-          <a:p>
-            <a:r>
-              <a:rPr lang="ko-KR" altLang="en-US" dirty="0">
-                <a:latin typeface="+mn-lt"/>
-                <a:ea typeface="맑은 고딕"/>
-              </a:rPr>
-              <a:t>1. 화폐의 시간가치(The Time Value of Money)</a:t>
-            </a:r>
-          </a:p>
-        </p:txBody>
-      </p:sp>
-    </p:spTree>
-    <p:extLst>
-      <p:ext uri="{BB962C8B-B14F-4D97-AF65-F5344CB8AC3E}">
-        <p14:creationId xmlns:p14="http://schemas.microsoft.com/office/powerpoint/2010/main" val="4098012946"/>
-      </p:ext>
-    </p:extLst>
-  </p:cSld>
-  <p:clrMapOvr>
-    <a:masterClrMapping/>
-  </p:clrMapOvr>
-</p:sld>
-</file>
-
-<file path=ppt/slides/slide30.xml><?xml version="1.0" encoding="utf-8"?>
+<file path=ppt/slides/slide31.xml><?xml version="1.0" encoding="utf-8"?>
 <p:sld xmlns:a="http://schemas.openxmlformats.org/drawingml/2006/main" xmlns:r="http://schemas.openxmlformats.org/officeDocument/2006/relationships" xmlns:p="http://schemas.openxmlformats.org/presentationml/2006/main">
   <p:cSld>
     <p:spTree>
@@ -20876,7 +21827,7 @@
 </p:sld>
 </file>
 
-<file path=ppt/slides/slide31.xml><?xml version="1.0" encoding="utf-8"?>
+<file path=ppt/slides/slide32.xml><?xml version="1.0" encoding="utf-8"?>
 <p:sld xmlns:a="http://schemas.openxmlformats.org/drawingml/2006/main" xmlns:r="http://schemas.openxmlformats.org/officeDocument/2006/relationships" xmlns:p="http://schemas.openxmlformats.org/presentationml/2006/main">
   <p:cSld>
     <p:spTree>
@@ -21683,7 +22634,7 @@
 </p:sld>
 </file>
 
-<file path=ppt/slides/slide32.xml><?xml version="1.0" encoding="utf-8"?>
+<file path=ppt/slides/slide33.xml><?xml version="1.0" encoding="utf-8"?>
 <p:sld xmlns:a="http://schemas.openxmlformats.org/drawingml/2006/main" xmlns:r="http://schemas.openxmlformats.org/officeDocument/2006/relationships" xmlns:p="http://schemas.openxmlformats.org/presentationml/2006/main">
   <p:cSld>
     <p:spTree>
@@ -22647,6 +23598,1155 @@
   <p:cSld>
     <p:spTree>
       <p:nvGrpSpPr>
+        <p:cNvPr id="1" name=""/>
+        <p:cNvGrpSpPr/>
+        <p:nvPr/>
+      </p:nvGrpSpPr>
+      <p:grpSpPr>
+        <a:xfrm>
+          <a:off x="0" y="0"/>
+          <a:ext cx="0" cy="0"/>
+          <a:chOff x="0" y="0"/>
+          <a:chExt cx="0" cy="0"/>
+        </a:xfrm>
+      </p:grpSpPr>
+      <p:sp>
+        <p:nvSpPr>
+          <p:cNvPr id="2" name="Rectangle 1"/>
+          <p:cNvSpPr/>
+          <p:nvPr/>
+        </p:nvSpPr>
+        <p:spPr>
+          <a:xfrm>
+            <a:off x="11686032" y="0"/>
+            <a:ext cx="505663" cy="6858000"/>
+          </a:xfrm>
+          <a:prstGeom prst="rect">
+            <a:avLst/>
+          </a:prstGeom>
+          <a:solidFill>
+            <a:srgbClr val="1F4899"/>
+          </a:solidFill>
+          <a:ln>
+            <a:noFill/>
+          </a:ln>
+        </p:spPr>
+        <p:txBody>
+          <a:bodyPr wrap="square" rtlCol="0" anchor="ctr"/>
+          <a:lstStyle/>
+          <a:p>
+            <a:pPr algn="ctr"/>
+            <a:endParaRPr/>
+          </a:p>
+        </p:txBody>
+      </p:sp>
+      <p:sp>
+        <p:nvSpPr>
+          <p:cNvPr id="3" name="Rectangle 2"/>
+          <p:cNvSpPr/>
+          <p:nvPr/>
+        </p:nvSpPr>
+        <p:spPr>
+          <a:xfrm>
+            <a:off x="11686032" y="6446520"/>
+            <a:ext cx="505663" cy="320040"/>
+          </a:xfrm>
+          <a:prstGeom prst="rect">
+            <a:avLst/>
+          </a:prstGeom>
+          <a:noFill/>
+          <a:ln>
+            <a:noFill/>
+          </a:ln>
+        </p:spPr>
+        <p:txBody>
+          <a:bodyPr wrap="square" lIns="0" tIns="0" rIns="0" bIns="0" rtlCol="0" anchor="t"/>
+          <a:lstStyle/>
+          <a:p>
+            <a:pPr algn="ctr"/>
+            <a:r>
+              <a:rPr sz="1100" b="0" i="0">
+                <a:solidFill>
+                  <a:srgbClr val="FFFFFF"/>
+                </a:solidFill>
+                <a:latin typeface="Calibri"/>
+              </a:rPr>
+              <a:t>1</a:t>
+            </a:r>
+          </a:p>
+        </p:txBody>
+      </p:sp>
+      <p:sp>
+        <p:nvSpPr>
+          <p:cNvPr id="4" name="Rectangle 3"/>
+          <p:cNvSpPr/>
+          <p:nvPr/>
+        </p:nvSpPr>
+        <p:spPr>
+          <a:xfrm>
+            <a:off x="502920" y="18288"/>
+            <a:ext cx="10881360" cy="256032"/>
+          </a:xfrm>
+          <a:prstGeom prst="rect">
+            <a:avLst/>
+          </a:prstGeom>
+          <a:noFill/>
+          <a:ln>
+            <a:noFill/>
+          </a:ln>
+        </p:spPr>
+        <p:txBody>
+          <a:bodyPr wrap="square" lIns="0" tIns="0" rIns="0" bIns="0" rtlCol="0" anchor="t"/>
+          <a:lstStyle/>
+          <a:p>
+            <a:pPr algn="l"/>
+            <a:r>
+              <a:rPr sz="1100" b="1" i="0">
+                <a:solidFill>
+                  <a:srgbClr val="6B7280"/>
+                </a:solidFill>
+                <a:latin typeface="Calibri"/>
+              </a:rPr>
+              <a:t>TOPIC 1  ·  화폐의 시간가치</a:t>
+            </a:r>
+          </a:p>
+        </p:txBody>
+      </p:sp>
+      <p:sp>
+        <p:nvSpPr>
+          <p:cNvPr id="5" name="Rectangle 4"/>
+          <p:cNvSpPr/>
+          <p:nvPr/>
+        </p:nvSpPr>
+        <p:spPr>
+          <a:xfrm>
+            <a:off x="502920" y="274320"/>
+            <a:ext cx="10881360" cy="777240"/>
+          </a:xfrm>
+          <a:prstGeom prst="rect">
+            <a:avLst/>
+          </a:prstGeom>
+          <a:noFill/>
+          <a:ln>
+            <a:noFill/>
+          </a:ln>
+        </p:spPr>
+        <p:txBody>
+          <a:bodyPr wrap="square" lIns="0" tIns="0" rIns="0" bIns="0" rtlCol="0" anchor="t"/>
+          <a:lstStyle/>
+          <a:p>
+            <a:pPr algn="l"/>
+            <a:r>
+              <a:rPr sz="2700" b="1" i="0">
+                <a:solidFill>
+                  <a:srgbClr val="1F4899"/>
+                </a:solidFill>
+                <a:latin typeface="Calibri"/>
+              </a:rPr>
+              <a:t>복리 — 세계의 8번째 불가사의</a:t>
+            </a:r>
+          </a:p>
+        </p:txBody>
+      </p:sp>
+      <p:sp>
+        <p:nvSpPr>
+          <p:cNvPr id="6" name="Rounded Rectangle 5"/>
+          <p:cNvSpPr/>
+          <p:nvPr/>
+        </p:nvSpPr>
+        <p:spPr>
+          <a:xfrm>
+            <a:off x="502920" y="1188720"/>
+            <a:ext cx="6217920" cy="2834640"/>
+          </a:xfrm>
+          <a:prstGeom prst="roundRect">
+            <a:avLst/>
+          </a:prstGeom>
+          <a:solidFill>
+            <a:srgbClr val="EEF2FB"/>
+          </a:solidFill>
+          <a:ln w="15875">
+            <a:solidFill>
+              <a:srgbClr val="1F4899"/>
+            </a:solidFill>
+          </a:ln>
+        </p:spPr>
+        <p:txBody>
+          <a:bodyPr wrap="square" rtlCol="0" anchor="ctr"/>
+          <a:lstStyle/>
+          <a:p>
+            <a:pPr algn="ctr"/>
+            <a:endParaRPr/>
+          </a:p>
+        </p:txBody>
+      </p:sp>
+      <p:sp>
+        <p:nvSpPr>
+          <p:cNvPr id="7" name="Rectangle 6"/>
+          <p:cNvSpPr/>
+          <p:nvPr/>
+        </p:nvSpPr>
+        <p:spPr>
+          <a:xfrm>
+            <a:off x="658368" y="1280160"/>
+            <a:ext cx="640080" cy="640080"/>
+          </a:xfrm>
+          <a:prstGeom prst="rect">
+            <a:avLst/>
+          </a:prstGeom>
+          <a:noFill/>
+          <a:ln>
+            <a:noFill/>
+          </a:ln>
+        </p:spPr>
+        <p:txBody>
+          <a:bodyPr wrap="square" lIns="0" tIns="0" rIns="0" bIns="0" rtlCol="0" anchor="t"/>
+          <a:lstStyle/>
+          <a:p>
+            <a:pPr algn="l"/>
+            <a:r>
+              <a:rPr sz="6000" b="1" i="0">
+                <a:solidFill>
+                  <a:srgbClr val="1F4899"/>
+                </a:solidFill>
+                <a:latin typeface="Georgia"/>
+              </a:rPr>
+              <a:t>“</a:t>
+            </a:r>
+          </a:p>
+        </p:txBody>
+      </p:sp>
+      <p:sp>
+        <p:nvSpPr>
+          <p:cNvPr id="8" name="Rectangle 7"/>
+          <p:cNvSpPr/>
+          <p:nvPr/>
+        </p:nvSpPr>
+        <p:spPr>
+          <a:xfrm>
+            <a:off x="1143000" y="1463040"/>
+            <a:ext cx="5303520" cy="1188720"/>
+          </a:xfrm>
+          <a:prstGeom prst="rect">
+            <a:avLst/>
+          </a:prstGeom>
+          <a:noFill/>
+          <a:ln>
+            <a:noFill/>
+          </a:ln>
+        </p:spPr>
+        <p:txBody>
+          <a:bodyPr wrap="square" lIns="0" tIns="0" rIns="0" bIns="0" rtlCol="0" anchor="t"/>
+          <a:lstStyle/>
+          <a:p>
+            <a:pPr algn="l">
+              <a:spcAft>
+                <a:spcPts val="500"/>
+              </a:spcAft>
+            </a:pPr>
+            <a:r>
+              <a:rPr sz="1900" b="1" i="0">
+                <a:solidFill>
+                  <a:srgbClr val="16346B"/>
+                </a:solidFill>
+                <a:latin typeface="Calibri"/>
+              </a:rPr>
+              <a:t>복리는 세계의 8번째 불가사의다.</a:t>
+            </a:r>
+          </a:p>
+          <a:p>
+            <a:pPr algn="l">
+              <a:spcAft>
+                <a:spcPts val="500"/>
+              </a:spcAft>
+            </a:pPr>
+            <a:r>
+              <a:rPr sz="1900" b="1" i="0">
+                <a:solidFill>
+                  <a:srgbClr val="16346B"/>
+                </a:solidFill>
+                <a:latin typeface="Calibri"/>
+              </a:rPr>
+              <a:t>이를 이해하는 사람은 돈을 벌고,</a:t>
+            </a:r>
+          </a:p>
+          <a:p>
+            <a:pPr algn="l">
+              <a:spcAft>
+                <a:spcPts val="500"/>
+              </a:spcAft>
+            </a:pPr>
+            <a:r>
+              <a:rPr sz="1900" b="1" i="0">
+                <a:solidFill>
+                  <a:srgbClr val="16346B"/>
+                </a:solidFill>
+                <a:latin typeface="Calibri"/>
+              </a:rPr>
+              <a:t>이해하지 못하는 사람은 대가를 치를 것이다.</a:t>
+            </a:r>
+          </a:p>
+        </p:txBody>
+      </p:sp>
+      <p:sp>
+        <p:nvSpPr>
+          <p:cNvPr id="9" name="Rectangle 8"/>
+          <p:cNvSpPr/>
+          <p:nvPr/>
+        </p:nvSpPr>
+        <p:spPr>
+          <a:xfrm>
+            <a:off x="1143000" y="2834640"/>
+            <a:ext cx="5303520" cy="914400"/>
+          </a:xfrm>
+          <a:prstGeom prst="rect">
+            <a:avLst/>
+          </a:prstGeom>
+          <a:noFill/>
+          <a:ln>
+            <a:noFill/>
+          </a:ln>
+        </p:spPr>
+        <p:txBody>
+          <a:bodyPr wrap="square" lIns="0" tIns="0" rIns="0" bIns="0" rtlCol="0" anchor="t"/>
+          <a:lstStyle/>
+          <a:p>
+            <a:pPr algn="l">
+              <a:spcAft>
+                <a:spcPts val="200"/>
+              </a:spcAft>
+            </a:pPr>
+            <a:r>
+              <a:rPr sz="1200" b="0" i="1" dirty="0">
+                <a:solidFill>
+                  <a:srgbClr val="6B7280"/>
+                </a:solidFill>
+                <a:latin typeface="Calibri"/>
+              </a:rPr>
+              <a:t>“</a:t>
+            </a:r>
+            <a:r>
+              <a:rPr sz="1600" b="0" i="1" dirty="0">
+                <a:solidFill>
+                  <a:srgbClr val="6B7280"/>
+                </a:solidFill>
+                <a:latin typeface="Calibri"/>
+              </a:rPr>
+              <a:t>Compound interest is the eighth wonder of the world.</a:t>
+            </a:r>
+          </a:p>
+          <a:p>
+            <a:pPr algn="l">
+              <a:spcAft>
+                <a:spcPts val="200"/>
+              </a:spcAft>
+            </a:pPr>
+            <a:r>
+              <a:rPr sz="1600" b="0" i="1" dirty="0">
+                <a:solidFill>
+                  <a:srgbClr val="6B7280"/>
+                </a:solidFill>
+                <a:latin typeface="Calibri"/>
+              </a:rPr>
+              <a:t>He who understands it, earns it — he who doesn’t, pays it.”</a:t>
+            </a:r>
+          </a:p>
+        </p:txBody>
+      </p:sp>
+      <p:sp>
+        <p:nvSpPr>
+          <p:cNvPr id="10" name="Rectangle 9"/>
+          <p:cNvSpPr/>
+          <p:nvPr/>
+        </p:nvSpPr>
+        <p:spPr>
+          <a:xfrm>
+            <a:off x="1143000" y="3474720"/>
+            <a:ext cx="5303520" cy="320040"/>
+          </a:xfrm>
+          <a:prstGeom prst="rect">
+            <a:avLst/>
+          </a:prstGeom>
+          <a:noFill/>
+          <a:ln>
+            <a:noFill/>
+          </a:ln>
+        </p:spPr>
+        <p:txBody>
+          <a:bodyPr wrap="square" lIns="0" tIns="0" rIns="0" bIns="0" rtlCol="0" anchor="t"/>
+          <a:lstStyle/>
+          <a:p>
+            <a:pPr algn="l"/>
+            <a:r>
+              <a:rPr sz="1300" b="1" i="0">
+                <a:solidFill>
+                  <a:srgbClr val="1F4899"/>
+                </a:solidFill>
+                <a:latin typeface="Calibri"/>
+              </a:rPr>
+              <a:t>— Albert Einstein</a:t>
+            </a:r>
+          </a:p>
+        </p:txBody>
+      </p:sp>
+      <p:sp>
+        <p:nvSpPr>
+          <p:cNvPr id="11" name="Rounded Rectangle 10"/>
+          <p:cNvSpPr/>
+          <p:nvPr/>
+        </p:nvSpPr>
+        <p:spPr>
+          <a:xfrm>
+            <a:off x="502920" y="4206240"/>
+            <a:ext cx="6217920" cy="1737360"/>
+          </a:xfrm>
+          <a:prstGeom prst="roundRect">
+            <a:avLst/>
+          </a:prstGeom>
+          <a:solidFill>
+            <a:srgbClr val="FEF3C7"/>
+          </a:solidFill>
+          <a:ln w="15875">
+            <a:solidFill>
+              <a:srgbClr val="F59E0B"/>
+            </a:solidFill>
+          </a:ln>
+        </p:spPr>
+        <p:txBody>
+          <a:bodyPr wrap="square" rtlCol="0" anchor="ctr"/>
+          <a:lstStyle/>
+          <a:p>
+            <a:pPr algn="ctr"/>
+            <a:endParaRPr sz="2000"/>
+          </a:p>
+        </p:txBody>
+      </p:sp>
+      <p:sp>
+        <p:nvSpPr>
+          <p:cNvPr id="12" name="Rectangle 11"/>
+          <p:cNvSpPr/>
+          <p:nvPr/>
+        </p:nvSpPr>
+        <p:spPr>
+          <a:xfrm>
+            <a:off x="731520" y="4343400"/>
+            <a:ext cx="5760720" cy="274320"/>
+          </a:xfrm>
+          <a:prstGeom prst="rect">
+            <a:avLst/>
+          </a:prstGeom>
+          <a:noFill/>
+          <a:ln>
+            <a:noFill/>
+          </a:ln>
+        </p:spPr>
+        <p:txBody>
+          <a:bodyPr wrap="square" lIns="0" tIns="0" rIns="0" bIns="0" rtlCol="0" anchor="t"/>
+          <a:lstStyle/>
+          <a:p>
+            <a:pPr algn="l"/>
+            <a:r>
+              <a:rPr sz="1400" b="1" i="0">
+                <a:solidFill>
+                  <a:srgbClr val="925E09"/>
+                </a:solidFill>
+                <a:latin typeface="Calibri"/>
+              </a:rPr>
+              <a:t>매년 1,000만원씩 30년 저축하면 — 원금은 3억원</a:t>
+            </a:r>
+          </a:p>
+        </p:txBody>
+      </p:sp>
+      <p:sp>
+        <p:nvSpPr>
+          <p:cNvPr id="13" name="Rectangle 12"/>
+          <p:cNvSpPr/>
+          <p:nvPr/>
+        </p:nvSpPr>
+        <p:spPr>
+          <a:xfrm>
+            <a:off x="731520" y="4672584"/>
+            <a:ext cx="5760720" cy="1097280"/>
+          </a:xfrm>
+          <a:prstGeom prst="rect">
+            <a:avLst/>
+          </a:prstGeom>
+          <a:noFill/>
+          <a:ln>
+            <a:noFill/>
+          </a:ln>
+        </p:spPr>
+        <p:txBody>
+          <a:bodyPr wrap="square" lIns="0" tIns="0" rIns="0" bIns="0" rtlCol="0" anchor="t"/>
+          <a:lstStyle/>
+          <a:p>
+            <a:pPr algn="l">
+              <a:spcAft>
+                <a:spcPts val="400"/>
+              </a:spcAft>
+            </a:pPr>
+            <a:r>
+              <a:rPr sz="1400" b="0" i="0" dirty="0" err="1">
+                <a:solidFill>
+                  <a:srgbClr val="374151"/>
+                </a:solidFill>
+                <a:latin typeface="Calibri"/>
+              </a:rPr>
+              <a:t>단리</a:t>
+            </a:r>
+            <a:r>
+              <a:rPr sz="1400" b="0" i="0" dirty="0">
+                <a:solidFill>
+                  <a:srgbClr val="374151"/>
+                </a:solidFill>
+                <a:latin typeface="Calibri"/>
+              </a:rPr>
+              <a:t>(simple interest) 5억 6,100만원  ·  </a:t>
+            </a:r>
+            <a:r>
+              <a:rPr sz="1400" b="0" i="0" dirty="0" err="1">
+                <a:solidFill>
+                  <a:srgbClr val="374151"/>
+                </a:solidFill>
+                <a:latin typeface="Calibri"/>
+              </a:rPr>
+              <a:t>복리</a:t>
+            </a:r>
+            <a:r>
+              <a:rPr sz="1400" b="0" i="0" dirty="0">
+                <a:solidFill>
+                  <a:srgbClr val="374151"/>
+                </a:solidFill>
+                <a:latin typeface="Calibri"/>
+              </a:rPr>
+              <a:t>(compound interest) 7억 9,058만원</a:t>
+            </a:r>
+          </a:p>
+          <a:p>
+            <a:pPr algn="l">
+              <a:spcAft>
+                <a:spcPts val="400"/>
+              </a:spcAft>
+            </a:pPr>
+            <a:r>
+              <a:rPr sz="1400" b="0" i="0" dirty="0" err="1">
+                <a:solidFill>
+                  <a:srgbClr val="374151"/>
+                </a:solidFill>
+                <a:latin typeface="Calibri"/>
+              </a:rPr>
+              <a:t>같은</a:t>
+            </a:r>
+            <a:r>
+              <a:rPr sz="1400" b="0" i="0" dirty="0">
+                <a:solidFill>
+                  <a:srgbClr val="374151"/>
+                </a:solidFill>
+                <a:latin typeface="Calibri"/>
+              </a:rPr>
+              <a:t> 돈, </a:t>
+            </a:r>
+            <a:r>
+              <a:rPr sz="1400" b="0" i="0" dirty="0" err="1">
+                <a:solidFill>
+                  <a:srgbClr val="374151"/>
+                </a:solidFill>
+                <a:latin typeface="Calibri"/>
+              </a:rPr>
+              <a:t>같은</a:t>
+            </a:r>
+            <a:r>
+              <a:rPr sz="1400" b="0" i="0" dirty="0">
+                <a:solidFill>
+                  <a:srgbClr val="374151"/>
+                </a:solidFill>
+                <a:latin typeface="Calibri"/>
+              </a:rPr>
+              <a:t> 6% </a:t>
+            </a:r>
+            <a:r>
+              <a:rPr sz="1400" b="0" i="0" dirty="0" err="1">
+                <a:solidFill>
+                  <a:srgbClr val="374151"/>
+                </a:solidFill>
+                <a:latin typeface="Calibri"/>
+              </a:rPr>
+              <a:t>인데</a:t>
+            </a:r>
+            <a:r>
+              <a:rPr sz="1400" b="0" i="0" dirty="0">
+                <a:solidFill>
+                  <a:srgbClr val="374151"/>
+                </a:solidFill>
+                <a:latin typeface="Calibri"/>
+              </a:rPr>
+              <a:t> </a:t>
+            </a:r>
+            <a:r>
+              <a:rPr sz="1400" b="1" i="0" dirty="0">
+                <a:solidFill>
+                  <a:srgbClr val="925E09"/>
+                </a:solidFill>
+                <a:latin typeface="Calibri"/>
+              </a:rPr>
+              <a:t>2억 2,958만원</a:t>
+            </a:r>
+            <a:r>
+              <a:rPr sz="1400" b="0" i="0" dirty="0">
+                <a:solidFill>
+                  <a:srgbClr val="374151"/>
+                </a:solidFill>
+                <a:latin typeface="Calibri"/>
+              </a:rPr>
+              <a:t> 이 </a:t>
+            </a:r>
+            <a:r>
+              <a:rPr sz="1400" b="0" i="0" dirty="0" err="1">
+                <a:solidFill>
+                  <a:srgbClr val="374151"/>
+                </a:solidFill>
+                <a:latin typeface="Calibri"/>
+              </a:rPr>
+              <a:t>갈립니다</a:t>
+            </a:r>
+            <a:r>
+              <a:rPr sz="1400" b="0" i="0" dirty="0">
+                <a:solidFill>
+                  <a:srgbClr val="374151"/>
+                </a:solidFill>
+                <a:latin typeface="Calibri"/>
+              </a:rPr>
+              <a:t> — </a:t>
+            </a:r>
+            <a:r>
+              <a:rPr sz="1400" b="0" i="0" dirty="0" err="1">
+                <a:solidFill>
+                  <a:srgbClr val="374151"/>
+                </a:solidFill>
+                <a:latin typeface="Calibri"/>
+              </a:rPr>
+              <a:t>이자에</a:t>
+            </a:r>
+            <a:r>
+              <a:rPr sz="1400" b="0" i="0" dirty="0">
+                <a:solidFill>
+                  <a:srgbClr val="374151"/>
+                </a:solidFill>
+                <a:latin typeface="Calibri"/>
+              </a:rPr>
+              <a:t> </a:t>
+            </a:r>
+            <a:r>
+              <a:rPr sz="1400" b="0" i="0" dirty="0" err="1">
+                <a:solidFill>
+                  <a:srgbClr val="374151"/>
+                </a:solidFill>
+                <a:latin typeface="Calibri"/>
+              </a:rPr>
+              <a:t>다시</a:t>
+            </a:r>
+            <a:r>
+              <a:rPr sz="1400" b="0" i="0" dirty="0">
+                <a:solidFill>
+                  <a:srgbClr val="374151"/>
+                </a:solidFill>
+                <a:latin typeface="Calibri"/>
+              </a:rPr>
+              <a:t> </a:t>
+            </a:r>
+            <a:r>
+              <a:rPr sz="1400" b="0" i="0" dirty="0" err="1">
+                <a:solidFill>
+                  <a:srgbClr val="374151"/>
+                </a:solidFill>
+                <a:latin typeface="Calibri"/>
+              </a:rPr>
+              <a:t>이자가</a:t>
+            </a:r>
+            <a:r>
+              <a:rPr sz="1400" b="0" i="0" dirty="0">
+                <a:solidFill>
+                  <a:srgbClr val="374151"/>
+                </a:solidFill>
+                <a:latin typeface="Calibri"/>
+              </a:rPr>
+              <a:t> </a:t>
+            </a:r>
+            <a:r>
+              <a:rPr sz="1400" b="0" i="0" dirty="0" err="1">
+                <a:solidFill>
+                  <a:srgbClr val="374151"/>
+                </a:solidFill>
+                <a:latin typeface="Calibri"/>
+              </a:rPr>
+              <a:t>붙기</a:t>
+            </a:r>
+            <a:r>
+              <a:rPr sz="1400" b="0" i="0" dirty="0">
+                <a:solidFill>
+                  <a:srgbClr val="374151"/>
+                </a:solidFill>
+                <a:latin typeface="Calibri"/>
+              </a:rPr>
+              <a:t> </a:t>
+            </a:r>
+            <a:r>
+              <a:rPr sz="1400" b="0" i="0" dirty="0" err="1">
+                <a:solidFill>
+                  <a:srgbClr val="374151"/>
+                </a:solidFill>
+                <a:latin typeface="Calibri"/>
+              </a:rPr>
+              <a:t>때문입니다</a:t>
+            </a:r>
+            <a:r>
+              <a:rPr sz="1400" b="0" i="0" dirty="0">
+                <a:solidFill>
+                  <a:srgbClr val="374151"/>
+                </a:solidFill>
+                <a:latin typeface="Calibri"/>
+              </a:rPr>
+              <a:t>.</a:t>
+            </a:r>
+          </a:p>
+        </p:txBody>
+      </p:sp>
+      <p:pic>
+        <p:nvPicPr>
+          <p:cNvPr id="14" name="Picture 13" descr="compound.png"/>
+          <p:cNvPicPr>
+            <a:picLocks noChangeAspect="1"/>
+          </p:cNvPicPr>
+          <p:nvPr/>
+        </p:nvPicPr>
+        <p:blipFill>
+          <a:blip r:embed="rId2"/>
+          <a:stretch>
+            <a:fillRect/>
+          </a:stretch>
+        </p:blipFill>
+        <p:spPr>
+          <a:xfrm>
+            <a:off x="6858000" y="1188720"/>
+            <a:ext cx="4617720" cy="4754880"/>
+          </a:xfrm>
+          <a:prstGeom prst="rect">
+            <a:avLst/>
+          </a:prstGeom>
+        </p:spPr>
+      </p:pic>
+      <p:sp>
+        <p:nvSpPr>
+          <p:cNvPr id="15" name="Rectangle 14"/>
+          <p:cNvSpPr/>
+          <p:nvPr/>
+        </p:nvSpPr>
+        <p:spPr>
+          <a:xfrm>
+            <a:off x="502920" y="6035040"/>
+            <a:ext cx="10972800" cy="365760"/>
+          </a:xfrm>
+          <a:prstGeom prst="rect">
+            <a:avLst/>
+          </a:prstGeom>
+          <a:noFill/>
+          <a:ln>
+            <a:noFill/>
+          </a:ln>
+        </p:spPr>
+        <p:txBody>
+          <a:bodyPr wrap="square" lIns="0" tIns="0" rIns="0" bIns="0" rtlCol="0" anchor="t"/>
+          <a:lstStyle/>
+          <a:p>
+            <a:pPr algn="l"/>
+            <a:r>
+              <a:rPr sz="1000" b="0" i="1">
+                <a:solidFill>
+                  <a:srgbClr val="6B7280"/>
+                </a:solidFill>
+                <a:latin typeface="Calibri"/>
+              </a:rPr>
+              <a:t>연 6% · 매년 말 1,000만원 납입 가정. 단리는 각 납입액이 원금에만 이자가 붙는 경우.</a:t>
+            </a:r>
+          </a:p>
+        </p:txBody>
+      </p:sp>
+    </p:spTree>
+  </p:cSld>
+  <p:clrMapOvr>
+    <a:masterClrMapping/>
+  </p:clrMapOvr>
+  <p:timing>
+    <p:tnLst>
+      <p:par>
+        <p:cTn id="1" dur="indefinite" restart="never" nodeType="tmRoot">
+          <p:childTnLst>
+            <p:seq concurrent="1" nextAc="seek">
+              <p:cTn id="2" dur="indefinite" nodeType="mainSeq">
+                <p:childTnLst>
+                  <p:par>
+                    <p:cTn id="3" fill="hold">
+                      <p:stCondLst>
+                        <p:cond delay="indefinite"/>
+                      </p:stCondLst>
+                      <p:childTnLst>
+                        <p:par>
+                          <p:cTn id="4" fill="hold">
+                            <p:stCondLst>
+                              <p:cond delay="0"/>
+                            </p:stCondLst>
+                            <p:childTnLst>
+                              <p:par>
+                                <p:cTn id="5" presetID="2" presetClass="entr" presetSubtype="4" fill="hold" grpId="0" nodeType="clickEffect">
+                                  <p:stCondLst>
+                                    <p:cond delay="0"/>
+                                  </p:stCondLst>
+                                  <p:childTnLst>
+                                    <p:set>
+                                      <p:cBhvr>
+                                        <p:cTn id="6" dur="1" fill="hold">
+                                          <p:stCondLst>
+                                            <p:cond delay="0"/>
+                                          </p:stCondLst>
+                                        </p:cTn>
+                                        <p:tgtEl>
+                                          <p:spTgt spid="11"/>
+                                        </p:tgtEl>
+                                        <p:attrNameLst>
+                                          <p:attrName>style.visibility</p:attrName>
+                                        </p:attrNameLst>
+                                      </p:cBhvr>
+                                      <p:to>
+                                        <p:strVal val="visible"/>
+                                      </p:to>
+                                    </p:set>
+                                    <p:anim calcmode="lin" valueType="num">
+                                      <p:cBhvr additive="base">
+                                        <p:cTn id="7" dur="500" fill="hold"/>
+                                        <p:tgtEl>
+                                          <p:spTgt spid="11"/>
+                                        </p:tgtEl>
+                                        <p:attrNameLst>
+                                          <p:attrName>ppt_x</p:attrName>
+                                        </p:attrNameLst>
+                                      </p:cBhvr>
+                                      <p:tavLst>
+                                        <p:tav tm="0">
+                                          <p:val>
+                                            <p:strVal val="#ppt_x"/>
+                                          </p:val>
+                                        </p:tav>
+                                        <p:tav tm="100000">
+                                          <p:val>
+                                            <p:strVal val="#ppt_x"/>
+                                          </p:val>
+                                        </p:tav>
+                                      </p:tavLst>
+                                    </p:anim>
+                                    <p:anim calcmode="lin" valueType="num">
+                                      <p:cBhvr additive="base">
+                                        <p:cTn id="8" dur="500" fill="hold"/>
+                                        <p:tgtEl>
+                                          <p:spTgt spid="11"/>
+                                        </p:tgtEl>
+                                        <p:attrNameLst>
+                                          <p:attrName>ppt_y</p:attrName>
+                                        </p:attrNameLst>
+                                      </p:cBhvr>
+                                      <p:tavLst>
+                                        <p:tav tm="0">
+                                          <p:val>
+                                            <p:strVal val="1+#ppt_h/2"/>
+                                          </p:val>
+                                        </p:tav>
+                                        <p:tav tm="100000">
+                                          <p:val>
+                                            <p:strVal val="#ppt_y"/>
+                                          </p:val>
+                                        </p:tav>
+                                      </p:tavLst>
+                                    </p:anim>
+                                  </p:childTnLst>
+                                </p:cTn>
+                              </p:par>
+                              <p:par>
+                                <p:cTn id="9" presetID="2" presetClass="entr" presetSubtype="4" fill="hold" grpId="0" nodeType="withEffect">
+                                  <p:stCondLst>
+                                    <p:cond delay="0"/>
+                                  </p:stCondLst>
+                                  <p:childTnLst>
+                                    <p:set>
+                                      <p:cBhvr>
+                                        <p:cTn id="10" dur="1" fill="hold">
+                                          <p:stCondLst>
+                                            <p:cond delay="0"/>
+                                          </p:stCondLst>
+                                        </p:cTn>
+                                        <p:tgtEl>
+                                          <p:spTgt spid="12"/>
+                                        </p:tgtEl>
+                                        <p:attrNameLst>
+                                          <p:attrName>style.visibility</p:attrName>
+                                        </p:attrNameLst>
+                                      </p:cBhvr>
+                                      <p:to>
+                                        <p:strVal val="visible"/>
+                                      </p:to>
+                                    </p:set>
+                                    <p:anim calcmode="lin" valueType="num">
+                                      <p:cBhvr additive="base">
+                                        <p:cTn id="11" dur="500" fill="hold"/>
+                                        <p:tgtEl>
+                                          <p:spTgt spid="12"/>
+                                        </p:tgtEl>
+                                        <p:attrNameLst>
+                                          <p:attrName>ppt_x</p:attrName>
+                                        </p:attrNameLst>
+                                      </p:cBhvr>
+                                      <p:tavLst>
+                                        <p:tav tm="0">
+                                          <p:val>
+                                            <p:strVal val="#ppt_x"/>
+                                          </p:val>
+                                        </p:tav>
+                                        <p:tav tm="100000">
+                                          <p:val>
+                                            <p:strVal val="#ppt_x"/>
+                                          </p:val>
+                                        </p:tav>
+                                      </p:tavLst>
+                                    </p:anim>
+                                    <p:anim calcmode="lin" valueType="num">
+                                      <p:cBhvr additive="base">
+                                        <p:cTn id="12" dur="500" fill="hold"/>
+                                        <p:tgtEl>
+                                          <p:spTgt spid="12"/>
+                                        </p:tgtEl>
+                                        <p:attrNameLst>
+                                          <p:attrName>ppt_y</p:attrName>
+                                        </p:attrNameLst>
+                                      </p:cBhvr>
+                                      <p:tavLst>
+                                        <p:tav tm="0">
+                                          <p:val>
+                                            <p:strVal val="1+#ppt_h/2"/>
+                                          </p:val>
+                                        </p:tav>
+                                        <p:tav tm="100000">
+                                          <p:val>
+                                            <p:strVal val="#ppt_y"/>
+                                          </p:val>
+                                        </p:tav>
+                                      </p:tavLst>
+                                    </p:anim>
+                                  </p:childTnLst>
+                                </p:cTn>
+                              </p:par>
+                              <p:par>
+                                <p:cTn id="13" presetID="2" presetClass="entr" presetSubtype="4" fill="hold" grpId="0" nodeType="withEffect">
+                                  <p:stCondLst>
+                                    <p:cond delay="0"/>
+                                  </p:stCondLst>
+                                  <p:childTnLst>
+                                    <p:set>
+                                      <p:cBhvr>
+                                        <p:cTn id="14" dur="1" fill="hold">
+                                          <p:stCondLst>
+                                            <p:cond delay="0"/>
+                                          </p:stCondLst>
+                                        </p:cTn>
+                                        <p:tgtEl>
+                                          <p:spTgt spid="13"/>
+                                        </p:tgtEl>
+                                        <p:attrNameLst>
+                                          <p:attrName>style.visibility</p:attrName>
+                                        </p:attrNameLst>
+                                      </p:cBhvr>
+                                      <p:to>
+                                        <p:strVal val="visible"/>
+                                      </p:to>
+                                    </p:set>
+                                    <p:anim calcmode="lin" valueType="num">
+                                      <p:cBhvr additive="base">
+                                        <p:cTn id="15" dur="500" fill="hold"/>
+                                        <p:tgtEl>
+                                          <p:spTgt spid="13"/>
+                                        </p:tgtEl>
+                                        <p:attrNameLst>
+                                          <p:attrName>ppt_x</p:attrName>
+                                        </p:attrNameLst>
+                                      </p:cBhvr>
+                                      <p:tavLst>
+                                        <p:tav tm="0">
+                                          <p:val>
+                                            <p:strVal val="#ppt_x"/>
+                                          </p:val>
+                                        </p:tav>
+                                        <p:tav tm="100000">
+                                          <p:val>
+                                            <p:strVal val="#ppt_x"/>
+                                          </p:val>
+                                        </p:tav>
+                                      </p:tavLst>
+                                    </p:anim>
+                                    <p:anim calcmode="lin" valueType="num">
+                                      <p:cBhvr additive="base">
+                                        <p:cTn id="16" dur="500" fill="hold"/>
+                                        <p:tgtEl>
+                                          <p:spTgt spid="13"/>
+                                        </p:tgtEl>
+                                        <p:attrNameLst>
+                                          <p:attrName>ppt_y</p:attrName>
+                                        </p:attrNameLst>
+                                      </p:cBhvr>
+                                      <p:tavLst>
+                                        <p:tav tm="0">
+                                          <p:val>
+                                            <p:strVal val="1+#ppt_h/2"/>
+                                          </p:val>
+                                        </p:tav>
+                                        <p:tav tm="100000">
+                                          <p:val>
+                                            <p:strVal val="#ppt_y"/>
+                                          </p:val>
+                                        </p:tav>
+                                      </p:tavLst>
+                                    </p:anim>
+                                  </p:childTnLst>
+                                </p:cTn>
+                              </p:par>
+                            </p:childTnLst>
+                          </p:cTn>
+                        </p:par>
+                      </p:childTnLst>
+                    </p:cTn>
+                  </p:par>
+                  <p:par>
+                    <p:cTn id="17" fill="hold">
+                      <p:stCondLst>
+                        <p:cond delay="indefinite"/>
+                      </p:stCondLst>
+                      <p:childTnLst>
+                        <p:par>
+                          <p:cTn id="18" fill="hold">
+                            <p:stCondLst>
+                              <p:cond delay="0"/>
+                            </p:stCondLst>
+                            <p:childTnLst>
+                              <p:par>
+                                <p:cTn id="19" presetID="2" presetClass="entr" presetSubtype="4" fill="hold" nodeType="clickEffect">
+                                  <p:stCondLst>
+                                    <p:cond delay="0"/>
+                                  </p:stCondLst>
+                                  <p:childTnLst>
+                                    <p:set>
+                                      <p:cBhvr>
+                                        <p:cTn id="20" dur="1" fill="hold">
+                                          <p:stCondLst>
+                                            <p:cond delay="0"/>
+                                          </p:stCondLst>
+                                        </p:cTn>
+                                        <p:tgtEl>
+                                          <p:spTgt spid="14"/>
+                                        </p:tgtEl>
+                                        <p:attrNameLst>
+                                          <p:attrName>style.visibility</p:attrName>
+                                        </p:attrNameLst>
+                                      </p:cBhvr>
+                                      <p:to>
+                                        <p:strVal val="visible"/>
+                                      </p:to>
+                                    </p:set>
+                                    <p:anim calcmode="lin" valueType="num">
+                                      <p:cBhvr additive="base">
+                                        <p:cTn id="21" dur="500" fill="hold"/>
+                                        <p:tgtEl>
+                                          <p:spTgt spid="14"/>
+                                        </p:tgtEl>
+                                        <p:attrNameLst>
+                                          <p:attrName>ppt_x</p:attrName>
+                                        </p:attrNameLst>
+                                      </p:cBhvr>
+                                      <p:tavLst>
+                                        <p:tav tm="0">
+                                          <p:val>
+                                            <p:strVal val="#ppt_x"/>
+                                          </p:val>
+                                        </p:tav>
+                                        <p:tav tm="100000">
+                                          <p:val>
+                                            <p:strVal val="#ppt_x"/>
+                                          </p:val>
+                                        </p:tav>
+                                      </p:tavLst>
+                                    </p:anim>
+                                    <p:anim calcmode="lin" valueType="num">
+                                      <p:cBhvr additive="base">
+                                        <p:cTn id="22" dur="500" fill="hold"/>
+                                        <p:tgtEl>
+                                          <p:spTgt spid="14"/>
+                                        </p:tgtEl>
+                                        <p:attrNameLst>
+                                          <p:attrName>ppt_y</p:attrName>
+                                        </p:attrNameLst>
+                                      </p:cBhvr>
+                                      <p:tavLst>
+                                        <p:tav tm="0">
+                                          <p:val>
+                                            <p:strVal val="1+#ppt_h/2"/>
+                                          </p:val>
+                                        </p:tav>
+                                        <p:tav tm="100000">
+                                          <p:val>
+                                            <p:strVal val="#ppt_y"/>
+                                          </p:val>
+                                        </p:tav>
+                                      </p:tavLst>
+                                    </p:anim>
+                                  </p:childTnLst>
+                                </p:cTn>
+                              </p:par>
+                            </p:childTnLst>
+                          </p:cTn>
+                        </p:par>
+                      </p:childTnLst>
+                    </p:cTn>
+                  </p:par>
+                </p:childTnLst>
+              </p:cTn>
+              <p:prevCondLst>
+                <p:cond evt="onPrev" delay="0">
+                  <p:tgtEl>
+                    <p:sldTgt/>
+                  </p:tgtEl>
+                </p:cond>
+              </p:prevCondLst>
+              <p:nextCondLst>
+                <p:cond evt="onNext" delay="0">
+                  <p:tgtEl>
+                    <p:sldTgt/>
+                  </p:tgtEl>
+                </p:cond>
+              </p:nextCondLst>
+            </p:seq>
+          </p:childTnLst>
+        </p:cTn>
+      </p:par>
+    </p:tnLst>
+    <p:bldLst>
+      <p:bldP spid="11" grpId="0" animBg="1"/>
+      <p:bldP spid="12" grpId="0"/>
+      <p:bldP spid="13" grpId="0"/>
+    </p:bldLst>
+  </p:timing>
+</p:sld>
+</file>
+
+<file path=ppt/slides/slide5.xml><?xml version="1.0" encoding="utf-8"?>
+<p:sld xmlns:a="http://schemas.openxmlformats.org/drawingml/2006/main" xmlns:r="http://schemas.openxmlformats.org/officeDocument/2006/relationships" xmlns:p="http://schemas.openxmlformats.org/presentationml/2006/main">
+  <p:cSld>
+    <p:spTree>
+      <p:nvGrpSpPr>
         <p:cNvPr id="1" name="">
           <a:extLst>
             <a:ext uri="{FF2B5EF4-FFF2-40B4-BE49-F238E27FC236}">
@@ -22742,7 +24842,7 @@
 </p:sld>
 </file>
 
-<file path=ppt/slides/slide5.xml><?xml version="1.0" encoding="utf-8"?>
+<file path=ppt/slides/slide6.xml><?xml version="1.0" encoding="utf-8"?>
 <p:sld xmlns:a="http://schemas.openxmlformats.org/drawingml/2006/main" xmlns:r="http://schemas.openxmlformats.org/officeDocument/2006/relationships" xmlns:p="http://schemas.openxmlformats.org/presentationml/2006/main">
   <p:cSld>
     <p:spTree>
@@ -22869,7 +24969,7 @@
 </p:sld>
 </file>
 
-<file path=ppt/slides/slide6.xml><?xml version="1.0" encoding="utf-8"?>
+<file path=ppt/slides/slide7.xml><?xml version="1.0" encoding="utf-8"?>
 <p:sld xmlns:a="http://schemas.openxmlformats.org/drawingml/2006/main" xmlns:r="http://schemas.openxmlformats.org/officeDocument/2006/relationships" xmlns:p="http://schemas.openxmlformats.org/presentationml/2006/main">
   <p:cSld>
     <p:spTree>
@@ -23844,7 +25944,7 @@
 </p:sld>
 </file>
 
-<file path=ppt/slides/slide7.xml><?xml version="1.0" encoding="utf-8"?>
+<file path=ppt/slides/slide8.xml><?xml version="1.0" encoding="utf-8"?>
 <p:sld xmlns:a="http://schemas.openxmlformats.org/drawingml/2006/main" xmlns:r="http://schemas.openxmlformats.org/officeDocument/2006/relationships" xmlns:p="http://schemas.openxmlformats.org/presentationml/2006/main">
   <p:cSld>
     <p:spTree>
@@ -23943,7 +26043,7 @@
 </p:sld>
 </file>
 
-<file path=ppt/slides/slide8.xml><?xml version="1.0" encoding="utf-8"?>
+<file path=ppt/slides/slide9.xml><?xml version="1.0" encoding="utf-8"?>
 <p:sld xmlns:a="http://schemas.openxmlformats.org/drawingml/2006/main" xmlns:r="http://schemas.openxmlformats.org/officeDocument/2006/relationships" xmlns:p="http://schemas.openxmlformats.org/presentationml/2006/main">
   <p:cSld>
     <p:spTree>
@@ -24033,73 +26133,6 @@
     <p:extLst>
       <p:ext uri="{BB962C8B-B14F-4D97-AF65-F5344CB8AC3E}">
         <p14:creationId xmlns:p14="http://schemas.microsoft.com/office/powerpoint/2010/main" val="1486874279"/>
-      </p:ext>
-    </p:extLst>
-  </p:cSld>
-  <p:clrMapOvr>
-    <a:masterClrMapping/>
-  </p:clrMapOvr>
-</p:sld>
-</file>
-
-<file path=ppt/slides/slide9.xml><?xml version="1.0" encoding="utf-8"?>
-<p:sld xmlns:a="http://schemas.openxmlformats.org/drawingml/2006/main" xmlns:r="http://schemas.openxmlformats.org/officeDocument/2006/relationships" xmlns:p="http://schemas.openxmlformats.org/presentationml/2006/main">
-  <p:cSld>
-    <p:spTree>
-      <p:nvGrpSpPr>
-        <p:cNvPr id="1" name="">
-          <a:extLst>
-            <a:ext uri="{FF2B5EF4-FFF2-40B4-BE49-F238E27FC236}">
-              <a16:creationId xmlns:a16="http://schemas.microsoft.com/office/drawing/2014/main" id="{2CEC4169-BEEB-BD26-8462-F36138417872}"/>
-            </a:ext>
-          </a:extLst>
-        </p:cNvPr>
-        <p:cNvGrpSpPr/>
-        <p:nvPr/>
-      </p:nvGrpSpPr>
-      <p:grpSpPr>
-        <a:xfrm>
-          <a:off x="0" y="0"/>
-          <a:ext cx="0" cy="0"/>
-          <a:chOff x="0" y="0"/>
-          <a:chExt cx="0" cy="0"/>
-        </a:xfrm>
-      </p:grpSpPr>
-      <p:sp>
-        <p:nvSpPr>
-          <p:cNvPr id="2" name="Title 1">
-            <a:extLst>
-              <a:ext uri="{FF2B5EF4-FFF2-40B4-BE49-F238E27FC236}">
-                <a16:creationId xmlns:a16="http://schemas.microsoft.com/office/drawing/2014/main" id="{0ED05527-06FA-6411-2815-0ADA9779BAF8}"/>
-              </a:ext>
-            </a:extLst>
-          </p:cNvPr>
-          <p:cNvSpPr>
-            <a:spLocks noGrp="1"/>
-          </p:cNvSpPr>
-          <p:nvPr>
-            <p:ph type="title"/>
-          </p:nvPr>
-        </p:nvSpPr>
-        <p:spPr/>
-        <p:txBody>
-          <a:bodyPr/>
-          <a:lstStyle/>
-          <a:p>
-            <a:r>
-              <a:rPr lang="ko-KR" altLang="en-US" dirty="0">
-                <a:latin typeface="+mn-lt"/>
-                <a:ea typeface="맑은 고딕"/>
-              </a:rPr>
-              <a:t>2. 미스터 마켓(Mr. Market) – 가격 대 가치</a:t>
-            </a:r>
-          </a:p>
-        </p:txBody>
-      </p:sp>
-    </p:spTree>
-    <p:extLst>
-      <p:ext uri="{BB962C8B-B14F-4D97-AF65-F5344CB8AC3E}">
-        <p14:creationId xmlns:p14="http://schemas.microsoft.com/office/powerpoint/2010/main" val="3516434960"/>
       </p:ext>
     </p:extLst>
   </p:cSld>
